--- a/voting_ballots.pptx
+++ b/voting_ballots.pptx
@@ -4,6 +4,9 @@
   <p:sldMasterIdLst>
     <p:sldMasterId id="2147483648" r:id="rId1"/>
   </p:sldMasterIdLst>
+  <p:notesMasterIdLst>
+    <p:notesMasterId r:id="rId9"/>
+  </p:notesMasterIdLst>
   <p:sldIdLst>
     <p:sldId id="256" r:id="rId2"/>
     <p:sldId id="257" r:id="rId3"/>
@@ -13,9 +16,6 @@
     <p:sldId id="261" r:id="rId7"/>
     <p:sldId id="262" r:id="rId8"/>
   </p:sldIdLst>
-  <p:notesMasterIdLst>
-    <p:notesMasterId r:id="rId9"/>
-  </p:notesMasterIdLst>
   <p:sldSz cx="12192000" cy="6858000"/>
   <p:notesSz cx="6858000" cy="12192000"/>
   <p:defaultTextStyle>
@@ -110,6 +110,11 @@
       </a:defRPr>
     </a:lvl9pPr>
   </p:defaultTextStyle>
+  <p:extLst>
+    <p:ext uri="{EFAFB233-063F-42B5-8137-9DF3F51BA10A}">
+      <p15:sldGuideLst xmlns:p15="http://schemas.microsoft.com/office/powerpoint/2012/main"/>
+    </p:ext>
+  </p:extLst>
 </p:presentation>
 </file>
 
@@ -135,241 +140,17 @@
           <a:chExt cx="0" cy="0"/>
         </a:xfrm>
       </p:grpSpPr>
-      <p:sp>
-        <p:nvSpPr>
-          <p:cNvPr id="2" name="Header Placeholder 1"/>
-          <p:cNvSpPr>
-            <a:spLocks noGrp="1"/>
-          </p:cNvSpPr>
-          <p:nvPr>
-            <p:ph type="hdr" sz="quarter"/>
-          </p:nvPr>
-        </p:nvSpPr>
-        <p:spPr>
-          <a:xfrm>
-            <a:off x="0" y="0"/>
-            <a:ext cx="2971800" cy="458788"/>
-          </a:xfrm>
-          <a:prstGeom prst="rect">
-            <a:avLst/>
-          </a:prstGeom>
-        </p:spPr>
-        <p:txBody>
-          <a:bodyPr vert="horz" lIns="91440" tIns="45720" rIns="91440" bIns="45720" rtlCol="0"/>
-          <a:lstStyle>
-            <a:lvl1pPr algn="l">
-              <a:defRPr sz="1200"/>
-            </a:lvl1pPr>
-          </a:lstStyle>
-          <a:p>
-            <a:endParaRPr lang="en-US"/>
-          </a:p>
-        </p:txBody>
-      </p:sp>
-      <p:sp>
-        <p:nvSpPr>
-          <p:cNvPr id="3" name="Date Placeholder 2"/>
-          <p:cNvSpPr>
-            <a:spLocks noGrp="1"/>
-          </p:cNvSpPr>
-          <p:nvPr>
-            <p:ph type="dt" idx="1"/>
-          </p:nvPr>
-        </p:nvSpPr>
-        <p:spPr>
-          <a:xfrm>
-            <a:off x="3884613" y="0"/>
-            <a:ext cx="2971800" cy="458788"/>
-          </a:xfrm>
-          <a:prstGeom prst="rect">
-            <a:avLst/>
-          </a:prstGeom>
-        </p:spPr>
-        <p:txBody>
-          <a:bodyPr vert="horz" lIns="91440" tIns="45720" rIns="91440" bIns="45720" rtlCol="0"/>
-          <a:lstStyle>
-            <a:lvl1pPr algn="r">
-              <a:defRPr sz="1200"/>
-            </a:lvl1pPr>
-          </a:lstStyle>
-          <a:p>
-            <a:fld id="{5282F153-3F37-0F45-9E97-73ACFA13230C}" type="datetimeFigureOut">
-              <a:rPr lang="en-US"/>
-              <a:t>7/23/19</a:t>
-            </a:fld>
-            <a:endParaRPr lang="en-US"/>
-          </a:p>
-        </p:txBody>
-      </p:sp>
-      <p:sp>
-        <p:nvSpPr>
-          <p:cNvPr id="4" name="Slide Image Placeholder 3"/>
-          <p:cNvSpPr>
-            <a:spLocks noGrp="1" noRot="1" noChangeAspect="1"/>
-          </p:cNvSpPr>
-          <p:nvPr>
-            <p:ph type="sldImg" idx="2"/>
-          </p:nvPr>
-        </p:nvSpPr>
-        <p:spPr>
-          <a:xfrm>
-            <a:off x="685800" y="1143000"/>
-            <a:ext cx="5486400" cy="3086100"/>
-          </a:xfrm>
-          <a:prstGeom prst="rect">
-            <a:avLst/>
-          </a:prstGeom>
-          <a:noFill/>
-          <a:ln w="12700">
-            <a:solidFill>
-              <a:prstClr val="black"/>
-            </a:solidFill>
-          </a:ln>
-        </p:spPr>
-        <p:txBody>
-          <a:bodyPr vert="horz" lIns="91440" tIns="45720" rIns="91440" bIns="45720" rtlCol="0" anchor="ctr"/>
-          <a:lstStyle/>
-          <a:p>
-            <a:endParaRPr lang="en-US"/>
-          </a:p>
-        </p:txBody>
-      </p:sp>
-      <p:sp>
-        <p:nvSpPr>
-          <p:cNvPr id="5" name="Notes Placeholder 4"/>
-          <p:cNvSpPr>
-            <a:spLocks noGrp="1"/>
-          </p:cNvSpPr>
-          <p:nvPr>
-            <p:ph type="body" sz="quarter" idx="3"/>
-          </p:nvPr>
-        </p:nvSpPr>
-        <p:spPr>
-          <a:xfrm>
-            <a:off x="685800" y="4400550"/>
-            <a:ext cx="5486400" cy="3600450"/>
-          </a:xfrm>
-          <a:prstGeom prst="rect">
-            <a:avLst/>
-          </a:prstGeom>
-        </p:spPr>
-        <p:txBody>
-          <a:bodyPr vert="horz" lIns="91440" tIns="45720" rIns="91440" bIns="45720" rtlCol="0"/>
-          <a:lstStyle/>
-          <a:p>
-            <a:pPr lvl="0"/>
-            <a:r>
-              <a:rPr lang="en-US"/>
-              <a:t>Click to edit Master text styles</a:t>
-            </a:r>
-          </a:p>
-          <a:p>
-            <a:pPr lvl="1"/>
-            <a:r>
-              <a:rPr lang="en-US"/>
-              <a:t>Second level</a:t>
-            </a:r>
-          </a:p>
-          <a:p>
-            <a:pPr lvl="2"/>
-            <a:r>
-              <a:rPr lang="en-US"/>
-              <a:t>Third level</a:t>
-            </a:r>
-          </a:p>
-          <a:p>
-            <a:pPr lvl="3"/>
-            <a:r>
-              <a:rPr lang="en-US"/>
-              <a:t>Fourth level</a:t>
-            </a:r>
-          </a:p>
-          <a:p>
-            <a:pPr lvl="4"/>
-            <a:r>
-              <a:rPr lang="en-US"/>
-              <a:t>Fifth level</a:t>
-            </a:r>
-          </a:p>
-        </p:txBody>
-      </p:sp>
-      <p:sp>
-        <p:nvSpPr>
-          <p:cNvPr id="6" name="Footer Placeholder 5"/>
-          <p:cNvSpPr>
-            <a:spLocks noGrp="1"/>
-          </p:cNvSpPr>
-          <p:nvPr>
-            <p:ph type="ftr" sz="quarter" idx="4"/>
-          </p:nvPr>
-        </p:nvSpPr>
-        <p:spPr>
-          <a:xfrm>
-            <a:off x="0" y="8685213"/>
-            <a:ext cx="2971800" cy="458787"/>
-          </a:xfrm>
-          <a:prstGeom prst="rect">
-            <a:avLst/>
-          </a:prstGeom>
-        </p:spPr>
-        <p:txBody>
-          <a:bodyPr vert="horz" lIns="91440" tIns="45720" rIns="91440" bIns="45720" rtlCol="0" anchor="b"/>
-          <a:lstStyle>
-            <a:lvl1pPr algn="l">
-              <a:defRPr sz="1200"/>
-            </a:lvl1pPr>
-          </a:lstStyle>
-          <a:p>
-            <a:endParaRPr lang="en-US"/>
-          </a:p>
-        </p:txBody>
-      </p:sp>
-      <p:sp>
-        <p:nvSpPr>
-          <p:cNvPr id="7" name="Slide Number Placeholder 6"/>
-          <p:cNvSpPr>
-            <a:spLocks noGrp="1"/>
-          </p:cNvSpPr>
-          <p:nvPr>
-            <p:ph type="sldNum" sz="quarter" idx="5"/>
-          </p:nvPr>
-        </p:nvSpPr>
-        <p:spPr>
-          <a:xfrm>
-            <a:off x="3884613" y="8685213"/>
-            <a:ext cx="2971800" cy="458787"/>
-          </a:xfrm>
-          <a:prstGeom prst="rect">
-            <a:avLst/>
-          </a:prstGeom>
-        </p:spPr>
-        <p:txBody>
-          <a:bodyPr vert="horz" lIns="91440" tIns="45720" rIns="91440" bIns="45720" rtlCol="0" anchor="b"/>
-          <a:lstStyle>
-            <a:lvl1pPr algn="r">
-              <a:defRPr sz="1200"/>
-            </a:lvl1pPr>
-          </a:lstStyle>
-          <a:p>
-            <a:fld id="{CE5E9CC1-C706-0F49-92D6-E571CC5EEA8F}" type="slidenum">
-              <a:rPr lang="en-US"/>
-              <a:t>‹#›</a:t>
-            </a:fld>
-            <a:endParaRPr lang="en-US"/>
-          </a:p>
-        </p:txBody>
-      </p:sp>
     </p:spTree>
     <p:extLst>
       <p:ext uri="{BB962C8B-B14F-4D97-AF65-F5344CB8AC3E}">
-        <p14:creationId xmlns:p14="http://schemas.microsoft.com/office/powerpoint/2010/main" val="1024086991"/>
+        <p14:creationId xmlns:p14="http://schemas.microsoft.com/office/powerpoint/2010/main" val="460419988"/>
       </p:ext>
     </p:extLst>
   </p:cSld>
   <p:clrMap bg1="lt1" tx1="dk1" bg2="lt2" tx2="dk2" accent1="accent1" accent2="accent2" accent3="accent3" accent4="accent4" accent5="accent5" accent6="accent6" hlink="hlink" folHlink="folHlink"/>
   <p:notesStyle>
     <a:lvl1pPr marL="0" algn="l" defTabSz="914400" rtl="0" eaLnBrk="1" latinLnBrk="0" hangingPunct="1">
-      <a:defRPr sz="1200" kern="1200">
+      <a:defRPr kumimoji="1" sz="1200" kern="1200">
         <a:solidFill>
           <a:schemeClr val="tx1"/>
         </a:solidFill>
@@ -379,7 +160,7 @@
       </a:defRPr>
     </a:lvl1pPr>
     <a:lvl2pPr marL="457200" algn="l" defTabSz="914400" rtl="0" eaLnBrk="1" latinLnBrk="0" hangingPunct="1">
-      <a:defRPr sz="1200" kern="1200">
+      <a:defRPr kumimoji="1" sz="1200" kern="1200">
         <a:solidFill>
           <a:schemeClr val="tx1"/>
         </a:solidFill>
@@ -389,7 +170,7 @@
       </a:defRPr>
     </a:lvl2pPr>
     <a:lvl3pPr marL="914400" algn="l" defTabSz="914400" rtl="0" eaLnBrk="1" latinLnBrk="0" hangingPunct="1">
-      <a:defRPr sz="1200" kern="1200">
+      <a:defRPr kumimoji="1" sz="1200" kern="1200">
         <a:solidFill>
           <a:schemeClr val="tx1"/>
         </a:solidFill>
@@ -399,7 +180,7 @@
       </a:defRPr>
     </a:lvl3pPr>
     <a:lvl4pPr marL="1371600" algn="l" defTabSz="914400" rtl="0" eaLnBrk="1" latinLnBrk="0" hangingPunct="1">
-      <a:defRPr sz="1200" kern="1200">
+      <a:defRPr kumimoji="1" sz="1200" kern="1200">
         <a:solidFill>
           <a:schemeClr val="tx1"/>
         </a:solidFill>
@@ -409,7 +190,7 @@
       </a:defRPr>
     </a:lvl4pPr>
     <a:lvl5pPr marL="1828800" algn="l" defTabSz="914400" rtl="0" eaLnBrk="1" latinLnBrk="0" hangingPunct="1">
-      <a:defRPr sz="1200" kern="1200">
+      <a:defRPr kumimoji="1" sz="1200" kern="1200">
         <a:solidFill>
           <a:schemeClr val="tx1"/>
         </a:solidFill>
@@ -419,7 +200,7 @@
       </a:defRPr>
     </a:lvl5pPr>
     <a:lvl6pPr marL="2286000" algn="l" defTabSz="914400" rtl="0" eaLnBrk="1" latinLnBrk="0" hangingPunct="1">
-      <a:defRPr sz="1200" kern="1200">
+      <a:defRPr kumimoji="1" sz="1200" kern="1200">
         <a:solidFill>
           <a:schemeClr val="tx1"/>
         </a:solidFill>
@@ -429,7 +210,7 @@
       </a:defRPr>
     </a:lvl6pPr>
     <a:lvl7pPr marL="2743200" algn="l" defTabSz="914400" rtl="0" eaLnBrk="1" latinLnBrk="0" hangingPunct="1">
-      <a:defRPr sz="1200" kern="1200">
+      <a:defRPr kumimoji="1" sz="1200" kern="1200">
         <a:solidFill>
           <a:schemeClr val="tx1"/>
         </a:solidFill>
@@ -439,7 +220,7 @@
       </a:defRPr>
     </a:lvl7pPr>
     <a:lvl8pPr marL="3200400" algn="l" defTabSz="914400" rtl="0" eaLnBrk="1" latinLnBrk="0" hangingPunct="1">
-      <a:defRPr sz="1200" kern="1200">
+      <a:defRPr kumimoji="1" sz="1200" kern="1200">
         <a:solidFill>
           <a:schemeClr val="tx1"/>
         </a:solidFill>
@@ -449,7 +230,7 @@
       </a:defRPr>
     </a:lvl8pPr>
     <a:lvl9pPr marL="3657600" algn="l" defTabSz="914400" rtl="0" eaLnBrk="1" latinLnBrk="0" hangingPunct="1">
-      <a:defRPr sz="1200" kern="1200">
+      <a:defRPr kumimoji="1" sz="1200" kern="1200">
         <a:solidFill>
           <a:schemeClr val="tx1"/>
         </a:solidFill>
@@ -506,10 +287,6 @@
           <a:bodyPr/>
           <a:lstStyle/>
           <a:p>
-            <a:r>
-              <a:rPr lang="en-US" dirty="0"/>
-              <a:t/>
-            </a:r>
             <a:endParaRPr lang="en-US" dirty="0"/>
           </a:p>
         </p:txBody>
@@ -594,10 +371,6 @@
           <a:bodyPr/>
           <a:lstStyle/>
           <a:p>
-            <a:r>
-              <a:rPr lang="en-US" dirty="0"/>
-              <a:t/>
-            </a:r>
             <a:endParaRPr lang="en-US" dirty="0"/>
           </a:p>
         </p:txBody>
@@ -682,10 +455,6 @@
           <a:bodyPr/>
           <a:lstStyle/>
           <a:p>
-            <a:r>
-              <a:rPr lang="en-US" dirty="0"/>
-              <a:t/>
-            </a:r>
             <a:endParaRPr lang="en-US" dirty="0"/>
           </a:p>
         </p:txBody>
@@ -770,10 +539,6 @@
           <a:bodyPr/>
           <a:lstStyle/>
           <a:p>
-            <a:r>
-              <a:rPr lang="en-US" dirty="0"/>
-              <a:t/>
-            </a:r>
             <a:endParaRPr lang="en-US" dirty="0"/>
           </a:p>
         </p:txBody>
@@ -858,10 +623,6 @@
           <a:bodyPr/>
           <a:lstStyle/>
           <a:p>
-            <a:r>
-              <a:rPr lang="en-US" dirty="0"/>
-              <a:t/>
-            </a:r>
             <a:endParaRPr lang="en-US" dirty="0"/>
           </a:p>
         </p:txBody>
@@ -946,10 +707,6 @@
           <a:bodyPr/>
           <a:lstStyle/>
           <a:p>
-            <a:r>
-              <a:rPr lang="en-US" dirty="0"/>
-              <a:t/>
-            </a:r>
             <a:endParaRPr lang="en-US" dirty="0"/>
           </a:p>
         </p:txBody>
@@ -1034,10 +791,6 @@
           <a:bodyPr/>
           <a:lstStyle/>
           <a:p>
-            <a:r>
-              <a:rPr lang="en-US" dirty="0"/>
-              <a:t/>
-            </a:r>
             <a:endParaRPr lang="en-US" dirty="0"/>
           </a:p>
         </p:txBody>
@@ -1111,6 +864,11 @@
 <file path=ppt/slideMasters/slideMaster1.xml><?xml version="1.0" encoding="utf-8"?>
 <p:sldMaster xmlns:a="http://schemas.openxmlformats.org/drawingml/2006/main" xmlns:r="http://schemas.openxmlformats.org/officeDocument/2006/relationships" xmlns:p="http://schemas.openxmlformats.org/presentationml/2006/main">
   <p:cSld>
+    <p:bg>
+      <p:bgRef idx="1001">
+        <a:schemeClr val="bg1"/>
+      </p:bgRef>
+    </p:bg>
     <p:spTree>
       <p:nvGrpSpPr>
         <p:cNvPr id="1" name=""/>
@@ -1393,6 +1151,7 @@
         <a:solidFill>
           <a:srgbClr val="FFFFFF"/>
         </a:solidFill>
+        <a:effectLst/>
       </p:bgPr>
     </p:bg>
     <p:spTree>
@@ -1433,6 +1192,13 @@
             <a:prstDash val="dash"/>
           </a:ln>
         </p:spPr>
+        <p:txBody>
+          <a:bodyPr/>
+          <a:lstStyle/>
+          <a:p>
+            <a:endParaRPr lang="ja-JP" altLang="en-US"/>
+          </a:p>
+        </p:txBody>
       </p:sp>
       <p:sp>
         <p:nvSpPr>
@@ -1460,17 +1226,24 @@
             <a:prstDash val="solid"/>
           </a:ln>
         </p:spPr>
+        <p:txBody>
+          <a:bodyPr/>
+          <a:lstStyle/>
+          <a:p>
+            <a:endParaRPr lang="ja-JP" altLang="en-US"/>
+          </a:p>
+        </p:txBody>
       </p:sp>
       <p:pic>
         <p:nvPicPr>
-          <p:cNvPr id="4" name="Image 0" descr="/tmp/claude-0/-home-user-WeddingInvitations/2c9849ff-e4cc-5683-ac72-2a6c69aa5261/scratchpad/cat_icon.png">    </p:cNvPr>
+          <p:cNvPr id="4" name="Image 0" descr="/tmp/claude-0/-home-user-WeddingInvitations/2c9849ff-e4cc-5683-ac72-2a6c69aa5261/scratchpad/cat_icon.png"/>
           <p:cNvPicPr>
             <a:picLocks noChangeAspect="1"/>
           </p:cNvPicPr>
           <p:nvPr/>
         </p:nvPicPr>
         <p:blipFill>
-          <a:blip r:embed="rId1"/>
+          <a:blip r:embed="rId3"/>
           <a:stretch>
             <a:fillRect/>
           </a:stretch>
@@ -1487,14 +1260,14 @@
       </p:pic>
       <p:pic>
         <p:nvPicPr>
-          <p:cNvPr id="5" name="Image 1" descr="/tmp/claude-0/-home-user-WeddingInvitations/2c9849ff-e4cc-5683-ac72-2a6c69aa5261/scratchpad/cat_icon.png">    </p:cNvPr>
+          <p:cNvPr id="5" name="Image 1" descr="/tmp/claude-0/-home-user-WeddingInvitations/2c9849ff-e4cc-5683-ac72-2a6c69aa5261/scratchpad/cat_icon.png"/>
           <p:cNvPicPr>
             <a:picLocks noChangeAspect="1"/>
           </p:cNvPicPr>
           <p:nvPr/>
         </p:nvPicPr>
         <p:blipFill>
-          <a:blip r:embed="rId2"/>
+          <a:blip r:embed="rId3"/>
           <a:stretch>
             <a:fillRect/>
           </a:stretch>
@@ -1530,7 +1303,7 @@
           <a:bodyPr wrap="square" lIns="0" tIns="0" rIns="0" bIns="0" rtlCol="0" anchor="ctr"/>
           <a:lstStyle/>
           <a:p>
-            <a:pPr algn="ctr" indent="0" marL="0">
+            <a:pPr marL="0" indent="0" algn="ctr">
               <a:buNone/>
             </a:pPr>
             <a:r>
@@ -1569,7 +1342,7 @@
           <a:bodyPr wrap="square" lIns="0" tIns="0" rIns="0" bIns="0" rtlCol="0" anchor="ctr"/>
           <a:lstStyle/>
           <a:p>
-            <a:pPr algn="ctr" indent="0" marL="0">
+            <a:pPr marL="0" indent="0" algn="ctr">
               <a:buNone/>
             </a:pPr>
             <a:r>
@@ -1611,6 +1384,13 @@
             <a:prstDash val="dash"/>
           </a:ln>
         </p:spPr>
+        <p:txBody>
+          <a:bodyPr/>
+          <a:lstStyle/>
+          <a:p>
+            <a:endParaRPr lang="ja-JP" altLang="en-US"/>
+          </a:p>
+        </p:txBody>
       </p:sp>
       <p:sp>
         <p:nvSpPr>
@@ -1638,10 +1418,17 @@
             <a:prstDash val="solid"/>
           </a:ln>
         </p:spPr>
+        <p:txBody>
+          <a:bodyPr/>
+          <a:lstStyle/>
+          <a:p>
+            <a:endParaRPr lang="ja-JP" altLang="en-US"/>
+          </a:p>
+        </p:txBody>
       </p:sp>
       <p:pic>
         <p:nvPicPr>
-          <p:cNvPr id="10" name="Image 2" descr="/tmp/claude-0/-home-user-WeddingInvitations/2c9849ff-e4cc-5683-ac72-2a6c69aa5261/scratchpad/cat_icon.png">    </p:cNvPr>
+          <p:cNvPr id="10" name="Image 2" descr="/tmp/claude-0/-home-user-WeddingInvitations/2c9849ff-e4cc-5683-ac72-2a6c69aa5261/scratchpad/cat_icon.png"/>
           <p:cNvPicPr>
             <a:picLocks noChangeAspect="1"/>
           </p:cNvPicPr>
@@ -1665,14 +1452,14 @@
       </p:pic>
       <p:pic>
         <p:nvPicPr>
-          <p:cNvPr id="11" name="Image 3" descr="/tmp/claude-0/-home-user-WeddingInvitations/2c9849ff-e4cc-5683-ac72-2a6c69aa5261/scratchpad/cat_icon.png">    </p:cNvPr>
+          <p:cNvPr id="11" name="Image 3" descr="/tmp/claude-0/-home-user-WeddingInvitations/2c9849ff-e4cc-5683-ac72-2a6c69aa5261/scratchpad/cat_icon.png"/>
           <p:cNvPicPr>
             <a:picLocks noChangeAspect="1"/>
           </p:cNvPicPr>
           <p:nvPr/>
         </p:nvPicPr>
         <p:blipFill>
-          <a:blip r:embed="rId4"/>
+          <a:blip r:embed="rId3"/>
           <a:stretch>
             <a:fillRect/>
           </a:stretch>
@@ -1708,7 +1495,7 @@
           <a:bodyPr wrap="square" lIns="0" tIns="0" rIns="0" bIns="0" rtlCol="0" anchor="ctr"/>
           <a:lstStyle/>
           <a:p>
-            <a:pPr algn="ctr" indent="0" marL="0">
+            <a:pPr marL="0" indent="0" algn="ctr">
               <a:buNone/>
             </a:pPr>
             <a:r>
@@ -1747,7 +1534,7 @@
           <a:bodyPr wrap="square" lIns="0" tIns="0" rIns="0" bIns="0" rtlCol="0" anchor="ctr"/>
           <a:lstStyle/>
           <a:p>
-            <a:pPr algn="ctr" indent="0" marL="0">
+            <a:pPr marL="0" indent="0" algn="ctr">
               <a:buNone/>
             </a:pPr>
             <a:r>
@@ -1789,6 +1576,13 @@
             <a:prstDash val="dash"/>
           </a:ln>
         </p:spPr>
+        <p:txBody>
+          <a:bodyPr/>
+          <a:lstStyle/>
+          <a:p>
+            <a:endParaRPr lang="ja-JP" altLang="en-US"/>
+          </a:p>
+        </p:txBody>
       </p:sp>
       <p:sp>
         <p:nvSpPr>
@@ -1816,17 +1610,24 @@
             <a:prstDash val="solid"/>
           </a:ln>
         </p:spPr>
+        <p:txBody>
+          <a:bodyPr/>
+          <a:lstStyle/>
+          <a:p>
+            <a:endParaRPr lang="ja-JP" altLang="en-US"/>
+          </a:p>
+        </p:txBody>
       </p:sp>
       <p:pic>
         <p:nvPicPr>
-          <p:cNvPr id="16" name="Image 4" descr="/tmp/claude-0/-home-user-WeddingInvitations/2c9849ff-e4cc-5683-ac72-2a6c69aa5261/scratchpad/cat_icon.png">    </p:cNvPr>
+          <p:cNvPr id="16" name="Image 4" descr="/tmp/claude-0/-home-user-WeddingInvitations/2c9849ff-e4cc-5683-ac72-2a6c69aa5261/scratchpad/cat_icon.png"/>
           <p:cNvPicPr>
             <a:picLocks noChangeAspect="1"/>
           </p:cNvPicPr>
           <p:nvPr/>
         </p:nvPicPr>
         <p:blipFill>
-          <a:blip r:embed="rId5"/>
+          <a:blip r:embed="rId3"/>
           <a:stretch>
             <a:fillRect/>
           </a:stretch>
@@ -1843,14 +1644,14 @@
       </p:pic>
       <p:pic>
         <p:nvPicPr>
-          <p:cNvPr id="17" name="Image 5" descr="/tmp/claude-0/-home-user-WeddingInvitations/2c9849ff-e4cc-5683-ac72-2a6c69aa5261/scratchpad/cat_icon.png">    </p:cNvPr>
+          <p:cNvPr id="17" name="Image 5" descr="/tmp/claude-0/-home-user-WeddingInvitations/2c9849ff-e4cc-5683-ac72-2a6c69aa5261/scratchpad/cat_icon.png"/>
           <p:cNvPicPr>
             <a:picLocks noChangeAspect="1"/>
           </p:cNvPicPr>
           <p:nvPr/>
         </p:nvPicPr>
         <p:blipFill>
-          <a:blip r:embed="rId6"/>
+          <a:blip r:embed="rId3"/>
           <a:stretch>
             <a:fillRect/>
           </a:stretch>
@@ -1886,7 +1687,7 @@
           <a:bodyPr wrap="square" lIns="0" tIns="0" rIns="0" bIns="0" rtlCol="0" anchor="ctr"/>
           <a:lstStyle/>
           <a:p>
-            <a:pPr algn="ctr" indent="0" marL="0">
+            <a:pPr marL="0" indent="0" algn="ctr">
               <a:buNone/>
             </a:pPr>
             <a:r>
@@ -1925,7 +1726,7 @@
           <a:bodyPr wrap="square" lIns="0" tIns="0" rIns="0" bIns="0" rtlCol="0" anchor="ctr"/>
           <a:lstStyle/>
           <a:p>
-            <a:pPr algn="ctr" indent="0" marL="0">
+            <a:pPr marL="0" indent="0" algn="ctr">
               <a:buNone/>
             </a:pPr>
             <a:r>
@@ -1967,6 +1768,13 @@
             <a:prstDash val="dash"/>
           </a:ln>
         </p:spPr>
+        <p:txBody>
+          <a:bodyPr/>
+          <a:lstStyle/>
+          <a:p>
+            <a:endParaRPr lang="ja-JP" altLang="en-US"/>
+          </a:p>
+        </p:txBody>
       </p:sp>
       <p:sp>
         <p:nvSpPr>
@@ -1994,17 +1802,24 @@
             <a:prstDash val="solid"/>
           </a:ln>
         </p:spPr>
+        <p:txBody>
+          <a:bodyPr/>
+          <a:lstStyle/>
+          <a:p>
+            <a:endParaRPr lang="ja-JP" altLang="en-US"/>
+          </a:p>
+        </p:txBody>
       </p:sp>
       <p:pic>
         <p:nvPicPr>
-          <p:cNvPr id="22" name="Image 6" descr="/tmp/claude-0/-home-user-WeddingInvitations/2c9849ff-e4cc-5683-ac72-2a6c69aa5261/scratchpad/cat_icon.png">    </p:cNvPr>
+          <p:cNvPr id="22" name="Image 6" descr="/tmp/claude-0/-home-user-WeddingInvitations/2c9849ff-e4cc-5683-ac72-2a6c69aa5261/scratchpad/cat_icon.png"/>
           <p:cNvPicPr>
             <a:picLocks noChangeAspect="1"/>
           </p:cNvPicPr>
           <p:nvPr/>
         </p:nvPicPr>
         <p:blipFill>
-          <a:blip r:embed="rId7"/>
+          <a:blip r:embed="rId3"/>
           <a:stretch>
             <a:fillRect/>
           </a:stretch>
@@ -2021,14 +1836,14 @@
       </p:pic>
       <p:pic>
         <p:nvPicPr>
-          <p:cNvPr id="23" name="Image 7" descr="/tmp/claude-0/-home-user-WeddingInvitations/2c9849ff-e4cc-5683-ac72-2a6c69aa5261/scratchpad/cat_icon.png">    </p:cNvPr>
+          <p:cNvPr id="23" name="Image 7" descr="/tmp/claude-0/-home-user-WeddingInvitations/2c9849ff-e4cc-5683-ac72-2a6c69aa5261/scratchpad/cat_icon.png"/>
           <p:cNvPicPr>
             <a:picLocks noChangeAspect="1"/>
           </p:cNvPicPr>
           <p:nvPr/>
         </p:nvPicPr>
         <p:blipFill>
-          <a:blip r:embed="rId8"/>
+          <a:blip r:embed="rId3"/>
           <a:stretch>
             <a:fillRect/>
           </a:stretch>
@@ -2064,7 +1879,7 @@
           <a:bodyPr wrap="square" lIns="0" tIns="0" rIns="0" bIns="0" rtlCol="0" anchor="ctr"/>
           <a:lstStyle/>
           <a:p>
-            <a:pPr algn="ctr" indent="0" marL="0">
+            <a:pPr marL="0" indent="0" algn="ctr">
               <a:buNone/>
             </a:pPr>
             <a:r>
@@ -2103,7 +1918,7 @@
           <a:bodyPr wrap="square" lIns="0" tIns="0" rIns="0" bIns="0" rtlCol="0" anchor="ctr"/>
           <a:lstStyle/>
           <a:p>
-            <a:pPr algn="ctr" indent="0" marL="0">
+            <a:pPr marL="0" indent="0" algn="ctr">
               <a:buNone/>
             </a:pPr>
             <a:r>
@@ -2145,6 +1960,13 @@
             <a:prstDash val="dash"/>
           </a:ln>
         </p:spPr>
+        <p:txBody>
+          <a:bodyPr/>
+          <a:lstStyle/>
+          <a:p>
+            <a:endParaRPr lang="ja-JP" altLang="en-US"/>
+          </a:p>
+        </p:txBody>
       </p:sp>
       <p:sp>
         <p:nvSpPr>
@@ -2172,17 +1994,24 @@
             <a:prstDash val="solid"/>
           </a:ln>
         </p:spPr>
+        <p:txBody>
+          <a:bodyPr/>
+          <a:lstStyle/>
+          <a:p>
+            <a:endParaRPr lang="ja-JP" altLang="en-US"/>
+          </a:p>
+        </p:txBody>
       </p:sp>
       <p:pic>
         <p:nvPicPr>
-          <p:cNvPr id="28" name="Image 8" descr="/tmp/claude-0/-home-user-WeddingInvitations/2c9849ff-e4cc-5683-ac72-2a6c69aa5261/scratchpad/cat_icon.png">    </p:cNvPr>
+          <p:cNvPr id="28" name="Image 8" descr="/tmp/claude-0/-home-user-WeddingInvitations/2c9849ff-e4cc-5683-ac72-2a6c69aa5261/scratchpad/cat_icon.png"/>
           <p:cNvPicPr>
             <a:picLocks noChangeAspect="1"/>
           </p:cNvPicPr>
           <p:nvPr/>
         </p:nvPicPr>
         <p:blipFill>
-          <a:blip r:embed="rId9"/>
+          <a:blip r:embed="rId3"/>
           <a:stretch>
             <a:fillRect/>
           </a:stretch>
@@ -2199,14 +2028,14 @@
       </p:pic>
       <p:pic>
         <p:nvPicPr>
-          <p:cNvPr id="29" name="Image 9" descr="/tmp/claude-0/-home-user-WeddingInvitations/2c9849ff-e4cc-5683-ac72-2a6c69aa5261/scratchpad/cat_icon.png">    </p:cNvPr>
+          <p:cNvPr id="29" name="Image 9" descr="/tmp/claude-0/-home-user-WeddingInvitations/2c9849ff-e4cc-5683-ac72-2a6c69aa5261/scratchpad/cat_icon.png"/>
           <p:cNvPicPr>
             <a:picLocks noChangeAspect="1"/>
           </p:cNvPicPr>
           <p:nvPr/>
         </p:nvPicPr>
         <p:blipFill>
-          <a:blip r:embed="rId10"/>
+          <a:blip r:embed="rId3"/>
           <a:stretch>
             <a:fillRect/>
           </a:stretch>
@@ -2242,7 +2071,7 @@
           <a:bodyPr wrap="square" lIns="0" tIns="0" rIns="0" bIns="0" rtlCol="0" anchor="ctr"/>
           <a:lstStyle/>
           <a:p>
-            <a:pPr algn="ctr" indent="0" marL="0">
+            <a:pPr marL="0" indent="0" algn="ctr">
               <a:buNone/>
             </a:pPr>
             <a:r>
@@ -2281,7 +2110,7 @@
           <a:bodyPr wrap="square" lIns="0" tIns="0" rIns="0" bIns="0" rtlCol="0" anchor="ctr"/>
           <a:lstStyle/>
           <a:p>
-            <a:pPr algn="ctr" indent="0" marL="0">
+            <a:pPr marL="0" indent="0" algn="ctr">
               <a:buNone/>
             </a:pPr>
             <a:r>
@@ -2323,6 +2152,13 @@
             <a:prstDash val="dash"/>
           </a:ln>
         </p:spPr>
+        <p:txBody>
+          <a:bodyPr/>
+          <a:lstStyle/>
+          <a:p>
+            <a:endParaRPr lang="ja-JP" altLang="en-US"/>
+          </a:p>
+        </p:txBody>
       </p:sp>
       <p:sp>
         <p:nvSpPr>
@@ -2350,17 +2186,24 @@
             <a:prstDash val="solid"/>
           </a:ln>
         </p:spPr>
+        <p:txBody>
+          <a:bodyPr/>
+          <a:lstStyle/>
+          <a:p>
+            <a:endParaRPr lang="ja-JP" altLang="en-US"/>
+          </a:p>
+        </p:txBody>
       </p:sp>
       <p:pic>
         <p:nvPicPr>
-          <p:cNvPr id="34" name="Image 10" descr="/tmp/claude-0/-home-user-WeddingInvitations/2c9849ff-e4cc-5683-ac72-2a6c69aa5261/scratchpad/cat_icon.png">    </p:cNvPr>
+          <p:cNvPr id="34" name="Image 10" descr="/tmp/claude-0/-home-user-WeddingInvitations/2c9849ff-e4cc-5683-ac72-2a6c69aa5261/scratchpad/cat_icon.png"/>
           <p:cNvPicPr>
             <a:picLocks noChangeAspect="1"/>
           </p:cNvPicPr>
           <p:nvPr/>
         </p:nvPicPr>
         <p:blipFill>
-          <a:blip r:embed="rId11"/>
+          <a:blip r:embed="rId3"/>
           <a:stretch>
             <a:fillRect/>
           </a:stretch>
@@ -2377,14 +2220,14 @@
       </p:pic>
       <p:pic>
         <p:nvPicPr>
-          <p:cNvPr id="35" name="Image 11" descr="/tmp/claude-0/-home-user-WeddingInvitations/2c9849ff-e4cc-5683-ac72-2a6c69aa5261/scratchpad/cat_icon.png">    </p:cNvPr>
+          <p:cNvPr id="35" name="Image 11" descr="/tmp/claude-0/-home-user-WeddingInvitations/2c9849ff-e4cc-5683-ac72-2a6c69aa5261/scratchpad/cat_icon.png"/>
           <p:cNvPicPr>
             <a:picLocks noChangeAspect="1"/>
           </p:cNvPicPr>
           <p:nvPr/>
         </p:nvPicPr>
         <p:blipFill>
-          <a:blip r:embed="rId12"/>
+          <a:blip r:embed="rId3"/>
           <a:stretch>
             <a:fillRect/>
           </a:stretch>
@@ -2420,7 +2263,7 @@
           <a:bodyPr wrap="square" lIns="0" tIns="0" rIns="0" bIns="0" rtlCol="0" anchor="ctr"/>
           <a:lstStyle/>
           <a:p>
-            <a:pPr algn="ctr" indent="0" marL="0">
+            <a:pPr marL="0" indent="0" algn="ctr">
               <a:buNone/>
             </a:pPr>
             <a:r>
@@ -2459,7 +2302,7 @@
           <a:bodyPr wrap="square" lIns="0" tIns="0" rIns="0" bIns="0" rtlCol="0" anchor="ctr"/>
           <a:lstStyle/>
           <a:p>
-            <a:pPr algn="ctr" indent="0" marL="0">
+            <a:pPr marL="0" indent="0" algn="ctr">
               <a:buNone/>
             </a:pPr>
             <a:r>
@@ -2501,6 +2344,13 @@
             <a:prstDash val="dash"/>
           </a:ln>
         </p:spPr>
+        <p:txBody>
+          <a:bodyPr/>
+          <a:lstStyle/>
+          <a:p>
+            <a:endParaRPr lang="ja-JP" altLang="en-US"/>
+          </a:p>
+        </p:txBody>
       </p:sp>
       <p:sp>
         <p:nvSpPr>
@@ -2528,17 +2378,24 @@
             <a:prstDash val="solid"/>
           </a:ln>
         </p:spPr>
+        <p:txBody>
+          <a:bodyPr/>
+          <a:lstStyle/>
+          <a:p>
+            <a:endParaRPr lang="ja-JP" altLang="en-US"/>
+          </a:p>
+        </p:txBody>
       </p:sp>
       <p:pic>
         <p:nvPicPr>
-          <p:cNvPr id="40" name="Image 12" descr="/tmp/claude-0/-home-user-WeddingInvitations/2c9849ff-e4cc-5683-ac72-2a6c69aa5261/scratchpad/cat_icon.png">    </p:cNvPr>
+          <p:cNvPr id="40" name="Image 12" descr="/tmp/claude-0/-home-user-WeddingInvitations/2c9849ff-e4cc-5683-ac72-2a6c69aa5261/scratchpad/cat_icon.png"/>
           <p:cNvPicPr>
             <a:picLocks noChangeAspect="1"/>
           </p:cNvPicPr>
           <p:nvPr/>
         </p:nvPicPr>
         <p:blipFill>
-          <a:blip r:embed="rId13"/>
+          <a:blip r:embed="rId3"/>
           <a:stretch>
             <a:fillRect/>
           </a:stretch>
@@ -2555,14 +2412,14 @@
       </p:pic>
       <p:pic>
         <p:nvPicPr>
-          <p:cNvPr id="41" name="Image 13" descr="/tmp/claude-0/-home-user-WeddingInvitations/2c9849ff-e4cc-5683-ac72-2a6c69aa5261/scratchpad/cat_icon.png">    </p:cNvPr>
+          <p:cNvPr id="41" name="Image 13" descr="/tmp/claude-0/-home-user-WeddingInvitations/2c9849ff-e4cc-5683-ac72-2a6c69aa5261/scratchpad/cat_icon.png"/>
           <p:cNvPicPr>
             <a:picLocks noChangeAspect="1"/>
           </p:cNvPicPr>
           <p:nvPr/>
         </p:nvPicPr>
         <p:blipFill>
-          <a:blip r:embed="rId14"/>
+          <a:blip r:embed="rId3"/>
           <a:stretch>
             <a:fillRect/>
           </a:stretch>
@@ -2598,7 +2455,7 @@
           <a:bodyPr wrap="square" lIns="0" tIns="0" rIns="0" bIns="0" rtlCol="0" anchor="ctr"/>
           <a:lstStyle/>
           <a:p>
-            <a:pPr algn="ctr" indent="0" marL="0">
+            <a:pPr marL="0" indent="0" algn="ctr">
               <a:buNone/>
             </a:pPr>
             <a:r>
@@ -2637,7 +2494,7 @@
           <a:bodyPr wrap="square" lIns="0" tIns="0" rIns="0" bIns="0" rtlCol="0" anchor="ctr"/>
           <a:lstStyle/>
           <a:p>
-            <a:pPr algn="ctr" indent="0" marL="0">
+            <a:pPr marL="0" indent="0" algn="ctr">
               <a:buNone/>
             </a:pPr>
             <a:r>
@@ -2679,6 +2536,13 @@
             <a:prstDash val="dash"/>
           </a:ln>
         </p:spPr>
+        <p:txBody>
+          <a:bodyPr/>
+          <a:lstStyle/>
+          <a:p>
+            <a:endParaRPr lang="ja-JP" altLang="en-US"/>
+          </a:p>
+        </p:txBody>
       </p:sp>
       <p:sp>
         <p:nvSpPr>
@@ -2706,17 +2570,24 @@
             <a:prstDash val="solid"/>
           </a:ln>
         </p:spPr>
+        <p:txBody>
+          <a:bodyPr/>
+          <a:lstStyle/>
+          <a:p>
+            <a:endParaRPr lang="ja-JP" altLang="en-US"/>
+          </a:p>
+        </p:txBody>
       </p:sp>
       <p:pic>
         <p:nvPicPr>
-          <p:cNvPr id="46" name="Image 14" descr="/tmp/claude-0/-home-user-WeddingInvitations/2c9849ff-e4cc-5683-ac72-2a6c69aa5261/scratchpad/cat_icon.png">    </p:cNvPr>
+          <p:cNvPr id="46" name="Image 14" descr="/tmp/claude-0/-home-user-WeddingInvitations/2c9849ff-e4cc-5683-ac72-2a6c69aa5261/scratchpad/cat_icon.png"/>
           <p:cNvPicPr>
             <a:picLocks noChangeAspect="1"/>
           </p:cNvPicPr>
           <p:nvPr/>
         </p:nvPicPr>
         <p:blipFill>
-          <a:blip r:embed="rId15"/>
+          <a:blip r:embed="rId3"/>
           <a:stretch>
             <a:fillRect/>
           </a:stretch>
@@ -2733,14 +2604,14 @@
       </p:pic>
       <p:pic>
         <p:nvPicPr>
-          <p:cNvPr id="47" name="Image 15" descr="/tmp/claude-0/-home-user-WeddingInvitations/2c9849ff-e4cc-5683-ac72-2a6c69aa5261/scratchpad/cat_icon.png">    </p:cNvPr>
+          <p:cNvPr id="47" name="Image 15" descr="/tmp/claude-0/-home-user-WeddingInvitations/2c9849ff-e4cc-5683-ac72-2a6c69aa5261/scratchpad/cat_icon.png"/>
           <p:cNvPicPr>
             <a:picLocks noChangeAspect="1"/>
           </p:cNvPicPr>
           <p:nvPr/>
         </p:nvPicPr>
         <p:blipFill>
-          <a:blip r:embed="rId16"/>
+          <a:blip r:embed="rId3"/>
           <a:stretch>
             <a:fillRect/>
           </a:stretch>
@@ -2776,7 +2647,7 @@
           <a:bodyPr wrap="square" lIns="0" tIns="0" rIns="0" bIns="0" rtlCol="0" anchor="ctr"/>
           <a:lstStyle/>
           <a:p>
-            <a:pPr algn="ctr" indent="0" marL="0">
+            <a:pPr marL="0" indent="0" algn="ctr">
               <a:buNone/>
             </a:pPr>
             <a:r>
@@ -2815,7 +2686,7 @@
           <a:bodyPr wrap="square" lIns="0" tIns="0" rIns="0" bIns="0" rtlCol="0" anchor="ctr"/>
           <a:lstStyle/>
           <a:p>
-            <a:pPr algn="ctr" indent="0" marL="0">
+            <a:pPr marL="0" indent="0" algn="ctr">
               <a:buNone/>
             </a:pPr>
             <a:r>
@@ -2857,6 +2728,13 @@
             <a:prstDash val="dash"/>
           </a:ln>
         </p:spPr>
+        <p:txBody>
+          <a:bodyPr/>
+          <a:lstStyle/>
+          <a:p>
+            <a:endParaRPr lang="ja-JP" altLang="en-US"/>
+          </a:p>
+        </p:txBody>
       </p:sp>
       <p:sp>
         <p:nvSpPr>
@@ -2884,17 +2762,24 @@
             <a:prstDash val="solid"/>
           </a:ln>
         </p:spPr>
+        <p:txBody>
+          <a:bodyPr/>
+          <a:lstStyle/>
+          <a:p>
+            <a:endParaRPr lang="ja-JP" altLang="en-US"/>
+          </a:p>
+        </p:txBody>
       </p:sp>
       <p:pic>
         <p:nvPicPr>
-          <p:cNvPr id="52" name="Image 16" descr="/tmp/claude-0/-home-user-WeddingInvitations/2c9849ff-e4cc-5683-ac72-2a6c69aa5261/scratchpad/cat_icon.png">    </p:cNvPr>
+          <p:cNvPr id="52" name="Image 16" descr="/tmp/claude-0/-home-user-WeddingInvitations/2c9849ff-e4cc-5683-ac72-2a6c69aa5261/scratchpad/cat_icon.png"/>
           <p:cNvPicPr>
             <a:picLocks noChangeAspect="1"/>
           </p:cNvPicPr>
           <p:nvPr/>
         </p:nvPicPr>
         <p:blipFill>
-          <a:blip r:embed="rId17"/>
+          <a:blip r:embed="rId3"/>
           <a:stretch>
             <a:fillRect/>
           </a:stretch>
@@ -2911,14 +2796,14 @@
       </p:pic>
       <p:pic>
         <p:nvPicPr>
-          <p:cNvPr id="53" name="Image 17" descr="/tmp/claude-0/-home-user-WeddingInvitations/2c9849ff-e4cc-5683-ac72-2a6c69aa5261/scratchpad/cat_icon.png">    </p:cNvPr>
+          <p:cNvPr id="53" name="Image 17" descr="/tmp/claude-0/-home-user-WeddingInvitations/2c9849ff-e4cc-5683-ac72-2a6c69aa5261/scratchpad/cat_icon.png"/>
           <p:cNvPicPr>
             <a:picLocks noChangeAspect="1"/>
           </p:cNvPicPr>
           <p:nvPr/>
         </p:nvPicPr>
         <p:blipFill>
-          <a:blip r:embed="rId18"/>
+          <a:blip r:embed="rId3"/>
           <a:stretch>
             <a:fillRect/>
           </a:stretch>
@@ -2954,7 +2839,7 @@
           <a:bodyPr wrap="square" lIns="0" tIns="0" rIns="0" bIns="0" rtlCol="0" anchor="ctr"/>
           <a:lstStyle/>
           <a:p>
-            <a:pPr algn="ctr" indent="0" marL="0">
+            <a:pPr marL="0" indent="0" algn="ctr">
               <a:buNone/>
             </a:pPr>
             <a:r>
@@ -2993,7 +2878,7 @@
           <a:bodyPr wrap="square" lIns="0" tIns="0" rIns="0" bIns="0" rtlCol="0" anchor="ctr"/>
           <a:lstStyle/>
           <a:p>
-            <a:pPr algn="ctr" indent="0" marL="0">
+            <a:pPr marL="0" indent="0" algn="ctr">
               <a:buNone/>
             </a:pPr>
             <a:r>
@@ -3035,6 +2920,13 @@
             <a:prstDash val="dash"/>
           </a:ln>
         </p:spPr>
+        <p:txBody>
+          <a:bodyPr/>
+          <a:lstStyle/>
+          <a:p>
+            <a:endParaRPr lang="ja-JP" altLang="en-US"/>
+          </a:p>
+        </p:txBody>
       </p:sp>
       <p:sp>
         <p:nvSpPr>
@@ -3062,17 +2954,24 @@
             <a:prstDash val="solid"/>
           </a:ln>
         </p:spPr>
+        <p:txBody>
+          <a:bodyPr/>
+          <a:lstStyle/>
+          <a:p>
+            <a:endParaRPr lang="ja-JP" altLang="en-US"/>
+          </a:p>
+        </p:txBody>
       </p:sp>
       <p:pic>
         <p:nvPicPr>
-          <p:cNvPr id="58" name="Image 18" descr="/tmp/claude-0/-home-user-WeddingInvitations/2c9849ff-e4cc-5683-ac72-2a6c69aa5261/scratchpad/cat_icon.png">    </p:cNvPr>
+          <p:cNvPr id="58" name="Image 18" descr="/tmp/claude-0/-home-user-WeddingInvitations/2c9849ff-e4cc-5683-ac72-2a6c69aa5261/scratchpad/cat_icon.png"/>
           <p:cNvPicPr>
             <a:picLocks noChangeAspect="1"/>
           </p:cNvPicPr>
           <p:nvPr/>
         </p:nvPicPr>
         <p:blipFill>
-          <a:blip r:embed="rId19"/>
+          <a:blip r:embed="rId3"/>
           <a:stretch>
             <a:fillRect/>
           </a:stretch>
@@ -3089,14 +2988,14 @@
       </p:pic>
       <p:pic>
         <p:nvPicPr>
-          <p:cNvPr id="59" name="Image 19" descr="/tmp/claude-0/-home-user-WeddingInvitations/2c9849ff-e4cc-5683-ac72-2a6c69aa5261/scratchpad/cat_icon.png">    </p:cNvPr>
+          <p:cNvPr id="59" name="Image 19" descr="/tmp/claude-0/-home-user-WeddingInvitations/2c9849ff-e4cc-5683-ac72-2a6c69aa5261/scratchpad/cat_icon.png"/>
           <p:cNvPicPr>
             <a:picLocks noChangeAspect="1"/>
           </p:cNvPicPr>
           <p:nvPr/>
         </p:nvPicPr>
         <p:blipFill>
-          <a:blip r:embed="rId20"/>
+          <a:blip r:embed="rId3"/>
           <a:stretch>
             <a:fillRect/>
           </a:stretch>
@@ -3132,7 +3031,7 @@
           <a:bodyPr wrap="square" lIns="0" tIns="0" rIns="0" bIns="0" rtlCol="0" anchor="ctr"/>
           <a:lstStyle/>
           <a:p>
-            <a:pPr algn="ctr" indent="0" marL="0">
+            <a:pPr marL="0" indent="0" algn="ctr">
               <a:buNone/>
             </a:pPr>
             <a:r>
@@ -3171,7 +3070,7 @@
           <a:bodyPr wrap="square" lIns="0" tIns="0" rIns="0" bIns="0" rtlCol="0" anchor="ctr"/>
           <a:lstStyle/>
           <a:p>
-            <a:pPr algn="ctr" indent="0" marL="0">
+            <a:pPr marL="0" indent="0" algn="ctr">
               <a:buNone/>
             </a:pPr>
             <a:r>
@@ -3213,6 +3112,13 @@
             <a:prstDash val="dash"/>
           </a:ln>
         </p:spPr>
+        <p:txBody>
+          <a:bodyPr/>
+          <a:lstStyle/>
+          <a:p>
+            <a:endParaRPr lang="ja-JP" altLang="en-US"/>
+          </a:p>
+        </p:txBody>
       </p:sp>
       <p:sp>
         <p:nvSpPr>
@@ -3240,17 +3146,24 @@
             <a:prstDash val="solid"/>
           </a:ln>
         </p:spPr>
+        <p:txBody>
+          <a:bodyPr/>
+          <a:lstStyle/>
+          <a:p>
+            <a:endParaRPr lang="ja-JP" altLang="en-US"/>
+          </a:p>
+        </p:txBody>
       </p:sp>
       <p:pic>
         <p:nvPicPr>
-          <p:cNvPr id="64" name="Image 20" descr="/tmp/claude-0/-home-user-WeddingInvitations/2c9849ff-e4cc-5683-ac72-2a6c69aa5261/scratchpad/cat_icon.png">    </p:cNvPr>
+          <p:cNvPr id="64" name="Image 20" descr="/tmp/claude-0/-home-user-WeddingInvitations/2c9849ff-e4cc-5683-ac72-2a6c69aa5261/scratchpad/cat_icon.png"/>
           <p:cNvPicPr>
             <a:picLocks noChangeAspect="1"/>
           </p:cNvPicPr>
           <p:nvPr/>
         </p:nvPicPr>
         <p:blipFill>
-          <a:blip r:embed="rId21"/>
+          <a:blip r:embed="rId3"/>
           <a:stretch>
             <a:fillRect/>
           </a:stretch>
@@ -3267,14 +3180,14 @@
       </p:pic>
       <p:pic>
         <p:nvPicPr>
-          <p:cNvPr id="65" name="Image 21" descr="/tmp/claude-0/-home-user-WeddingInvitations/2c9849ff-e4cc-5683-ac72-2a6c69aa5261/scratchpad/cat_icon.png">    </p:cNvPr>
+          <p:cNvPr id="65" name="Image 21" descr="/tmp/claude-0/-home-user-WeddingInvitations/2c9849ff-e4cc-5683-ac72-2a6c69aa5261/scratchpad/cat_icon.png"/>
           <p:cNvPicPr>
             <a:picLocks noChangeAspect="1"/>
           </p:cNvPicPr>
           <p:nvPr/>
         </p:nvPicPr>
         <p:blipFill>
-          <a:blip r:embed="rId22"/>
+          <a:blip r:embed="rId3"/>
           <a:stretch>
             <a:fillRect/>
           </a:stretch>
@@ -3310,7 +3223,7 @@
           <a:bodyPr wrap="square" lIns="0" tIns="0" rIns="0" bIns="0" rtlCol="0" anchor="ctr"/>
           <a:lstStyle/>
           <a:p>
-            <a:pPr algn="ctr" indent="0" marL="0">
+            <a:pPr marL="0" indent="0" algn="ctr">
               <a:buNone/>
             </a:pPr>
             <a:r>
@@ -3349,9 +3262,20 @@
           <a:bodyPr wrap="square" lIns="0" tIns="0" rIns="0" bIns="0" rtlCol="0" anchor="ctr"/>
           <a:lstStyle/>
           <a:p>
-            <a:pPr algn="ctr" indent="0" marL="0">
+            <a:pPr marL="0" indent="0" algn="ctr">
               <a:buNone/>
             </a:pPr>
+            <a:r>
+              <a:rPr lang="ja-JP" altLang="en-US" sz="2200" b="1" dirty="0">
+                <a:solidFill>
+                  <a:srgbClr val="1F3A5F"/>
+                </a:solidFill>
+                <a:latin typeface="Yu Gothic" pitchFamily="34" charset="0"/>
+                <a:ea typeface="Yu Gothic" pitchFamily="34" charset="-122"/>
+                <a:cs typeface="Yu Gothic" pitchFamily="34" charset="-120"/>
+              </a:rPr>
+              <a:t>渡邉</a:t>
+            </a:r>
             <a:r>
               <a:rPr lang="en-US" sz="2200" b="1" dirty="0">
                 <a:solidFill>
@@ -3361,7 +3285,7 @@
                 <a:ea typeface="Yu Gothic" pitchFamily="34" charset="-122"/>
                 <a:cs typeface="Yu Gothic" pitchFamily="34" charset="-120"/>
               </a:rPr>
-              <a:t>渡邊 彩音 様</a:t>
+              <a:t> 彩音 様</a:t>
             </a:r>
             <a:endParaRPr lang="en-US" sz="2200" dirty="0"/>
           </a:p>
@@ -3391,6 +3315,13 @@
             <a:prstDash val="dash"/>
           </a:ln>
         </p:spPr>
+        <p:txBody>
+          <a:bodyPr/>
+          <a:lstStyle/>
+          <a:p>
+            <a:endParaRPr lang="ja-JP" altLang="en-US"/>
+          </a:p>
+        </p:txBody>
       </p:sp>
       <p:sp>
         <p:nvSpPr>
@@ -3418,17 +3349,24 @@
             <a:prstDash val="solid"/>
           </a:ln>
         </p:spPr>
+        <p:txBody>
+          <a:bodyPr/>
+          <a:lstStyle/>
+          <a:p>
+            <a:endParaRPr lang="ja-JP" altLang="en-US"/>
+          </a:p>
+        </p:txBody>
       </p:sp>
       <p:pic>
         <p:nvPicPr>
-          <p:cNvPr id="70" name="Image 22" descr="/tmp/claude-0/-home-user-WeddingInvitations/2c9849ff-e4cc-5683-ac72-2a6c69aa5261/scratchpad/cat_icon.png">    </p:cNvPr>
+          <p:cNvPr id="70" name="Image 22" descr="/tmp/claude-0/-home-user-WeddingInvitations/2c9849ff-e4cc-5683-ac72-2a6c69aa5261/scratchpad/cat_icon.png"/>
           <p:cNvPicPr>
             <a:picLocks noChangeAspect="1"/>
           </p:cNvPicPr>
           <p:nvPr/>
         </p:nvPicPr>
         <p:blipFill>
-          <a:blip r:embed="rId23"/>
+          <a:blip r:embed="rId3"/>
           <a:stretch>
             <a:fillRect/>
           </a:stretch>
@@ -3445,14 +3383,14 @@
       </p:pic>
       <p:pic>
         <p:nvPicPr>
-          <p:cNvPr id="71" name="Image 23" descr="/tmp/claude-0/-home-user-WeddingInvitations/2c9849ff-e4cc-5683-ac72-2a6c69aa5261/scratchpad/cat_icon.png">    </p:cNvPr>
+          <p:cNvPr id="71" name="Image 23" descr="/tmp/claude-0/-home-user-WeddingInvitations/2c9849ff-e4cc-5683-ac72-2a6c69aa5261/scratchpad/cat_icon.png"/>
           <p:cNvPicPr>
             <a:picLocks noChangeAspect="1"/>
           </p:cNvPicPr>
           <p:nvPr/>
         </p:nvPicPr>
         <p:blipFill>
-          <a:blip r:embed="rId24"/>
+          <a:blip r:embed="rId3"/>
           <a:stretch>
             <a:fillRect/>
           </a:stretch>
@@ -3488,7 +3426,7 @@
           <a:bodyPr wrap="square" lIns="0" tIns="0" rIns="0" bIns="0" rtlCol="0" anchor="ctr"/>
           <a:lstStyle/>
           <a:p>
-            <a:pPr algn="ctr" indent="0" marL="0">
+            <a:pPr marL="0" indent="0" algn="ctr">
               <a:buNone/>
             </a:pPr>
             <a:r>
@@ -3527,7 +3465,7 @@
           <a:bodyPr wrap="square" lIns="0" tIns="0" rIns="0" bIns="0" rtlCol="0" anchor="ctr"/>
           <a:lstStyle/>
           <a:p>
-            <a:pPr algn="ctr" indent="0" marL="0">
+            <a:pPr marL="0" indent="0" algn="ctr">
               <a:buNone/>
             </a:pPr>
             <a:r>
@@ -3569,6 +3507,13 @@
             <a:prstDash val="dash"/>
           </a:ln>
         </p:spPr>
+        <p:txBody>
+          <a:bodyPr/>
+          <a:lstStyle/>
+          <a:p>
+            <a:endParaRPr lang="ja-JP" altLang="en-US"/>
+          </a:p>
+        </p:txBody>
       </p:sp>
       <p:sp>
         <p:nvSpPr>
@@ -3596,17 +3541,24 @@
             <a:prstDash val="solid"/>
           </a:ln>
         </p:spPr>
+        <p:txBody>
+          <a:bodyPr/>
+          <a:lstStyle/>
+          <a:p>
+            <a:endParaRPr lang="ja-JP" altLang="en-US"/>
+          </a:p>
+        </p:txBody>
       </p:sp>
       <p:pic>
         <p:nvPicPr>
-          <p:cNvPr id="76" name="Image 24" descr="/tmp/claude-0/-home-user-WeddingInvitations/2c9849ff-e4cc-5683-ac72-2a6c69aa5261/scratchpad/cat_icon.png">    </p:cNvPr>
+          <p:cNvPr id="76" name="Image 24" descr="/tmp/claude-0/-home-user-WeddingInvitations/2c9849ff-e4cc-5683-ac72-2a6c69aa5261/scratchpad/cat_icon.png"/>
           <p:cNvPicPr>
             <a:picLocks noChangeAspect="1"/>
           </p:cNvPicPr>
           <p:nvPr/>
         </p:nvPicPr>
         <p:blipFill>
-          <a:blip r:embed="rId25"/>
+          <a:blip r:embed="rId3"/>
           <a:stretch>
             <a:fillRect/>
           </a:stretch>
@@ -3623,14 +3575,14 @@
       </p:pic>
       <p:pic>
         <p:nvPicPr>
-          <p:cNvPr id="77" name="Image 25" descr="/tmp/claude-0/-home-user-WeddingInvitations/2c9849ff-e4cc-5683-ac72-2a6c69aa5261/scratchpad/cat_icon.png">    </p:cNvPr>
+          <p:cNvPr id="77" name="Image 25" descr="/tmp/claude-0/-home-user-WeddingInvitations/2c9849ff-e4cc-5683-ac72-2a6c69aa5261/scratchpad/cat_icon.png"/>
           <p:cNvPicPr>
             <a:picLocks noChangeAspect="1"/>
           </p:cNvPicPr>
           <p:nvPr/>
         </p:nvPicPr>
         <p:blipFill>
-          <a:blip r:embed="rId26"/>
+          <a:blip r:embed="rId3"/>
           <a:stretch>
             <a:fillRect/>
           </a:stretch>
@@ -3666,7 +3618,7 @@
           <a:bodyPr wrap="square" lIns="0" tIns="0" rIns="0" bIns="0" rtlCol="0" anchor="ctr"/>
           <a:lstStyle/>
           <a:p>
-            <a:pPr algn="ctr" indent="0" marL="0">
+            <a:pPr marL="0" indent="0" algn="ctr">
               <a:buNone/>
             </a:pPr>
             <a:r>
@@ -3705,7 +3657,7 @@
           <a:bodyPr wrap="square" lIns="0" tIns="0" rIns="0" bIns="0" rtlCol="0" anchor="ctr"/>
           <a:lstStyle/>
           <a:p>
-            <a:pPr algn="ctr" indent="0" marL="0">
+            <a:pPr marL="0" indent="0" algn="ctr">
               <a:buNone/>
             </a:pPr>
             <a:r>
@@ -3747,6 +3699,13 @@
             <a:prstDash val="dash"/>
           </a:ln>
         </p:spPr>
+        <p:txBody>
+          <a:bodyPr/>
+          <a:lstStyle/>
+          <a:p>
+            <a:endParaRPr lang="ja-JP" altLang="en-US"/>
+          </a:p>
+        </p:txBody>
       </p:sp>
       <p:sp>
         <p:nvSpPr>
@@ -3774,17 +3733,24 @@
             <a:prstDash val="solid"/>
           </a:ln>
         </p:spPr>
+        <p:txBody>
+          <a:bodyPr/>
+          <a:lstStyle/>
+          <a:p>
+            <a:endParaRPr lang="ja-JP" altLang="en-US"/>
+          </a:p>
+        </p:txBody>
       </p:sp>
       <p:pic>
         <p:nvPicPr>
-          <p:cNvPr id="82" name="Image 26" descr="/tmp/claude-0/-home-user-WeddingInvitations/2c9849ff-e4cc-5683-ac72-2a6c69aa5261/scratchpad/cat_icon.png">    </p:cNvPr>
+          <p:cNvPr id="82" name="Image 26" descr="/tmp/claude-0/-home-user-WeddingInvitations/2c9849ff-e4cc-5683-ac72-2a6c69aa5261/scratchpad/cat_icon.png"/>
           <p:cNvPicPr>
             <a:picLocks noChangeAspect="1"/>
           </p:cNvPicPr>
           <p:nvPr/>
         </p:nvPicPr>
         <p:blipFill>
-          <a:blip r:embed="rId27"/>
+          <a:blip r:embed="rId3"/>
           <a:stretch>
             <a:fillRect/>
           </a:stretch>
@@ -3801,14 +3767,14 @@
       </p:pic>
       <p:pic>
         <p:nvPicPr>
-          <p:cNvPr id="83" name="Image 27" descr="/tmp/claude-0/-home-user-WeddingInvitations/2c9849ff-e4cc-5683-ac72-2a6c69aa5261/scratchpad/cat_icon.png">    </p:cNvPr>
+          <p:cNvPr id="83" name="Image 27" descr="/tmp/claude-0/-home-user-WeddingInvitations/2c9849ff-e4cc-5683-ac72-2a6c69aa5261/scratchpad/cat_icon.png"/>
           <p:cNvPicPr>
             <a:picLocks noChangeAspect="1"/>
           </p:cNvPicPr>
           <p:nvPr/>
         </p:nvPicPr>
         <p:blipFill>
-          <a:blip r:embed="rId28"/>
+          <a:blip r:embed="rId3"/>
           <a:stretch>
             <a:fillRect/>
           </a:stretch>
@@ -3844,7 +3810,7 @@
           <a:bodyPr wrap="square" lIns="0" tIns="0" rIns="0" bIns="0" rtlCol="0" anchor="ctr"/>
           <a:lstStyle/>
           <a:p>
-            <a:pPr algn="ctr" indent="0" marL="0">
+            <a:pPr marL="0" indent="0" algn="ctr">
               <a:buNone/>
             </a:pPr>
             <a:r>
@@ -3883,7 +3849,7 @@
           <a:bodyPr wrap="square" lIns="0" tIns="0" rIns="0" bIns="0" rtlCol="0" anchor="ctr"/>
           <a:lstStyle/>
           <a:p>
-            <a:pPr algn="ctr" indent="0" marL="0">
+            <a:pPr marL="0" indent="0" algn="ctr">
               <a:buNone/>
             </a:pPr>
             <a:r>
@@ -3925,6 +3891,13 @@
             <a:prstDash val="dash"/>
           </a:ln>
         </p:spPr>
+        <p:txBody>
+          <a:bodyPr/>
+          <a:lstStyle/>
+          <a:p>
+            <a:endParaRPr lang="ja-JP" altLang="en-US"/>
+          </a:p>
+        </p:txBody>
       </p:sp>
       <p:sp>
         <p:nvSpPr>
@@ -3952,17 +3925,24 @@
             <a:prstDash val="solid"/>
           </a:ln>
         </p:spPr>
+        <p:txBody>
+          <a:bodyPr/>
+          <a:lstStyle/>
+          <a:p>
+            <a:endParaRPr lang="ja-JP" altLang="en-US"/>
+          </a:p>
+        </p:txBody>
       </p:sp>
       <p:pic>
         <p:nvPicPr>
-          <p:cNvPr id="88" name="Image 28" descr="/tmp/claude-0/-home-user-WeddingInvitations/2c9849ff-e4cc-5683-ac72-2a6c69aa5261/scratchpad/cat_icon.png">    </p:cNvPr>
+          <p:cNvPr id="88" name="Image 28" descr="/tmp/claude-0/-home-user-WeddingInvitations/2c9849ff-e4cc-5683-ac72-2a6c69aa5261/scratchpad/cat_icon.png"/>
           <p:cNvPicPr>
             <a:picLocks noChangeAspect="1"/>
           </p:cNvPicPr>
           <p:nvPr/>
         </p:nvPicPr>
         <p:blipFill>
-          <a:blip r:embed="rId29"/>
+          <a:blip r:embed="rId3"/>
           <a:stretch>
             <a:fillRect/>
           </a:stretch>
@@ -3979,14 +3959,14 @@
       </p:pic>
       <p:pic>
         <p:nvPicPr>
-          <p:cNvPr id="89" name="Image 29" descr="/tmp/claude-0/-home-user-WeddingInvitations/2c9849ff-e4cc-5683-ac72-2a6c69aa5261/scratchpad/cat_icon.png">    </p:cNvPr>
+          <p:cNvPr id="89" name="Image 29" descr="/tmp/claude-0/-home-user-WeddingInvitations/2c9849ff-e4cc-5683-ac72-2a6c69aa5261/scratchpad/cat_icon.png"/>
           <p:cNvPicPr>
             <a:picLocks noChangeAspect="1"/>
           </p:cNvPicPr>
           <p:nvPr/>
         </p:nvPicPr>
         <p:blipFill>
-          <a:blip r:embed="rId30"/>
+          <a:blip r:embed="rId3"/>
           <a:stretch>
             <a:fillRect/>
           </a:stretch>
@@ -4022,7 +4002,7 @@
           <a:bodyPr wrap="square" lIns="0" tIns="0" rIns="0" bIns="0" rtlCol="0" anchor="ctr"/>
           <a:lstStyle/>
           <a:p>
-            <a:pPr algn="ctr" indent="0" marL="0">
+            <a:pPr marL="0" indent="0" algn="ctr">
               <a:buNone/>
             </a:pPr>
             <a:r>
@@ -4061,7 +4041,7 @@
           <a:bodyPr wrap="square" lIns="0" tIns="0" rIns="0" bIns="0" rtlCol="0" anchor="ctr"/>
           <a:lstStyle/>
           <a:p>
-            <a:pPr algn="ctr" indent="0" marL="0">
+            <a:pPr marL="0" indent="0" algn="ctr">
               <a:buNone/>
             </a:pPr>
             <a:r>
@@ -4103,6 +4083,13 @@
             <a:prstDash val="dash"/>
           </a:ln>
         </p:spPr>
+        <p:txBody>
+          <a:bodyPr/>
+          <a:lstStyle/>
+          <a:p>
+            <a:endParaRPr lang="ja-JP" altLang="en-US"/>
+          </a:p>
+        </p:txBody>
       </p:sp>
       <p:sp>
         <p:nvSpPr>
@@ -4130,17 +4117,24 @@
             <a:prstDash val="solid"/>
           </a:ln>
         </p:spPr>
+        <p:txBody>
+          <a:bodyPr/>
+          <a:lstStyle/>
+          <a:p>
+            <a:endParaRPr lang="ja-JP" altLang="en-US"/>
+          </a:p>
+        </p:txBody>
       </p:sp>
       <p:pic>
         <p:nvPicPr>
-          <p:cNvPr id="94" name="Image 30" descr="/tmp/claude-0/-home-user-WeddingInvitations/2c9849ff-e4cc-5683-ac72-2a6c69aa5261/scratchpad/cat_icon.png">    </p:cNvPr>
+          <p:cNvPr id="94" name="Image 30" descr="/tmp/claude-0/-home-user-WeddingInvitations/2c9849ff-e4cc-5683-ac72-2a6c69aa5261/scratchpad/cat_icon.png"/>
           <p:cNvPicPr>
             <a:picLocks noChangeAspect="1"/>
           </p:cNvPicPr>
           <p:nvPr/>
         </p:nvPicPr>
         <p:blipFill>
-          <a:blip r:embed="rId31"/>
+          <a:blip r:embed="rId3"/>
           <a:stretch>
             <a:fillRect/>
           </a:stretch>
@@ -4157,14 +4151,14 @@
       </p:pic>
       <p:pic>
         <p:nvPicPr>
-          <p:cNvPr id="95" name="Image 31" descr="/tmp/claude-0/-home-user-WeddingInvitations/2c9849ff-e4cc-5683-ac72-2a6c69aa5261/scratchpad/cat_icon.png">    </p:cNvPr>
+          <p:cNvPr id="95" name="Image 31" descr="/tmp/claude-0/-home-user-WeddingInvitations/2c9849ff-e4cc-5683-ac72-2a6c69aa5261/scratchpad/cat_icon.png"/>
           <p:cNvPicPr>
             <a:picLocks noChangeAspect="1"/>
           </p:cNvPicPr>
           <p:nvPr/>
         </p:nvPicPr>
         <p:blipFill>
-          <a:blip r:embed="rId32"/>
+          <a:blip r:embed="rId3"/>
           <a:stretch>
             <a:fillRect/>
           </a:stretch>
@@ -4200,7 +4194,7 @@
           <a:bodyPr wrap="square" lIns="0" tIns="0" rIns="0" bIns="0" rtlCol="0" anchor="ctr"/>
           <a:lstStyle/>
           <a:p>
-            <a:pPr algn="ctr" indent="0" marL="0">
+            <a:pPr marL="0" indent="0" algn="ctr">
               <a:buNone/>
             </a:pPr>
             <a:r>
@@ -4239,7 +4233,7 @@
           <a:bodyPr wrap="square" lIns="0" tIns="0" rIns="0" bIns="0" rtlCol="0" anchor="ctr"/>
           <a:lstStyle/>
           <a:p>
-            <a:pPr algn="ctr" indent="0" marL="0">
+            <a:pPr marL="0" indent="0" algn="ctr">
               <a:buNone/>
             </a:pPr>
             <a:r>
@@ -4273,6 +4267,7 @@
         <a:solidFill>
           <a:srgbClr val="FFFFFF"/>
         </a:solidFill>
+        <a:effectLst/>
       </p:bgPr>
     </p:bg>
     <p:spTree>
@@ -4313,6 +4308,13 @@
             <a:prstDash val="dash"/>
           </a:ln>
         </p:spPr>
+        <p:txBody>
+          <a:bodyPr/>
+          <a:lstStyle/>
+          <a:p>
+            <a:endParaRPr lang="ja-JP" altLang="en-US"/>
+          </a:p>
+        </p:txBody>
       </p:sp>
       <p:sp>
         <p:nvSpPr>
@@ -4340,17 +4342,24 @@
             <a:prstDash val="solid"/>
           </a:ln>
         </p:spPr>
+        <p:txBody>
+          <a:bodyPr/>
+          <a:lstStyle/>
+          <a:p>
+            <a:endParaRPr lang="ja-JP" altLang="en-US"/>
+          </a:p>
+        </p:txBody>
       </p:sp>
       <p:pic>
         <p:nvPicPr>
-          <p:cNvPr id="4" name="Image 0" descr="/tmp/claude-0/-home-user-WeddingInvitations/2c9849ff-e4cc-5683-ac72-2a6c69aa5261/scratchpad/cat_icon.png">    </p:cNvPr>
+          <p:cNvPr id="4" name="Image 0" descr="/tmp/claude-0/-home-user-WeddingInvitations/2c9849ff-e4cc-5683-ac72-2a6c69aa5261/scratchpad/cat_icon.png"/>
           <p:cNvPicPr>
             <a:picLocks noChangeAspect="1"/>
           </p:cNvPicPr>
           <p:nvPr/>
         </p:nvPicPr>
         <p:blipFill>
-          <a:blip r:embed="rId1"/>
+          <a:blip r:embed="rId3"/>
           <a:stretch>
             <a:fillRect/>
           </a:stretch>
@@ -4367,14 +4376,14 @@
       </p:pic>
       <p:pic>
         <p:nvPicPr>
-          <p:cNvPr id="5" name="Image 1" descr="/tmp/claude-0/-home-user-WeddingInvitations/2c9849ff-e4cc-5683-ac72-2a6c69aa5261/scratchpad/cat_icon.png">    </p:cNvPr>
+          <p:cNvPr id="5" name="Image 1" descr="/tmp/claude-0/-home-user-WeddingInvitations/2c9849ff-e4cc-5683-ac72-2a6c69aa5261/scratchpad/cat_icon.png"/>
           <p:cNvPicPr>
             <a:picLocks noChangeAspect="1"/>
           </p:cNvPicPr>
           <p:nvPr/>
         </p:nvPicPr>
         <p:blipFill>
-          <a:blip r:embed="rId2"/>
+          <a:blip r:embed="rId3"/>
           <a:stretch>
             <a:fillRect/>
           </a:stretch>
@@ -4410,7 +4419,7 @@
           <a:bodyPr wrap="square" lIns="0" tIns="0" rIns="0" bIns="0" rtlCol="0" anchor="ctr"/>
           <a:lstStyle/>
           <a:p>
-            <a:pPr algn="ctr" indent="0" marL="0">
+            <a:pPr marL="0" indent="0" algn="ctr">
               <a:buNone/>
             </a:pPr>
             <a:r>
@@ -4449,7 +4458,7 @@
           <a:bodyPr wrap="square" lIns="0" tIns="0" rIns="0" bIns="0" rtlCol="0" anchor="ctr"/>
           <a:lstStyle/>
           <a:p>
-            <a:pPr algn="ctr" indent="0" marL="0">
+            <a:pPr marL="0" indent="0" algn="ctr">
               <a:buNone/>
             </a:pPr>
             <a:r>
@@ -4491,6 +4500,13 @@
             <a:prstDash val="dash"/>
           </a:ln>
         </p:spPr>
+        <p:txBody>
+          <a:bodyPr/>
+          <a:lstStyle/>
+          <a:p>
+            <a:endParaRPr lang="ja-JP" altLang="en-US"/>
+          </a:p>
+        </p:txBody>
       </p:sp>
       <p:sp>
         <p:nvSpPr>
@@ -4518,10 +4534,17 @@
             <a:prstDash val="solid"/>
           </a:ln>
         </p:spPr>
+        <p:txBody>
+          <a:bodyPr/>
+          <a:lstStyle/>
+          <a:p>
+            <a:endParaRPr lang="ja-JP" altLang="en-US"/>
+          </a:p>
+        </p:txBody>
       </p:sp>
       <p:pic>
         <p:nvPicPr>
-          <p:cNvPr id="10" name="Image 2" descr="/tmp/claude-0/-home-user-WeddingInvitations/2c9849ff-e4cc-5683-ac72-2a6c69aa5261/scratchpad/cat_icon.png">    </p:cNvPr>
+          <p:cNvPr id="10" name="Image 2" descr="/tmp/claude-0/-home-user-WeddingInvitations/2c9849ff-e4cc-5683-ac72-2a6c69aa5261/scratchpad/cat_icon.png"/>
           <p:cNvPicPr>
             <a:picLocks noChangeAspect="1"/>
           </p:cNvPicPr>
@@ -4545,14 +4568,14 @@
       </p:pic>
       <p:pic>
         <p:nvPicPr>
-          <p:cNvPr id="11" name="Image 3" descr="/tmp/claude-0/-home-user-WeddingInvitations/2c9849ff-e4cc-5683-ac72-2a6c69aa5261/scratchpad/cat_icon.png">    </p:cNvPr>
+          <p:cNvPr id="11" name="Image 3" descr="/tmp/claude-0/-home-user-WeddingInvitations/2c9849ff-e4cc-5683-ac72-2a6c69aa5261/scratchpad/cat_icon.png"/>
           <p:cNvPicPr>
             <a:picLocks noChangeAspect="1"/>
           </p:cNvPicPr>
           <p:nvPr/>
         </p:nvPicPr>
         <p:blipFill>
-          <a:blip r:embed="rId4"/>
+          <a:blip r:embed="rId3"/>
           <a:stretch>
             <a:fillRect/>
           </a:stretch>
@@ -4588,7 +4611,7 @@
           <a:bodyPr wrap="square" lIns="0" tIns="0" rIns="0" bIns="0" rtlCol="0" anchor="ctr"/>
           <a:lstStyle/>
           <a:p>
-            <a:pPr algn="ctr" indent="0" marL="0">
+            <a:pPr marL="0" indent="0" algn="ctr">
               <a:buNone/>
             </a:pPr>
             <a:r>
@@ -4627,7 +4650,7 @@
           <a:bodyPr wrap="square" lIns="0" tIns="0" rIns="0" bIns="0" rtlCol="0" anchor="ctr"/>
           <a:lstStyle/>
           <a:p>
-            <a:pPr algn="ctr" indent="0" marL="0">
+            <a:pPr marL="0" indent="0" algn="ctr">
               <a:buNone/>
             </a:pPr>
             <a:r>
@@ -4669,6 +4692,13 @@
             <a:prstDash val="dash"/>
           </a:ln>
         </p:spPr>
+        <p:txBody>
+          <a:bodyPr/>
+          <a:lstStyle/>
+          <a:p>
+            <a:endParaRPr lang="ja-JP" altLang="en-US"/>
+          </a:p>
+        </p:txBody>
       </p:sp>
       <p:sp>
         <p:nvSpPr>
@@ -4696,17 +4726,24 @@
             <a:prstDash val="solid"/>
           </a:ln>
         </p:spPr>
+        <p:txBody>
+          <a:bodyPr/>
+          <a:lstStyle/>
+          <a:p>
+            <a:endParaRPr lang="ja-JP" altLang="en-US"/>
+          </a:p>
+        </p:txBody>
       </p:sp>
       <p:pic>
         <p:nvPicPr>
-          <p:cNvPr id="16" name="Image 4" descr="/tmp/claude-0/-home-user-WeddingInvitations/2c9849ff-e4cc-5683-ac72-2a6c69aa5261/scratchpad/cat_icon.png">    </p:cNvPr>
+          <p:cNvPr id="16" name="Image 4" descr="/tmp/claude-0/-home-user-WeddingInvitations/2c9849ff-e4cc-5683-ac72-2a6c69aa5261/scratchpad/cat_icon.png"/>
           <p:cNvPicPr>
             <a:picLocks noChangeAspect="1"/>
           </p:cNvPicPr>
           <p:nvPr/>
         </p:nvPicPr>
         <p:blipFill>
-          <a:blip r:embed="rId5"/>
+          <a:blip r:embed="rId3"/>
           <a:stretch>
             <a:fillRect/>
           </a:stretch>
@@ -4723,14 +4760,14 @@
       </p:pic>
       <p:pic>
         <p:nvPicPr>
-          <p:cNvPr id="17" name="Image 5" descr="/tmp/claude-0/-home-user-WeddingInvitations/2c9849ff-e4cc-5683-ac72-2a6c69aa5261/scratchpad/cat_icon.png">    </p:cNvPr>
+          <p:cNvPr id="17" name="Image 5" descr="/tmp/claude-0/-home-user-WeddingInvitations/2c9849ff-e4cc-5683-ac72-2a6c69aa5261/scratchpad/cat_icon.png"/>
           <p:cNvPicPr>
             <a:picLocks noChangeAspect="1"/>
           </p:cNvPicPr>
           <p:nvPr/>
         </p:nvPicPr>
         <p:blipFill>
-          <a:blip r:embed="rId6"/>
+          <a:blip r:embed="rId3"/>
           <a:stretch>
             <a:fillRect/>
           </a:stretch>
@@ -4766,7 +4803,7 @@
           <a:bodyPr wrap="square" lIns="0" tIns="0" rIns="0" bIns="0" rtlCol="0" anchor="ctr"/>
           <a:lstStyle/>
           <a:p>
-            <a:pPr algn="ctr" indent="0" marL="0">
+            <a:pPr marL="0" indent="0" algn="ctr">
               <a:buNone/>
             </a:pPr>
             <a:r>
@@ -4805,9 +4842,20 @@
           <a:bodyPr wrap="square" lIns="0" tIns="0" rIns="0" bIns="0" rtlCol="0" anchor="ctr"/>
           <a:lstStyle/>
           <a:p>
-            <a:pPr algn="ctr" indent="0" marL="0">
+            <a:pPr marL="0" indent="0" algn="ctr">
               <a:buNone/>
             </a:pPr>
+            <a:r>
+              <a:rPr lang="ja-JP" altLang="en-US" sz="2200" b="1" dirty="0">
+                <a:solidFill>
+                  <a:srgbClr val="1F3A5F"/>
+                </a:solidFill>
+                <a:latin typeface="Yu Gothic" pitchFamily="34" charset="0"/>
+                <a:ea typeface="Yu Gothic" pitchFamily="34" charset="-122"/>
+                <a:cs typeface="Yu Gothic" pitchFamily="34" charset="-120"/>
+              </a:rPr>
+              <a:t>渡邉</a:t>
+            </a:r>
             <a:r>
               <a:rPr lang="en-US" sz="2200" b="1" dirty="0">
                 <a:solidFill>
@@ -4817,7 +4865,7 @@
                 <a:ea typeface="Yu Gothic" pitchFamily="34" charset="-122"/>
                 <a:cs typeface="Yu Gothic" pitchFamily="34" charset="-120"/>
               </a:rPr>
-              <a:t>渡邊 雅之 様</a:t>
+              <a:t> 雅之 様</a:t>
             </a:r>
             <a:endParaRPr lang="en-US" sz="2200" dirty="0"/>
           </a:p>
@@ -4847,6 +4895,13 @@
             <a:prstDash val="dash"/>
           </a:ln>
         </p:spPr>
+        <p:txBody>
+          <a:bodyPr/>
+          <a:lstStyle/>
+          <a:p>
+            <a:endParaRPr lang="ja-JP" altLang="en-US"/>
+          </a:p>
+        </p:txBody>
       </p:sp>
       <p:sp>
         <p:nvSpPr>
@@ -4874,17 +4929,24 @@
             <a:prstDash val="solid"/>
           </a:ln>
         </p:spPr>
+        <p:txBody>
+          <a:bodyPr/>
+          <a:lstStyle/>
+          <a:p>
+            <a:endParaRPr lang="ja-JP" altLang="en-US"/>
+          </a:p>
+        </p:txBody>
       </p:sp>
       <p:pic>
         <p:nvPicPr>
-          <p:cNvPr id="22" name="Image 6" descr="/tmp/claude-0/-home-user-WeddingInvitations/2c9849ff-e4cc-5683-ac72-2a6c69aa5261/scratchpad/cat_icon.png">    </p:cNvPr>
+          <p:cNvPr id="22" name="Image 6" descr="/tmp/claude-0/-home-user-WeddingInvitations/2c9849ff-e4cc-5683-ac72-2a6c69aa5261/scratchpad/cat_icon.png"/>
           <p:cNvPicPr>
             <a:picLocks noChangeAspect="1"/>
           </p:cNvPicPr>
           <p:nvPr/>
         </p:nvPicPr>
         <p:blipFill>
-          <a:blip r:embed="rId7"/>
+          <a:blip r:embed="rId3"/>
           <a:stretch>
             <a:fillRect/>
           </a:stretch>
@@ -4901,14 +4963,14 @@
       </p:pic>
       <p:pic>
         <p:nvPicPr>
-          <p:cNvPr id="23" name="Image 7" descr="/tmp/claude-0/-home-user-WeddingInvitations/2c9849ff-e4cc-5683-ac72-2a6c69aa5261/scratchpad/cat_icon.png">    </p:cNvPr>
+          <p:cNvPr id="23" name="Image 7" descr="/tmp/claude-0/-home-user-WeddingInvitations/2c9849ff-e4cc-5683-ac72-2a6c69aa5261/scratchpad/cat_icon.png"/>
           <p:cNvPicPr>
             <a:picLocks noChangeAspect="1"/>
           </p:cNvPicPr>
           <p:nvPr/>
         </p:nvPicPr>
         <p:blipFill>
-          <a:blip r:embed="rId8"/>
+          <a:blip r:embed="rId3"/>
           <a:stretch>
             <a:fillRect/>
           </a:stretch>
@@ -4944,7 +5006,7 @@
           <a:bodyPr wrap="square" lIns="0" tIns="0" rIns="0" bIns="0" rtlCol="0" anchor="ctr"/>
           <a:lstStyle/>
           <a:p>
-            <a:pPr algn="ctr" indent="0" marL="0">
+            <a:pPr marL="0" indent="0" algn="ctr">
               <a:buNone/>
             </a:pPr>
             <a:r>
@@ -4983,7 +5045,7 @@
           <a:bodyPr wrap="square" lIns="0" tIns="0" rIns="0" bIns="0" rtlCol="0" anchor="ctr"/>
           <a:lstStyle/>
           <a:p>
-            <a:pPr algn="ctr" indent="0" marL="0">
+            <a:pPr marL="0" indent="0" algn="ctr">
               <a:buNone/>
             </a:pPr>
             <a:r>
@@ -5025,6 +5087,13 @@
             <a:prstDash val="dash"/>
           </a:ln>
         </p:spPr>
+        <p:txBody>
+          <a:bodyPr/>
+          <a:lstStyle/>
+          <a:p>
+            <a:endParaRPr lang="ja-JP" altLang="en-US"/>
+          </a:p>
+        </p:txBody>
       </p:sp>
       <p:sp>
         <p:nvSpPr>
@@ -5052,17 +5121,24 @@
             <a:prstDash val="solid"/>
           </a:ln>
         </p:spPr>
+        <p:txBody>
+          <a:bodyPr/>
+          <a:lstStyle/>
+          <a:p>
+            <a:endParaRPr lang="ja-JP" altLang="en-US"/>
+          </a:p>
+        </p:txBody>
       </p:sp>
       <p:pic>
         <p:nvPicPr>
-          <p:cNvPr id="28" name="Image 8" descr="/tmp/claude-0/-home-user-WeddingInvitations/2c9849ff-e4cc-5683-ac72-2a6c69aa5261/scratchpad/cat_icon.png">    </p:cNvPr>
+          <p:cNvPr id="28" name="Image 8" descr="/tmp/claude-0/-home-user-WeddingInvitations/2c9849ff-e4cc-5683-ac72-2a6c69aa5261/scratchpad/cat_icon.png"/>
           <p:cNvPicPr>
             <a:picLocks noChangeAspect="1"/>
           </p:cNvPicPr>
           <p:nvPr/>
         </p:nvPicPr>
         <p:blipFill>
-          <a:blip r:embed="rId9"/>
+          <a:blip r:embed="rId3"/>
           <a:stretch>
             <a:fillRect/>
           </a:stretch>
@@ -5079,14 +5155,14 @@
       </p:pic>
       <p:pic>
         <p:nvPicPr>
-          <p:cNvPr id="29" name="Image 9" descr="/tmp/claude-0/-home-user-WeddingInvitations/2c9849ff-e4cc-5683-ac72-2a6c69aa5261/scratchpad/cat_icon.png">    </p:cNvPr>
+          <p:cNvPr id="29" name="Image 9" descr="/tmp/claude-0/-home-user-WeddingInvitations/2c9849ff-e4cc-5683-ac72-2a6c69aa5261/scratchpad/cat_icon.png"/>
           <p:cNvPicPr>
             <a:picLocks noChangeAspect="1"/>
           </p:cNvPicPr>
           <p:nvPr/>
         </p:nvPicPr>
         <p:blipFill>
-          <a:blip r:embed="rId10"/>
+          <a:blip r:embed="rId3"/>
           <a:stretch>
             <a:fillRect/>
           </a:stretch>
@@ -5122,7 +5198,7 @@
           <a:bodyPr wrap="square" lIns="0" tIns="0" rIns="0" bIns="0" rtlCol="0" anchor="ctr"/>
           <a:lstStyle/>
           <a:p>
-            <a:pPr algn="ctr" indent="0" marL="0">
+            <a:pPr marL="0" indent="0" algn="ctr">
               <a:buNone/>
             </a:pPr>
             <a:r>
@@ -5161,7 +5237,7 @@
           <a:bodyPr wrap="square" lIns="0" tIns="0" rIns="0" bIns="0" rtlCol="0" anchor="ctr"/>
           <a:lstStyle/>
           <a:p>
-            <a:pPr algn="ctr" indent="0" marL="0">
+            <a:pPr marL="0" indent="0" algn="ctr">
               <a:buNone/>
             </a:pPr>
             <a:r>
@@ -5203,6 +5279,13 @@
             <a:prstDash val="dash"/>
           </a:ln>
         </p:spPr>
+        <p:txBody>
+          <a:bodyPr/>
+          <a:lstStyle/>
+          <a:p>
+            <a:endParaRPr lang="ja-JP" altLang="en-US"/>
+          </a:p>
+        </p:txBody>
       </p:sp>
       <p:sp>
         <p:nvSpPr>
@@ -5230,17 +5313,24 @@
             <a:prstDash val="solid"/>
           </a:ln>
         </p:spPr>
+        <p:txBody>
+          <a:bodyPr/>
+          <a:lstStyle/>
+          <a:p>
+            <a:endParaRPr lang="ja-JP" altLang="en-US"/>
+          </a:p>
+        </p:txBody>
       </p:sp>
       <p:pic>
         <p:nvPicPr>
-          <p:cNvPr id="34" name="Image 10" descr="/tmp/claude-0/-home-user-WeddingInvitations/2c9849ff-e4cc-5683-ac72-2a6c69aa5261/scratchpad/cat_icon.png">    </p:cNvPr>
+          <p:cNvPr id="34" name="Image 10" descr="/tmp/claude-0/-home-user-WeddingInvitations/2c9849ff-e4cc-5683-ac72-2a6c69aa5261/scratchpad/cat_icon.png"/>
           <p:cNvPicPr>
             <a:picLocks noChangeAspect="1"/>
           </p:cNvPicPr>
           <p:nvPr/>
         </p:nvPicPr>
         <p:blipFill>
-          <a:blip r:embed="rId11"/>
+          <a:blip r:embed="rId3"/>
           <a:stretch>
             <a:fillRect/>
           </a:stretch>
@@ -5257,14 +5347,14 @@
       </p:pic>
       <p:pic>
         <p:nvPicPr>
-          <p:cNvPr id="35" name="Image 11" descr="/tmp/claude-0/-home-user-WeddingInvitations/2c9849ff-e4cc-5683-ac72-2a6c69aa5261/scratchpad/cat_icon.png">    </p:cNvPr>
+          <p:cNvPr id="35" name="Image 11" descr="/tmp/claude-0/-home-user-WeddingInvitations/2c9849ff-e4cc-5683-ac72-2a6c69aa5261/scratchpad/cat_icon.png"/>
           <p:cNvPicPr>
             <a:picLocks noChangeAspect="1"/>
           </p:cNvPicPr>
           <p:nvPr/>
         </p:nvPicPr>
         <p:blipFill>
-          <a:blip r:embed="rId12"/>
+          <a:blip r:embed="rId3"/>
           <a:stretch>
             <a:fillRect/>
           </a:stretch>
@@ -5300,7 +5390,7 @@
           <a:bodyPr wrap="square" lIns="0" tIns="0" rIns="0" bIns="0" rtlCol="0" anchor="ctr"/>
           <a:lstStyle/>
           <a:p>
-            <a:pPr algn="ctr" indent="0" marL="0">
+            <a:pPr marL="0" indent="0" algn="ctr">
               <a:buNone/>
             </a:pPr>
             <a:r>
@@ -5339,7 +5429,7 @@
           <a:bodyPr wrap="square" lIns="0" tIns="0" rIns="0" bIns="0" rtlCol="0" anchor="ctr"/>
           <a:lstStyle/>
           <a:p>
-            <a:pPr algn="ctr" indent="0" marL="0">
+            <a:pPr marL="0" indent="0" algn="ctr">
               <a:buNone/>
             </a:pPr>
             <a:r>
@@ -5381,6 +5471,13 @@
             <a:prstDash val="dash"/>
           </a:ln>
         </p:spPr>
+        <p:txBody>
+          <a:bodyPr/>
+          <a:lstStyle/>
+          <a:p>
+            <a:endParaRPr lang="ja-JP" altLang="en-US"/>
+          </a:p>
+        </p:txBody>
       </p:sp>
       <p:sp>
         <p:nvSpPr>
@@ -5408,17 +5505,24 @@
             <a:prstDash val="solid"/>
           </a:ln>
         </p:spPr>
+        <p:txBody>
+          <a:bodyPr/>
+          <a:lstStyle/>
+          <a:p>
+            <a:endParaRPr lang="ja-JP" altLang="en-US"/>
+          </a:p>
+        </p:txBody>
       </p:sp>
       <p:pic>
         <p:nvPicPr>
-          <p:cNvPr id="40" name="Image 12" descr="/tmp/claude-0/-home-user-WeddingInvitations/2c9849ff-e4cc-5683-ac72-2a6c69aa5261/scratchpad/cat_icon.png">    </p:cNvPr>
+          <p:cNvPr id="40" name="Image 12" descr="/tmp/claude-0/-home-user-WeddingInvitations/2c9849ff-e4cc-5683-ac72-2a6c69aa5261/scratchpad/cat_icon.png"/>
           <p:cNvPicPr>
             <a:picLocks noChangeAspect="1"/>
           </p:cNvPicPr>
           <p:nvPr/>
         </p:nvPicPr>
         <p:blipFill>
-          <a:blip r:embed="rId13"/>
+          <a:blip r:embed="rId3"/>
           <a:stretch>
             <a:fillRect/>
           </a:stretch>
@@ -5435,14 +5539,14 @@
       </p:pic>
       <p:pic>
         <p:nvPicPr>
-          <p:cNvPr id="41" name="Image 13" descr="/tmp/claude-0/-home-user-WeddingInvitations/2c9849ff-e4cc-5683-ac72-2a6c69aa5261/scratchpad/cat_icon.png">    </p:cNvPr>
+          <p:cNvPr id="41" name="Image 13" descr="/tmp/claude-0/-home-user-WeddingInvitations/2c9849ff-e4cc-5683-ac72-2a6c69aa5261/scratchpad/cat_icon.png"/>
           <p:cNvPicPr>
             <a:picLocks noChangeAspect="1"/>
           </p:cNvPicPr>
           <p:nvPr/>
         </p:nvPicPr>
         <p:blipFill>
-          <a:blip r:embed="rId14"/>
+          <a:blip r:embed="rId3"/>
           <a:stretch>
             <a:fillRect/>
           </a:stretch>
@@ -5478,7 +5582,7 @@
           <a:bodyPr wrap="square" lIns="0" tIns="0" rIns="0" bIns="0" rtlCol="0" anchor="ctr"/>
           <a:lstStyle/>
           <a:p>
-            <a:pPr algn="ctr" indent="0" marL="0">
+            <a:pPr marL="0" indent="0" algn="ctr">
               <a:buNone/>
             </a:pPr>
             <a:r>
@@ -5517,7 +5621,7 @@
           <a:bodyPr wrap="square" lIns="0" tIns="0" rIns="0" bIns="0" rtlCol="0" anchor="ctr"/>
           <a:lstStyle/>
           <a:p>
-            <a:pPr algn="ctr" indent="0" marL="0">
+            <a:pPr marL="0" indent="0" algn="ctr">
               <a:buNone/>
             </a:pPr>
             <a:r>
@@ -5559,6 +5663,13 @@
             <a:prstDash val="dash"/>
           </a:ln>
         </p:spPr>
+        <p:txBody>
+          <a:bodyPr/>
+          <a:lstStyle/>
+          <a:p>
+            <a:endParaRPr lang="ja-JP" altLang="en-US"/>
+          </a:p>
+        </p:txBody>
       </p:sp>
       <p:sp>
         <p:nvSpPr>
@@ -5586,17 +5697,24 @@
             <a:prstDash val="solid"/>
           </a:ln>
         </p:spPr>
+        <p:txBody>
+          <a:bodyPr/>
+          <a:lstStyle/>
+          <a:p>
+            <a:endParaRPr lang="ja-JP" altLang="en-US"/>
+          </a:p>
+        </p:txBody>
       </p:sp>
       <p:pic>
         <p:nvPicPr>
-          <p:cNvPr id="46" name="Image 14" descr="/tmp/claude-0/-home-user-WeddingInvitations/2c9849ff-e4cc-5683-ac72-2a6c69aa5261/scratchpad/cat_icon.png">    </p:cNvPr>
+          <p:cNvPr id="46" name="Image 14" descr="/tmp/claude-0/-home-user-WeddingInvitations/2c9849ff-e4cc-5683-ac72-2a6c69aa5261/scratchpad/cat_icon.png"/>
           <p:cNvPicPr>
             <a:picLocks noChangeAspect="1"/>
           </p:cNvPicPr>
           <p:nvPr/>
         </p:nvPicPr>
         <p:blipFill>
-          <a:blip r:embed="rId15"/>
+          <a:blip r:embed="rId3"/>
           <a:stretch>
             <a:fillRect/>
           </a:stretch>
@@ -5613,14 +5731,14 @@
       </p:pic>
       <p:pic>
         <p:nvPicPr>
-          <p:cNvPr id="47" name="Image 15" descr="/tmp/claude-0/-home-user-WeddingInvitations/2c9849ff-e4cc-5683-ac72-2a6c69aa5261/scratchpad/cat_icon.png">    </p:cNvPr>
+          <p:cNvPr id="47" name="Image 15" descr="/tmp/claude-0/-home-user-WeddingInvitations/2c9849ff-e4cc-5683-ac72-2a6c69aa5261/scratchpad/cat_icon.png"/>
           <p:cNvPicPr>
             <a:picLocks noChangeAspect="1"/>
           </p:cNvPicPr>
           <p:nvPr/>
         </p:nvPicPr>
         <p:blipFill>
-          <a:blip r:embed="rId16"/>
+          <a:blip r:embed="rId3"/>
           <a:stretch>
             <a:fillRect/>
           </a:stretch>
@@ -5656,7 +5774,7 @@
           <a:bodyPr wrap="square" lIns="0" tIns="0" rIns="0" bIns="0" rtlCol="0" anchor="ctr"/>
           <a:lstStyle/>
           <a:p>
-            <a:pPr algn="ctr" indent="0" marL="0">
+            <a:pPr marL="0" indent="0" algn="ctr">
               <a:buNone/>
             </a:pPr>
             <a:r>
@@ -5695,7 +5813,7 @@
           <a:bodyPr wrap="square" lIns="0" tIns="0" rIns="0" bIns="0" rtlCol="0" anchor="ctr"/>
           <a:lstStyle/>
           <a:p>
-            <a:pPr algn="ctr" indent="0" marL="0">
+            <a:pPr marL="0" indent="0" algn="ctr">
               <a:buNone/>
             </a:pPr>
             <a:r>
@@ -5737,6 +5855,13 @@
             <a:prstDash val="dash"/>
           </a:ln>
         </p:spPr>
+        <p:txBody>
+          <a:bodyPr/>
+          <a:lstStyle/>
+          <a:p>
+            <a:endParaRPr lang="ja-JP" altLang="en-US"/>
+          </a:p>
+        </p:txBody>
       </p:sp>
       <p:sp>
         <p:nvSpPr>
@@ -5764,17 +5889,24 @@
             <a:prstDash val="solid"/>
           </a:ln>
         </p:spPr>
+        <p:txBody>
+          <a:bodyPr/>
+          <a:lstStyle/>
+          <a:p>
+            <a:endParaRPr lang="ja-JP" altLang="en-US"/>
+          </a:p>
+        </p:txBody>
       </p:sp>
       <p:pic>
         <p:nvPicPr>
-          <p:cNvPr id="52" name="Image 16" descr="/tmp/claude-0/-home-user-WeddingInvitations/2c9849ff-e4cc-5683-ac72-2a6c69aa5261/scratchpad/cat_icon.png">    </p:cNvPr>
+          <p:cNvPr id="52" name="Image 16" descr="/tmp/claude-0/-home-user-WeddingInvitations/2c9849ff-e4cc-5683-ac72-2a6c69aa5261/scratchpad/cat_icon.png"/>
           <p:cNvPicPr>
             <a:picLocks noChangeAspect="1"/>
           </p:cNvPicPr>
           <p:nvPr/>
         </p:nvPicPr>
         <p:blipFill>
-          <a:blip r:embed="rId17"/>
+          <a:blip r:embed="rId3"/>
           <a:stretch>
             <a:fillRect/>
           </a:stretch>
@@ -5791,14 +5923,14 @@
       </p:pic>
       <p:pic>
         <p:nvPicPr>
-          <p:cNvPr id="53" name="Image 17" descr="/tmp/claude-0/-home-user-WeddingInvitations/2c9849ff-e4cc-5683-ac72-2a6c69aa5261/scratchpad/cat_icon.png">    </p:cNvPr>
+          <p:cNvPr id="53" name="Image 17" descr="/tmp/claude-0/-home-user-WeddingInvitations/2c9849ff-e4cc-5683-ac72-2a6c69aa5261/scratchpad/cat_icon.png"/>
           <p:cNvPicPr>
             <a:picLocks noChangeAspect="1"/>
           </p:cNvPicPr>
           <p:nvPr/>
         </p:nvPicPr>
         <p:blipFill>
-          <a:blip r:embed="rId18"/>
+          <a:blip r:embed="rId3"/>
           <a:stretch>
             <a:fillRect/>
           </a:stretch>
@@ -5834,7 +5966,7 @@
           <a:bodyPr wrap="square" lIns="0" tIns="0" rIns="0" bIns="0" rtlCol="0" anchor="ctr"/>
           <a:lstStyle/>
           <a:p>
-            <a:pPr algn="ctr" indent="0" marL="0">
+            <a:pPr marL="0" indent="0" algn="ctr">
               <a:buNone/>
             </a:pPr>
             <a:r>
@@ -5873,7 +6005,7 @@
           <a:bodyPr wrap="square" lIns="0" tIns="0" rIns="0" bIns="0" rtlCol="0" anchor="ctr"/>
           <a:lstStyle/>
           <a:p>
-            <a:pPr algn="ctr" indent="0" marL="0">
+            <a:pPr marL="0" indent="0" algn="ctr">
               <a:buNone/>
             </a:pPr>
             <a:r>
@@ -5915,6 +6047,13 @@
             <a:prstDash val="dash"/>
           </a:ln>
         </p:spPr>
+        <p:txBody>
+          <a:bodyPr/>
+          <a:lstStyle/>
+          <a:p>
+            <a:endParaRPr lang="ja-JP" altLang="en-US"/>
+          </a:p>
+        </p:txBody>
       </p:sp>
       <p:sp>
         <p:nvSpPr>
@@ -5942,17 +6081,24 @@
             <a:prstDash val="solid"/>
           </a:ln>
         </p:spPr>
+        <p:txBody>
+          <a:bodyPr/>
+          <a:lstStyle/>
+          <a:p>
+            <a:endParaRPr lang="ja-JP" altLang="en-US"/>
+          </a:p>
+        </p:txBody>
       </p:sp>
       <p:pic>
         <p:nvPicPr>
-          <p:cNvPr id="58" name="Image 18" descr="/tmp/claude-0/-home-user-WeddingInvitations/2c9849ff-e4cc-5683-ac72-2a6c69aa5261/scratchpad/cat_icon.png">    </p:cNvPr>
+          <p:cNvPr id="58" name="Image 18" descr="/tmp/claude-0/-home-user-WeddingInvitations/2c9849ff-e4cc-5683-ac72-2a6c69aa5261/scratchpad/cat_icon.png"/>
           <p:cNvPicPr>
             <a:picLocks noChangeAspect="1"/>
           </p:cNvPicPr>
           <p:nvPr/>
         </p:nvPicPr>
         <p:blipFill>
-          <a:blip r:embed="rId19"/>
+          <a:blip r:embed="rId3"/>
           <a:stretch>
             <a:fillRect/>
           </a:stretch>
@@ -5969,14 +6115,14 @@
       </p:pic>
       <p:pic>
         <p:nvPicPr>
-          <p:cNvPr id="59" name="Image 19" descr="/tmp/claude-0/-home-user-WeddingInvitations/2c9849ff-e4cc-5683-ac72-2a6c69aa5261/scratchpad/cat_icon.png">    </p:cNvPr>
+          <p:cNvPr id="59" name="Image 19" descr="/tmp/claude-0/-home-user-WeddingInvitations/2c9849ff-e4cc-5683-ac72-2a6c69aa5261/scratchpad/cat_icon.png"/>
           <p:cNvPicPr>
             <a:picLocks noChangeAspect="1"/>
           </p:cNvPicPr>
           <p:nvPr/>
         </p:nvPicPr>
         <p:blipFill>
-          <a:blip r:embed="rId20"/>
+          <a:blip r:embed="rId3"/>
           <a:stretch>
             <a:fillRect/>
           </a:stretch>
@@ -6012,7 +6158,7 @@
           <a:bodyPr wrap="square" lIns="0" tIns="0" rIns="0" bIns="0" rtlCol="0" anchor="ctr"/>
           <a:lstStyle/>
           <a:p>
-            <a:pPr algn="ctr" indent="0" marL="0">
+            <a:pPr marL="0" indent="0" algn="ctr">
               <a:buNone/>
             </a:pPr>
             <a:r>
@@ -6051,7 +6197,7 @@
           <a:bodyPr wrap="square" lIns="0" tIns="0" rIns="0" bIns="0" rtlCol="0" anchor="ctr"/>
           <a:lstStyle/>
           <a:p>
-            <a:pPr algn="ctr" indent="0" marL="0">
+            <a:pPr marL="0" indent="0" algn="ctr">
               <a:buNone/>
             </a:pPr>
             <a:r>
@@ -6093,6 +6239,13 @@
             <a:prstDash val="dash"/>
           </a:ln>
         </p:spPr>
+        <p:txBody>
+          <a:bodyPr/>
+          <a:lstStyle/>
+          <a:p>
+            <a:endParaRPr lang="ja-JP" altLang="en-US"/>
+          </a:p>
+        </p:txBody>
       </p:sp>
       <p:sp>
         <p:nvSpPr>
@@ -6120,17 +6273,24 @@
             <a:prstDash val="solid"/>
           </a:ln>
         </p:spPr>
+        <p:txBody>
+          <a:bodyPr/>
+          <a:lstStyle/>
+          <a:p>
+            <a:endParaRPr lang="ja-JP" altLang="en-US"/>
+          </a:p>
+        </p:txBody>
       </p:sp>
       <p:pic>
         <p:nvPicPr>
-          <p:cNvPr id="64" name="Image 20" descr="/tmp/claude-0/-home-user-WeddingInvitations/2c9849ff-e4cc-5683-ac72-2a6c69aa5261/scratchpad/cat_icon.png">    </p:cNvPr>
+          <p:cNvPr id="64" name="Image 20" descr="/tmp/claude-0/-home-user-WeddingInvitations/2c9849ff-e4cc-5683-ac72-2a6c69aa5261/scratchpad/cat_icon.png"/>
           <p:cNvPicPr>
             <a:picLocks noChangeAspect="1"/>
           </p:cNvPicPr>
           <p:nvPr/>
         </p:nvPicPr>
         <p:blipFill>
-          <a:blip r:embed="rId21"/>
+          <a:blip r:embed="rId3"/>
           <a:stretch>
             <a:fillRect/>
           </a:stretch>
@@ -6147,14 +6307,14 @@
       </p:pic>
       <p:pic>
         <p:nvPicPr>
-          <p:cNvPr id="65" name="Image 21" descr="/tmp/claude-0/-home-user-WeddingInvitations/2c9849ff-e4cc-5683-ac72-2a6c69aa5261/scratchpad/cat_icon.png">    </p:cNvPr>
+          <p:cNvPr id="65" name="Image 21" descr="/tmp/claude-0/-home-user-WeddingInvitations/2c9849ff-e4cc-5683-ac72-2a6c69aa5261/scratchpad/cat_icon.png"/>
           <p:cNvPicPr>
             <a:picLocks noChangeAspect="1"/>
           </p:cNvPicPr>
           <p:nvPr/>
         </p:nvPicPr>
         <p:blipFill>
-          <a:blip r:embed="rId22"/>
+          <a:blip r:embed="rId3"/>
           <a:stretch>
             <a:fillRect/>
           </a:stretch>
@@ -6190,7 +6350,7 @@
           <a:bodyPr wrap="square" lIns="0" tIns="0" rIns="0" bIns="0" rtlCol="0" anchor="ctr"/>
           <a:lstStyle/>
           <a:p>
-            <a:pPr algn="ctr" indent="0" marL="0">
+            <a:pPr marL="0" indent="0" algn="ctr">
               <a:buNone/>
             </a:pPr>
             <a:r>
@@ -6229,7 +6389,7 @@
           <a:bodyPr wrap="square" lIns="0" tIns="0" rIns="0" bIns="0" rtlCol="0" anchor="ctr"/>
           <a:lstStyle/>
           <a:p>
-            <a:pPr algn="ctr" indent="0" marL="0">
+            <a:pPr marL="0" indent="0" algn="ctr">
               <a:buNone/>
             </a:pPr>
             <a:r>
@@ -6271,6 +6431,13 @@
             <a:prstDash val="dash"/>
           </a:ln>
         </p:spPr>
+        <p:txBody>
+          <a:bodyPr/>
+          <a:lstStyle/>
+          <a:p>
+            <a:endParaRPr lang="ja-JP" altLang="en-US"/>
+          </a:p>
+        </p:txBody>
       </p:sp>
       <p:sp>
         <p:nvSpPr>
@@ -6298,17 +6465,24 @@
             <a:prstDash val="solid"/>
           </a:ln>
         </p:spPr>
+        <p:txBody>
+          <a:bodyPr/>
+          <a:lstStyle/>
+          <a:p>
+            <a:endParaRPr lang="ja-JP" altLang="en-US"/>
+          </a:p>
+        </p:txBody>
       </p:sp>
       <p:pic>
         <p:nvPicPr>
-          <p:cNvPr id="70" name="Image 22" descr="/tmp/claude-0/-home-user-WeddingInvitations/2c9849ff-e4cc-5683-ac72-2a6c69aa5261/scratchpad/cat_icon.png">    </p:cNvPr>
+          <p:cNvPr id="70" name="Image 22" descr="/tmp/claude-0/-home-user-WeddingInvitations/2c9849ff-e4cc-5683-ac72-2a6c69aa5261/scratchpad/cat_icon.png"/>
           <p:cNvPicPr>
             <a:picLocks noChangeAspect="1"/>
           </p:cNvPicPr>
           <p:nvPr/>
         </p:nvPicPr>
         <p:blipFill>
-          <a:blip r:embed="rId23"/>
+          <a:blip r:embed="rId3"/>
           <a:stretch>
             <a:fillRect/>
           </a:stretch>
@@ -6325,14 +6499,14 @@
       </p:pic>
       <p:pic>
         <p:nvPicPr>
-          <p:cNvPr id="71" name="Image 23" descr="/tmp/claude-0/-home-user-WeddingInvitations/2c9849ff-e4cc-5683-ac72-2a6c69aa5261/scratchpad/cat_icon.png">    </p:cNvPr>
+          <p:cNvPr id="71" name="Image 23" descr="/tmp/claude-0/-home-user-WeddingInvitations/2c9849ff-e4cc-5683-ac72-2a6c69aa5261/scratchpad/cat_icon.png"/>
           <p:cNvPicPr>
             <a:picLocks noChangeAspect="1"/>
           </p:cNvPicPr>
           <p:nvPr/>
         </p:nvPicPr>
         <p:blipFill>
-          <a:blip r:embed="rId24"/>
+          <a:blip r:embed="rId3"/>
           <a:stretch>
             <a:fillRect/>
           </a:stretch>
@@ -6368,7 +6542,7 @@
           <a:bodyPr wrap="square" lIns="0" tIns="0" rIns="0" bIns="0" rtlCol="0" anchor="ctr"/>
           <a:lstStyle/>
           <a:p>
-            <a:pPr algn="ctr" indent="0" marL="0">
+            <a:pPr marL="0" indent="0" algn="ctr">
               <a:buNone/>
             </a:pPr>
             <a:r>
@@ -6407,7 +6581,7 @@
           <a:bodyPr wrap="square" lIns="0" tIns="0" rIns="0" bIns="0" rtlCol="0" anchor="ctr"/>
           <a:lstStyle/>
           <a:p>
-            <a:pPr algn="ctr" indent="0" marL="0">
+            <a:pPr marL="0" indent="0" algn="ctr">
               <a:buNone/>
             </a:pPr>
             <a:r>
@@ -6449,6 +6623,13 @@
             <a:prstDash val="dash"/>
           </a:ln>
         </p:spPr>
+        <p:txBody>
+          <a:bodyPr/>
+          <a:lstStyle/>
+          <a:p>
+            <a:endParaRPr lang="ja-JP" altLang="en-US"/>
+          </a:p>
+        </p:txBody>
       </p:sp>
       <p:sp>
         <p:nvSpPr>
@@ -6476,17 +6657,24 @@
             <a:prstDash val="solid"/>
           </a:ln>
         </p:spPr>
+        <p:txBody>
+          <a:bodyPr/>
+          <a:lstStyle/>
+          <a:p>
+            <a:endParaRPr lang="ja-JP" altLang="en-US"/>
+          </a:p>
+        </p:txBody>
       </p:sp>
       <p:pic>
         <p:nvPicPr>
-          <p:cNvPr id="76" name="Image 24" descr="/tmp/claude-0/-home-user-WeddingInvitations/2c9849ff-e4cc-5683-ac72-2a6c69aa5261/scratchpad/cat_icon.png">    </p:cNvPr>
+          <p:cNvPr id="76" name="Image 24" descr="/tmp/claude-0/-home-user-WeddingInvitations/2c9849ff-e4cc-5683-ac72-2a6c69aa5261/scratchpad/cat_icon.png"/>
           <p:cNvPicPr>
             <a:picLocks noChangeAspect="1"/>
           </p:cNvPicPr>
           <p:nvPr/>
         </p:nvPicPr>
         <p:blipFill>
-          <a:blip r:embed="rId25"/>
+          <a:blip r:embed="rId3"/>
           <a:stretch>
             <a:fillRect/>
           </a:stretch>
@@ -6503,14 +6691,14 @@
       </p:pic>
       <p:pic>
         <p:nvPicPr>
-          <p:cNvPr id="77" name="Image 25" descr="/tmp/claude-0/-home-user-WeddingInvitations/2c9849ff-e4cc-5683-ac72-2a6c69aa5261/scratchpad/cat_icon.png">    </p:cNvPr>
+          <p:cNvPr id="77" name="Image 25" descr="/tmp/claude-0/-home-user-WeddingInvitations/2c9849ff-e4cc-5683-ac72-2a6c69aa5261/scratchpad/cat_icon.png"/>
           <p:cNvPicPr>
             <a:picLocks noChangeAspect="1"/>
           </p:cNvPicPr>
           <p:nvPr/>
         </p:nvPicPr>
         <p:blipFill>
-          <a:blip r:embed="rId26"/>
+          <a:blip r:embed="rId3"/>
           <a:stretch>
             <a:fillRect/>
           </a:stretch>
@@ -6546,7 +6734,7 @@
           <a:bodyPr wrap="square" lIns="0" tIns="0" rIns="0" bIns="0" rtlCol="0" anchor="ctr"/>
           <a:lstStyle/>
           <a:p>
-            <a:pPr algn="ctr" indent="0" marL="0">
+            <a:pPr marL="0" indent="0" algn="ctr">
               <a:buNone/>
             </a:pPr>
             <a:r>
@@ -6585,7 +6773,7 @@
           <a:bodyPr wrap="square" lIns="0" tIns="0" rIns="0" bIns="0" rtlCol="0" anchor="ctr"/>
           <a:lstStyle/>
           <a:p>
-            <a:pPr algn="ctr" indent="0" marL="0">
+            <a:pPr marL="0" indent="0" algn="ctr">
               <a:buNone/>
             </a:pPr>
             <a:r>
@@ -6627,6 +6815,13 @@
             <a:prstDash val="dash"/>
           </a:ln>
         </p:spPr>
+        <p:txBody>
+          <a:bodyPr/>
+          <a:lstStyle/>
+          <a:p>
+            <a:endParaRPr lang="ja-JP" altLang="en-US"/>
+          </a:p>
+        </p:txBody>
       </p:sp>
       <p:sp>
         <p:nvSpPr>
@@ -6654,17 +6849,24 @@
             <a:prstDash val="solid"/>
           </a:ln>
         </p:spPr>
+        <p:txBody>
+          <a:bodyPr/>
+          <a:lstStyle/>
+          <a:p>
+            <a:endParaRPr lang="ja-JP" altLang="en-US"/>
+          </a:p>
+        </p:txBody>
       </p:sp>
       <p:pic>
         <p:nvPicPr>
-          <p:cNvPr id="82" name="Image 26" descr="/tmp/claude-0/-home-user-WeddingInvitations/2c9849ff-e4cc-5683-ac72-2a6c69aa5261/scratchpad/cat_icon.png">    </p:cNvPr>
+          <p:cNvPr id="82" name="Image 26" descr="/tmp/claude-0/-home-user-WeddingInvitations/2c9849ff-e4cc-5683-ac72-2a6c69aa5261/scratchpad/cat_icon.png"/>
           <p:cNvPicPr>
             <a:picLocks noChangeAspect="1"/>
           </p:cNvPicPr>
           <p:nvPr/>
         </p:nvPicPr>
         <p:blipFill>
-          <a:blip r:embed="rId27"/>
+          <a:blip r:embed="rId3"/>
           <a:stretch>
             <a:fillRect/>
           </a:stretch>
@@ -6681,14 +6883,14 @@
       </p:pic>
       <p:pic>
         <p:nvPicPr>
-          <p:cNvPr id="83" name="Image 27" descr="/tmp/claude-0/-home-user-WeddingInvitations/2c9849ff-e4cc-5683-ac72-2a6c69aa5261/scratchpad/cat_icon.png">    </p:cNvPr>
+          <p:cNvPr id="83" name="Image 27" descr="/tmp/claude-0/-home-user-WeddingInvitations/2c9849ff-e4cc-5683-ac72-2a6c69aa5261/scratchpad/cat_icon.png"/>
           <p:cNvPicPr>
             <a:picLocks noChangeAspect="1"/>
           </p:cNvPicPr>
           <p:nvPr/>
         </p:nvPicPr>
         <p:blipFill>
-          <a:blip r:embed="rId28"/>
+          <a:blip r:embed="rId3"/>
           <a:stretch>
             <a:fillRect/>
           </a:stretch>
@@ -6724,7 +6926,7 @@
           <a:bodyPr wrap="square" lIns="0" tIns="0" rIns="0" bIns="0" rtlCol="0" anchor="ctr"/>
           <a:lstStyle/>
           <a:p>
-            <a:pPr algn="ctr" indent="0" marL="0">
+            <a:pPr marL="0" indent="0" algn="ctr">
               <a:buNone/>
             </a:pPr>
             <a:r>
@@ -6763,7 +6965,7 @@
           <a:bodyPr wrap="square" lIns="0" tIns="0" rIns="0" bIns="0" rtlCol="0" anchor="ctr"/>
           <a:lstStyle/>
           <a:p>
-            <a:pPr algn="ctr" indent="0" marL="0">
+            <a:pPr marL="0" indent="0" algn="ctr">
               <a:buNone/>
             </a:pPr>
             <a:r>
@@ -6805,6 +7007,13 @@
             <a:prstDash val="dash"/>
           </a:ln>
         </p:spPr>
+        <p:txBody>
+          <a:bodyPr/>
+          <a:lstStyle/>
+          <a:p>
+            <a:endParaRPr lang="ja-JP" altLang="en-US"/>
+          </a:p>
+        </p:txBody>
       </p:sp>
       <p:sp>
         <p:nvSpPr>
@@ -6832,17 +7041,24 @@
             <a:prstDash val="solid"/>
           </a:ln>
         </p:spPr>
+        <p:txBody>
+          <a:bodyPr/>
+          <a:lstStyle/>
+          <a:p>
+            <a:endParaRPr lang="ja-JP" altLang="en-US"/>
+          </a:p>
+        </p:txBody>
       </p:sp>
       <p:pic>
         <p:nvPicPr>
-          <p:cNvPr id="88" name="Image 28" descr="/tmp/claude-0/-home-user-WeddingInvitations/2c9849ff-e4cc-5683-ac72-2a6c69aa5261/scratchpad/cat_icon.png">    </p:cNvPr>
+          <p:cNvPr id="88" name="Image 28" descr="/tmp/claude-0/-home-user-WeddingInvitations/2c9849ff-e4cc-5683-ac72-2a6c69aa5261/scratchpad/cat_icon.png"/>
           <p:cNvPicPr>
             <a:picLocks noChangeAspect="1"/>
           </p:cNvPicPr>
           <p:nvPr/>
         </p:nvPicPr>
         <p:blipFill>
-          <a:blip r:embed="rId29"/>
+          <a:blip r:embed="rId3"/>
           <a:stretch>
             <a:fillRect/>
           </a:stretch>
@@ -6859,14 +7075,14 @@
       </p:pic>
       <p:pic>
         <p:nvPicPr>
-          <p:cNvPr id="89" name="Image 29" descr="/tmp/claude-0/-home-user-WeddingInvitations/2c9849ff-e4cc-5683-ac72-2a6c69aa5261/scratchpad/cat_icon.png">    </p:cNvPr>
+          <p:cNvPr id="89" name="Image 29" descr="/tmp/claude-0/-home-user-WeddingInvitations/2c9849ff-e4cc-5683-ac72-2a6c69aa5261/scratchpad/cat_icon.png"/>
           <p:cNvPicPr>
             <a:picLocks noChangeAspect="1"/>
           </p:cNvPicPr>
           <p:nvPr/>
         </p:nvPicPr>
         <p:blipFill>
-          <a:blip r:embed="rId30"/>
+          <a:blip r:embed="rId3"/>
           <a:stretch>
             <a:fillRect/>
           </a:stretch>
@@ -6902,7 +7118,7 @@
           <a:bodyPr wrap="square" lIns="0" tIns="0" rIns="0" bIns="0" rtlCol="0" anchor="ctr"/>
           <a:lstStyle/>
           <a:p>
-            <a:pPr algn="ctr" indent="0" marL="0">
+            <a:pPr marL="0" indent="0" algn="ctr">
               <a:buNone/>
             </a:pPr>
             <a:r>
@@ -6941,7 +7157,7 @@
           <a:bodyPr wrap="square" lIns="0" tIns="0" rIns="0" bIns="0" rtlCol="0" anchor="ctr"/>
           <a:lstStyle/>
           <a:p>
-            <a:pPr algn="ctr" indent="0" marL="0">
+            <a:pPr marL="0" indent="0" algn="ctr">
               <a:buNone/>
             </a:pPr>
             <a:r>
@@ -6983,6 +7199,13 @@
             <a:prstDash val="dash"/>
           </a:ln>
         </p:spPr>
+        <p:txBody>
+          <a:bodyPr/>
+          <a:lstStyle/>
+          <a:p>
+            <a:endParaRPr lang="ja-JP" altLang="en-US"/>
+          </a:p>
+        </p:txBody>
       </p:sp>
       <p:sp>
         <p:nvSpPr>
@@ -7010,17 +7233,24 @@
             <a:prstDash val="solid"/>
           </a:ln>
         </p:spPr>
+        <p:txBody>
+          <a:bodyPr/>
+          <a:lstStyle/>
+          <a:p>
+            <a:endParaRPr lang="ja-JP" altLang="en-US"/>
+          </a:p>
+        </p:txBody>
       </p:sp>
       <p:pic>
         <p:nvPicPr>
-          <p:cNvPr id="94" name="Image 30" descr="/tmp/claude-0/-home-user-WeddingInvitations/2c9849ff-e4cc-5683-ac72-2a6c69aa5261/scratchpad/cat_icon.png">    </p:cNvPr>
+          <p:cNvPr id="94" name="Image 30" descr="/tmp/claude-0/-home-user-WeddingInvitations/2c9849ff-e4cc-5683-ac72-2a6c69aa5261/scratchpad/cat_icon.png"/>
           <p:cNvPicPr>
             <a:picLocks noChangeAspect="1"/>
           </p:cNvPicPr>
           <p:nvPr/>
         </p:nvPicPr>
         <p:blipFill>
-          <a:blip r:embed="rId31"/>
+          <a:blip r:embed="rId3"/>
           <a:stretch>
             <a:fillRect/>
           </a:stretch>
@@ -7037,14 +7267,14 @@
       </p:pic>
       <p:pic>
         <p:nvPicPr>
-          <p:cNvPr id="95" name="Image 31" descr="/tmp/claude-0/-home-user-WeddingInvitations/2c9849ff-e4cc-5683-ac72-2a6c69aa5261/scratchpad/cat_icon.png">    </p:cNvPr>
+          <p:cNvPr id="95" name="Image 31" descr="/tmp/claude-0/-home-user-WeddingInvitations/2c9849ff-e4cc-5683-ac72-2a6c69aa5261/scratchpad/cat_icon.png"/>
           <p:cNvPicPr>
             <a:picLocks noChangeAspect="1"/>
           </p:cNvPicPr>
           <p:nvPr/>
         </p:nvPicPr>
         <p:blipFill>
-          <a:blip r:embed="rId32"/>
+          <a:blip r:embed="rId3"/>
           <a:stretch>
             <a:fillRect/>
           </a:stretch>
@@ -7080,7 +7310,7 @@
           <a:bodyPr wrap="square" lIns="0" tIns="0" rIns="0" bIns="0" rtlCol="0" anchor="ctr"/>
           <a:lstStyle/>
           <a:p>
-            <a:pPr algn="ctr" indent="0" marL="0">
+            <a:pPr marL="0" indent="0" algn="ctr">
               <a:buNone/>
             </a:pPr>
             <a:r>
@@ -7119,7 +7349,7 @@
           <a:bodyPr wrap="square" lIns="0" tIns="0" rIns="0" bIns="0" rtlCol="0" anchor="ctr"/>
           <a:lstStyle/>
           <a:p>
-            <a:pPr algn="ctr" indent="0" marL="0">
+            <a:pPr marL="0" indent="0" algn="ctr">
               <a:buNone/>
             </a:pPr>
             <a:r>
@@ -7153,6 +7383,7 @@
         <a:solidFill>
           <a:srgbClr val="FFFFFF"/>
         </a:solidFill>
+        <a:effectLst/>
       </p:bgPr>
     </p:bg>
     <p:spTree>
@@ -7193,6 +7424,13 @@
             <a:prstDash val="dash"/>
           </a:ln>
         </p:spPr>
+        <p:txBody>
+          <a:bodyPr/>
+          <a:lstStyle/>
+          <a:p>
+            <a:endParaRPr lang="ja-JP" altLang="en-US"/>
+          </a:p>
+        </p:txBody>
       </p:sp>
       <p:sp>
         <p:nvSpPr>
@@ -7220,17 +7458,24 @@
             <a:prstDash val="solid"/>
           </a:ln>
         </p:spPr>
+        <p:txBody>
+          <a:bodyPr/>
+          <a:lstStyle/>
+          <a:p>
+            <a:endParaRPr lang="ja-JP" altLang="en-US"/>
+          </a:p>
+        </p:txBody>
       </p:sp>
       <p:pic>
         <p:nvPicPr>
-          <p:cNvPr id="4" name="Image 0" descr="/tmp/claude-0/-home-user-WeddingInvitations/2c9849ff-e4cc-5683-ac72-2a6c69aa5261/scratchpad/cat_icon.png">    </p:cNvPr>
+          <p:cNvPr id="4" name="Image 0" descr="/tmp/claude-0/-home-user-WeddingInvitations/2c9849ff-e4cc-5683-ac72-2a6c69aa5261/scratchpad/cat_icon.png"/>
           <p:cNvPicPr>
             <a:picLocks noChangeAspect="1"/>
           </p:cNvPicPr>
           <p:nvPr/>
         </p:nvPicPr>
         <p:blipFill>
-          <a:blip r:embed="rId1"/>
+          <a:blip r:embed="rId3"/>
           <a:stretch>
             <a:fillRect/>
           </a:stretch>
@@ -7247,14 +7492,14 @@
       </p:pic>
       <p:pic>
         <p:nvPicPr>
-          <p:cNvPr id="5" name="Image 1" descr="/tmp/claude-0/-home-user-WeddingInvitations/2c9849ff-e4cc-5683-ac72-2a6c69aa5261/scratchpad/cat_icon.png">    </p:cNvPr>
+          <p:cNvPr id="5" name="Image 1" descr="/tmp/claude-0/-home-user-WeddingInvitations/2c9849ff-e4cc-5683-ac72-2a6c69aa5261/scratchpad/cat_icon.png"/>
           <p:cNvPicPr>
             <a:picLocks noChangeAspect="1"/>
           </p:cNvPicPr>
           <p:nvPr/>
         </p:nvPicPr>
         <p:blipFill>
-          <a:blip r:embed="rId2"/>
+          <a:blip r:embed="rId3"/>
           <a:stretch>
             <a:fillRect/>
           </a:stretch>
@@ -7290,7 +7535,7 @@
           <a:bodyPr wrap="square" lIns="0" tIns="0" rIns="0" bIns="0" rtlCol="0" anchor="ctr"/>
           <a:lstStyle/>
           <a:p>
-            <a:pPr algn="ctr" indent="0" marL="0">
+            <a:pPr marL="0" indent="0" algn="ctr">
               <a:buNone/>
             </a:pPr>
             <a:r>
@@ -7329,7 +7574,7 @@
           <a:bodyPr wrap="square" lIns="0" tIns="0" rIns="0" bIns="0" rtlCol="0" anchor="ctr"/>
           <a:lstStyle/>
           <a:p>
-            <a:pPr algn="ctr" indent="0" marL="0">
+            <a:pPr marL="0" indent="0" algn="ctr">
               <a:buNone/>
             </a:pPr>
             <a:r>
@@ -7371,6 +7616,13 @@
             <a:prstDash val="dash"/>
           </a:ln>
         </p:spPr>
+        <p:txBody>
+          <a:bodyPr/>
+          <a:lstStyle/>
+          <a:p>
+            <a:endParaRPr lang="ja-JP" altLang="en-US"/>
+          </a:p>
+        </p:txBody>
       </p:sp>
       <p:sp>
         <p:nvSpPr>
@@ -7398,10 +7650,17 @@
             <a:prstDash val="solid"/>
           </a:ln>
         </p:spPr>
+        <p:txBody>
+          <a:bodyPr/>
+          <a:lstStyle/>
+          <a:p>
+            <a:endParaRPr lang="ja-JP" altLang="en-US"/>
+          </a:p>
+        </p:txBody>
       </p:sp>
       <p:pic>
         <p:nvPicPr>
-          <p:cNvPr id="10" name="Image 2" descr="/tmp/claude-0/-home-user-WeddingInvitations/2c9849ff-e4cc-5683-ac72-2a6c69aa5261/scratchpad/cat_icon.png">    </p:cNvPr>
+          <p:cNvPr id="10" name="Image 2" descr="/tmp/claude-0/-home-user-WeddingInvitations/2c9849ff-e4cc-5683-ac72-2a6c69aa5261/scratchpad/cat_icon.png"/>
           <p:cNvPicPr>
             <a:picLocks noChangeAspect="1"/>
           </p:cNvPicPr>
@@ -7425,14 +7684,14 @@
       </p:pic>
       <p:pic>
         <p:nvPicPr>
-          <p:cNvPr id="11" name="Image 3" descr="/tmp/claude-0/-home-user-WeddingInvitations/2c9849ff-e4cc-5683-ac72-2a6c69aa5261/scratchpad/cat_icon.png">    </p:cNvPr>
+          <p:cNvPr id="11" name="Image 3" descr="/tmp/claude-0/-home-user-WeddingInvitations/2c9849ff-e4cc-5683-ac72-2a6c69aa5261/scratchpad/cat_icon.png"/>
           <p:cNvPicPr>
             <a:picLocks noChangeAspect="1"/>
           </p:cNvPicPr>
           <p:nvPr/>
         </p:nvPicPr>
         <p:blipFill>
-          <a:blip r:embed="rId4"/>
+          <a:blip r:embed="rId3"/>
           <a:stretch>
             <a:fillRect/>
           </a:stretch>
@@ -7468,7 +7727,7 @@
           <a:bodyPr wrap="square" lIns="0" tIns="0" rIns="0" bIns="0" rtlCol="0" anchor="ctr"/>
           <a:lstStyle/>
           <a:p>
-            <a:pPr algn="ctr" indent="0" marL="0">
+            <a:pPr marL="0" indent="0" algn="ctr">
               <a:buNone/>
             </a:pPr>
             <a:r>
@@ -7507,7 +7766,7 @@
           <a:bodyPr wrap="square" lIns="0" tIns="0" rIns="0" bIns="0" rtlCol="0" anchor="ctr"/>
           <a:lstStyle/>
           <a:p>
-            <a:pPr algn="ctr" indent="0" marL="0">
+            <a:pPr marL="0" indent="0" algn="ctr">
               <a:buNone/>
             </a:pPr>
             <a:r>
@@ -7549,6 +7808,13 @@
             <a:prstDash val="dash"/>
           </a:ln>
         </p:spPr>
+        <p:txBody>
+          <a:bodyPr/>
+          <a:lstStyle/>
+          <a:p>
+            <a:endParaRPr lang="ja-JP" altLang="en-US"/>
+          </a:p>
+        </p:txBody>
       </p:sp>
       <p:sp>
         <p:nvSpPr>
@@ -7576,17 +7842,24 @@
             <a:prstDash val="solid"/>
           </a:ln>
         </p:spPr>
+        <p:txBody>
+          <a:bodyPr/>
+          <a:lstStyle/>
+          <a:p>
+            <a:endParaRPr lang="ja-JP" altLang="en-US"/>
+          </a:p>
+        </p:txBody>
       </p:sp>
       <p:pic>
         <p:nvPicPr>
-          <p:cNvPr id="16" name="Image 4" descr="/tmp/claude-0/-home-user-WeddingInvitations/2c9849ff-e4cc-5683-ac72-2a6c69aa5261/scratchpad/cat_icon.png">    </p:cNvPr>
+          <p:cNvPr id="16" name="Image 4" descr="/tmp/claude-0/-home-user-WeddingInvitations/2c9849ff-e4cc-5683-ac72-2a6c69aa5261/scratchpad/cat_icon.png"/>
           <p:cNvPicPr>
             <a:picLocks noChangeAspect="1"/>
           </p:cNvPicPr>
           <p:nvPr/>
         </p:nvPicPr>
         <p:blipFill>
-          <a:blip r:embed="rId5"/>
+          <a:blip r:embed="rId3"/>
           <a:stretch>
             <a:fillRect/>
           </a:stretch>
@@ -7603,14 +7876,14 @@
       </p:pic>
       <p:pic>
         <p:nvPicPr>
-          <p:cNvPr id="17" name="Image 5" descr="/tmp/claude-0/-home-user-WeddingInvitations/2c9849ff-e4cc-5683-ac72-2a6c69aa5261/scratchpad/cat_icon.png">    </p:cNvPr>
+          <p:cNvPr id="17" name="Image 5" descr="/tmp/claude-0/-home-user-WeddingInvitations/2c9849ff-e4cc-5683-ac72-2a6c69aa5261/scratchpad/cat_icon.png"/>
           <p:cNvPicPr>
             <a:picLocks noChangeAspect="1"/>
           </p:cNvPicPr>
           <p:nvPr/>
         </p:nvPicPr>
         <p:blipFill>
-          <a:blip r:embed="rId6"/>
+          <a:blip r:embed="rId3"/>
           <a:stretch>
             <a:fillRect/>
           </a:stretch>
@@ -7646,7 +7919,7 @@
           <a:bodyPr wrap="square" lIns="0" tIns="0" rIns="0" bIns="0" rtlCol="0" anchor="ctr"/>
           <a:lstStyle/>
           <a:p>
-            <a:pPr algn="ctr" indent="0" marL="0">
+            <a:pPr marL="0" indent="0" algn="ctr">
               <a:buNone/>
             </a:pPr>
             <a:r>
@@ -7685,7 +7958,7 @@
           <a:bodyPr wrap="square" lIns="0" tIns="0" rIns="0" bIns="0" rtlCol="0" anchor="ctr"/>
           <a:lstStyle/>
           <a:p>
-            <a:pPr algn="ctr" indent="0" marL="0">
+            <a:pPr marL="0" indent="0" algn="ctr">
               <a:buNone/>
             </a:pPr>
             <a:r>
@@ -7727,6 +8000,13 @@
             <a:prstDash val="dash"/>
           </a:ln>
         </p:spPr>
+        <p:txBody>
+          <a:bodyPr/>
+          <a:lstStyle/>
+          <a:p>
+            <a:endParaRPr lang="ja-JP" altLang="en-US"/>
+          </a:p>
+        </p:txBody>
       </p:sp>
       <p:sp>
         <p:nvSpPr>
@@ -7754,17 +8034,24 @@
             <a:prstDash val="solid"/>
           </a:ln>
         </p:spPr>
+        <p:txBody>
+          <a:bodyPr/>
+          <a:lstStyle/>
+          <a:p>
+            <a:endParaRPr lang="ja-JP" altLang="en-US"/>
+          </a:p>
+        </p:txBody>
       </p:sp>
       <p:pic>
         <p:nvPicPr>
-          <p:cNvPr id="22" name="Image 6" descr="/tmp/claude-0/-home-user-WeddingInvitations/2c9849ff-e4cc-5683-ac72-2a6c69aa5261/scratchpad/cat_icon.png">    </p:cNvPr>
+          <p:cNvPr id="22" name="Image 6" descr="/tmp/claude-0/-home-user-WeddingInvitations/2c9849ff-e4cc-5683-ac72-2a6c69aa5261/scratchpad/cat_icon.png"/>
           <p:cNvPicPr>
             <a:picLocks noChangeAspect="1"/>
           </p:cNvPicPr>
           <p:nvPr/>
         </p:nvPicPr>
         <p:blipFill>
-          <a:blip r:embed="rId7"/>
+          <a:blip r:embed="rId3"/>
           <a:stretch>
             <a:fillRect/>
           </a:stretch>
@@ -7781,14 +8068,14 @@
       </p:pic>
       <p:pic>
         <p:nvPicPr>
-          <p:cNvPr id="23" name="Image 7" descr="/tmp/claude-0/-home-user-WeddingInvitations/2c9849ff-e4cc-5683-ac72-2a6c69aa5261/scratchpad/cat_icon.png">    </p:cNvPr>
+          <p:cNvPr id="23" name="Image 7" descr="/tmp/claude-0/-home-user-WeddingInvitations/2c9849ff-e4cc-5683-ac72-2a6c69aa5261/scratchpad/cat_icon.png"/>
           <p:cNvPicPr>
             <a:picLocks noChangeAspect="1"/>
           </p:cNvPicPr>
           <p:nvPr/>
         </p:nvPicPr>
         <p:blipFill>
-          <a:blip r:embed="rId8"/>
+          <a:blip r:embed="rId3"/>
           <a:stretch>
             <a:fillRect/>
           </a:stretch>
@@ -7824,7 +8111,7 @@
           <a:bodyPr wrap="square" lIns="0" tIns="0" rIns="0" bIns="0" rtlCol="0" anchor="ctr"/>
           <a:lstStyle/>
           <a:p>
-            <a:pPr algn="ctr" indent="0" marL="0">
+            <a:pPr marL="0" indent="0" algn="ctr">
               <a:buNone/>
             </a:pPr>
             <a:r>
@@ -7863,7 +8150,7 @@
           <a:bodyPr wrap="square" lIns="0" tIns="0" rIns="0" bIns="0" rtlCol="0" anchor="ctr"/>
           <a:lstStyle/>
           <a:p>
-            <a:pPr algn="ctr" indent="0" marL="0">
+            <a:pPr marL="0" indent="0" algn="ctr">
               <a:buNone/>
             </a:pPr>
             <a:r>
@@ -7905,6 +8192,13 @@
             <a:prstDash val="dash"/>
           </a:ln>
         </p:spPr>
+        <p:txBody>
+          <a:bodyPr/>
+          <a:lstStyle/>
+          <a:p>
+            <a:endParaRPr lang="ja-JP" altLang="en-US"/>
+          </a:p>
+        </p:txBody>
       </p:sp>
       <p:sp>
         <p:nvSpPr>
@@ -7932,17 +8226,24 @@
             <a:prstDash val="solid"/>
           </a:ln>
         </p:spPr>
+        <p:txBody>
+          <a:bodyPr/>
+          <a:lstStyle/>
+          <a:p>
+            <a:endParaRPr lang="ja-JP" altLang="en-US"/>
+          </a:p>
+        </p:txBody>
       </p:sp>
       <p:pic>
         <p:nvPicPr>
-          <p:cNvPr id="28" name="Image 8" descr="/tmp/claude-0/-home-user-WeddingInvitations/2c9849ff-e4cc-5683-ac72-2a6c69aa5261/scratchpad/cat_icon.png">    </p:cNvPr>
+          <p:cNvPr id="28" name="Image 8" descr="/tmp/claude-0/-home-user-WeddingInvitations/2c9849ff-e4cc-5683-ac72-2a6c69aa5261/scratchpad/cat_icon.png"/>
           <p:cNvPicPr>
             <a:picLocks noChangeAspect="1"/>
           </p:cNvPicPr>
           <p:nvPr/>
         </p:nvPicPr>
         <p:blipFill>
-          <a:blip r:embed="rId9"/>
+          <a:blip r:embed="rId3"/>
           <a:stretch>
             <a:fillRect/>
           </a:stretch>
@@ -7959,14 +8260,14 @@
       </p:pic>
       <p:pic>
         <p:nvPicPr>
-          <p:cNvPr id="29" name="Image 9" descr="/tmp/claude-0/-home-user-WeddingInvitations/2c9849ff-e4cc-5683-ac72-2a6c69aa5261/scratchpad/cat_icon.png">    </p:cNvPr>
+          <p:cNvPr id="29" name="Image 9" descr="/tmp/claude-0/-home-user-WeddingInvitations/2c9849ff-e4cc-5683-ac72-2a6c69aa5261/scratchpad/cat_icon.png"/>
           <p:cNvPicPr>
             <a:picLocks noChangeAspect="1"/>
           </p:cNvPicPr>
           <p:nvPr/>
         </p:nvPicPr>
         <p:blipFill>
-          <a:blip r:embed="rId10"/>
+          <a:blip r:embed="rId3"/>
           <a:stretch>
             <a:fillRect/>
           </a:stretch>
@@ -8002,7 +8303,7 @@
           <a:bodyPr wrap="square" lIns="0" tIns="0" rIns="0" bIns="0" rtlCol="0" anchor="ctr"/>
           <a:lstStyle/>
           <a:p>
-            <a:pPr algn="ctr" indent="0" marL="0">
+            <a:pPr marL="0" indent="0" algn="ctr">
               <a:buNone/>
             </a:pPr>
             <a:r>
@@ -8041,7 +8342,7 @@
           <a:bodyPr wrap="square" lIns="0" tIns="0" rIns="0" bIns="0" rtlCol="0" anchor="ctr"/>
           <a:lstStyle/>
           <a:p>
-            <a:pPr algn="ctr" indent="0" marL="0">
+            <a:pPr marL="0" indent="0" algn="ctr">
               <a:buNone/>
             </a:pPr>
             <a:r>
@@ -8083,6 +8384,13 @@
             <a:prstDash val="dash"/>
           </a:ln>
         </p:spPr>
+        <p:txBody>
+          <a:bodyPr/>
+          <a:lstStyle/>
+          <a:p>
+            <a:endParaRPr lang="ja-JP" altLang="en-US"/>
+          </a:p>
+        </p:txBody>
       </p:sp>
       <p:sp>
         <p:nvSpPr>
@@ -8110,17 +8418,24 @@
             <a:prstDash val="solid"/>
           </a:ln>
         </p:spPr>
+        <p:txBody>
+          <a:bodyPr/>
+          <a:lstStyle/>
+          <a:p>
+            <a:endParaRPr lang="ja-JP" altLang="en-US"/>
+          </a:p>
+        </p:txBody>
       </p:sp>
       <p:pic>
         <p:nvPicPr>
-          <p:cNvPr id="34" name="Image 10" descr="/tmp/claude-0/-home-user-WeddingInvitations/2c9849ff-e4cc-5683-ac72-2a6c69aa5261/scratchpad/cat_icon.png">    </p:cNvPr>
+          <p:cNvPr id="34" name="Image 10" descr="/tmp/claude-0/-home-user-WeddingInvitations/2c9849ff-e4cc-5683-ac72-2a6c69aa5261/scratchpad/cat_icon.png"/>
           <p:cNvPicPr>
             <a:picLocks noChangeAspect="1"/>
           </p:cNvPicPr>
           <p:nvPr/>
         </p:nvPicPr>
         <p:blipFill>
-          <a:blip r:embed="rId11"/>
+          <a:blip r:embed="rId3"/>
           <a:stretch>
             <a:fillRect/>
           </a:stretch>
@@ -8137,14 +8452,14 @@
       </p:pic>
       <p:pic>
         <p:nvPicPr>
-          <p:cNvPr id="35" name="Image 11" descr="/tmp/claude-0/-home-user-WeddingInvitations/2c9849ff-e4cc-5683-ac72-2a6c69aa5261/scratchpad/cat_icon.png">    </p:cNvPr>
+          <p:cNvPr id="35" name="Image 11" descr="/tmp/claude-0/-home-user-WeddingInvitations/2c9849ff-e4cc-5683-ac72-2a6c69aa5261/scratchpad/cat_icon.png"/>
           <p:cNvPicPr>
             <a:picLocks noChangeAspect="1"/>
           </p:cNvPicPr>
           <p:nvPr/>
         </p:nvPicPr>
         <p:blipFill>
-          <a:blip r:embed="rId12"/>
+          <a:blip r:embed="rId3"/>
           <a:stretch>
             <a:fillRect/>
           </a:stretch>
@@ -8180,7 +8495,7 @@
           <a:bodyPr wrap="square" lIns="0" tIns="0" rIns="0" bIns="0" rtlCol="0" anchor="ctr"/>
           <a:lstStyle/>
           <a:p>
-            <a:pPr algn="ctr" indent="0" marL="0">
+            <a:pPr marL="0" indent="0" algn="ctr">
               <a:buNone/>
             </a:pPr>
             <a:r>
@@ -8219,7 +8534,7 @@
           <a:bodyPr wrap="square" lIns="0" tIns="0" rIns="0" bIns="0" rtlCol="0" anchor="ctr"/>
           <a:lstStyle/>
           <a:p>
-            <a:pPr algn="ctr" indent="0" marL="0">
+            <a:pPr marL="0" indent="0" algn="ctr">
               <a:buNone/>
             </a:pPr>
             <a:r>
@@ -8261,6 +8576,13 @@
             <a:prstDash val="dash"/>
           </a:ln>
         </p:spPr>
+        <p:txBody>
+          <a:bodyPr/>
+          <a:lstStyle/>
+          <a:p>
+            <a:endParaRPr lang="ja-JP" altLang="en-US"/>
+          </a:p>
+        </p:txBody>
       </p:sp>
       <p:sp>
         <p:nvSpPr>
@@ -8288,17 +8610,24 @@
             <a:prstDash val="solid"/>
           </a:ln>
         </p:spPr>
+        <p:txBody>
+          <a:bodyPr/>
+          <a:lstStyle/>
+          <a:p>
+            <a:endParaRPr lang="ja-JP" altLang="en-US"/>
+          </a:p>
+        </p:txBody>
       </p:sp>
       <p:pic>
         <p:nvPicPr>
-          <p:cNvPr id="40" name="Image 12" descr="/tmp/claude-0/-home-user-WeddingInvitations/2c9849ff-e4cc-5683-ac72-2a6c69aa5261/scratchpad/cat_icon.png">    </p:cNvPr>
+          <p:cNvPr id="40" name="Image 12" descr="/tmp/claude-0/-home-user-WeddingInvitations/2c9849ff-e4cc-5683-ac72-2a6c69aa5261/scratchpad/cat_icon.png"/>
           <p:cNvPicPr>
             <a:picLocks noChangeAspect="1"/>
           </p:cNvPicPr>
           <p:nvPr/>
         </p:nvPicPr>
         <p:blipFill>
-          <a:blip r:embed="rId13"/>
+          <a:blip r:embed="rId3"/>
           <a:stretch>
             <a:fillRect/>
           </a:stretch>
@@ -8315,14 +8644,14 @@
       </p:pic>
       <p:pic>
         <p:nvPicPr>
-          <p:cNvPr id="41" name="Image 13" descr="/tmp/claude-0/-home-user-WeddingInvitations/2c9849ff-e4cc-5683-ac72-2a6c69aa5261/scratchpad/cat_icon.png">    </p:cNvPr>
+          <p:cNvPr id="41" name="Image 13" descr="/tmp/claude-0/-home-user-WeddingInvitations/2c9849ff-e4cc-5683-ac72-2a6c69aa5261/scratchpad/cat_icon.png"/>
           <p:cNvPicPr>
             <a:picLocks noChangeAspect="1"/>
           </p:cNvPicPr>
           <p:nvPr/>
         </p:nvPicPr>
         <p:blipFill>
-          <a:blip r:embed="rId14"/>
+          <a:blip r:embed="rId3"/>
           <a:stretch>
             <a:fillRect/>
           </a:stretch>
@@ -8358,7 +8687,7 @@
           <a:bodyPr wrap="square" lIns="0" tIns="0" rIns="0" bIns="0" rtlCol="0" anchor="ctr"/>
           <a:lstStyle/>
           <a:p>
-            <a:pPr algn="ctr" indent="0" marL="0">
+            <a:pPr marL="0" indent="0" algn="ctr">
               <a:buNone/>
             </a:pPr>
             <a:r>
@@ -8397,7 +8726,7 @@
           <a:bodyPr wrap="square" lIns="0" tIns="0" rIns="0" bIns="0" rtlCol="0" anchor="ctr"/>
           <a:lstStyle/>
           <a:p>
-            <a:pPr algn="ctr" indent="0" marL="0">
+            <a:pPr marL="0" indent="0" algn="ctr">
               <a:buNone/>
             </a:pPr>
             <a:r>
@@ -8439,6 +8768,13 @@
             <a:prstDash val="dash"/>
           </a:ln>
         </p:spPr>
+        <p:txBody>
+          <a:bodyPr/>
+          <a:lstStyle/>
+          <a:p>
+            <a:endParaRPr lang="ja-JP" altLang="en-US"/>
+          </a:p>
+        </p:txBody>
       </p:sp>
       <p:sp>
         <p:nvSpPr>
@@ -8466,17 +8802,24 @@
             <a:prstDash val="solid"/>
           </a:ln>
         </p:spPr>
+        <p:txBody>
+          <a:bodyPr/>
+          <a:lstStyle/>
+          <a:p>
+            <a:endParaRPr lang="ja-JP" altLang="en-US"/>
+          </a:p>
+        </p:txBody>
       </p:sp>
       <p:pic>
         <p:nvPicPr>
-          <p:cNvPr id="46" name="Image 14" descr="/tmp/claude-0/-home-user-WeddingInvitations/2c9849ff-e4cc-5683-ac72-2a6c69aa5261/scratchpad/cat_icon.png">    </p:cNvPr>
+          <p:cNvPr id="46" name="Image 14" descr="/tmp/claude-0/-home-user-WeddingInvitations/2c9849ff-e4cc-5683-ac72-2a6c69aa5261/scratchpad/cat_icon.png"/>
           <p:cNvPicPr>
             <a:picLocks noChangeAspect="1"/>
           </p:cNvPicPr>
           <p:nvPr/>
         </p:nvPicPr>
         <p:blipFill>
-          <a:blip r:embed="rId15"/>
+          <a:blip r:embed="rId3"/>
           <a:stretch>
             <a:fillRect/>
           </a:stretch>
@@ -8493,14 +8836,14 @@
       </p:pic>
       <p:pic>
         <p:nvPicPr>
-          <p:cNvPr id="47" name="Image 15" descr="/tmp/claude-0/-home-user-WeddingInvitations/2c9849ff-e4cc-5683-ac72-2a6c69aa5261/scratchpad/cat_icon.png">    </p:cNvPr>
+          <p:cNvPr id="47" name="Image 15" descr="/tmp/claude-0/-home-user-WeddingInvitations/2c9849ff-e4cc-5683-ac72-2a6c69aa5261/scratchpad/cat_icon.png"/>
           <p:cNvPicPr>
             <a:picLocks noChangeAspect="1"/>
           </p:cNvPicPr>
           <p:nvPr/>
         </p:nvPicPr>
         <p:blipFill>
-          <a:blip r:embed="rId16"/>
+          <a:blip r:embed="rId3"/>
           <a:stretch>
             <a:fillRect/>
           </a:stretch>
@@ -8536,7 +8879,7 @@
           <a:bodyPr wrap="square" lIns="0" tIns="0" rIns="0" bIns="0" rtlCol="0" anchor="ctr"/>
           <a:lstStyle/>
           <a:p>
-            <a:pPr algn="ctr" indent="0" marL="0">
+            <a:pPr marL="0" indent="0" algn="ctr">
               <a:buNone/>
             </a:pPr>
             <a:r>
@@ -8575,7 +8918,7 @@
           <a:bodyPr wrap="square" lIns="0" tIns="0" rIns="0" bIns="0" rtlCol="0" anchor="ctr"/>
           <a:lstStyle/>
           <a:p>
-            <a:pPr algn="ctr" indent="0" marL="0">
+            <a:pPr marL="0" indent="0" algn="ctr">
               <a:buNone/>
             </a:pPr>
             <a:r>
@@ -8617,6 +8960,13 @@
             <a:prstDash val="dash"/>
           </a:ln>
         </p:spPr>
+        <p:txBody>
+          <a:bodyPr/>
+          <a:lstStyle/>
+          <a:p>
+            <a:endParaRPr lang="ja-JP" altLang="en-US"/>
+          </a:p>
+        </p:txBody>
       </p:sp>
       <p:sp>
         <p:nvSpPr>
@@ -8644,17 +8994,24 @@
             <a:prstDash val="solid"/>
           </a:ln>
         </p:spPr>
+        <p:txBody>
+          <a:bodyPr/>
+          <a:lstStyle/>
+          <a:p>
+            <a:endParaRPr lang="ja-JP" altLang="en-US"/>
+          </a:p>
+        </p:txBody>
       </p:sp>
       <p:pic>
         <p:nvPicPr>
-          <p:cNvPr id="52" name="Image 16" descr="/tmp/claude-0/-home-user-WeddingInvitations/2c9849ff-e4cc-5683-ac72-2a6c69aa5261/scratchpad/cat_icon.png">    </p:cNvPr>
+          <p:cNvPr id="52" name="Image 16" descr="/tmp/claude-0/-home-user-WeddingInvitations/2c9849ff-e4cc-5683-ac72-2a6c69aa5261/scratchpad/cat_icon.png"/>
           <p:cNvPicPr>
             <a:picLocks noChangeAspect="1"/>
           </p:cNvPicPr>
           <p:nvPr/>
         </p:nvPicPr>
         <p:blipFill>
-          <a:blip r:embed="rId17"/>
+          <a:blip r:embed="rId3"/>
           <a:stretch>
             <a:fillRect/>
           </a:stretch>
@@ -8671,14 +9028,14 @@
       </p:pic>
       <p:pic>
         <p:nvPicPr>
-          <p:cNvPr id="53" name="Image 17" descr="/tmp/claude-0/-home-user-WeddingInvitations/2c9849ff-e4cc-5683-ac72-2a6c69aa5261/scratchpad/cat_icon.png">    </p:cNvPr>
+          <p:cNvPr id="53" name="Image 17" descr="/tmp/claude-0/-home-user-WeddingInvitations/2c9849ff-e4cc-5683-ac72-2a6c69aa5261/scratchpad/cat_icon.png"/>
           <p:cNvPicPr>
             <a:picLocks noChangeAspect="1"/>
           </p:cNvPicPr>
           <p:nvPr/>
         </p:nvPicPr>
         <p:blipFill>
-          <a:blip r:embed="rId18"/>
+          <a:blip r:embed="rId3"/>
           <a:stretch>
             <a:fillRect/>
           </a:stretch>
@@ -8714,7 +9071,7 @@
           <a:bodyPr wrap="square" lIns="0" tIns="0" rIns="0" bIns="0" rtlCol="0" anchor="ctr"/>
           <a:lstStyle/>
           <a:p>
-            <a:pPr algn="ctr" indent="0" marL="0">
+            <a:pPr marL="0" indent="0" algn="ctr">
               <a:buNone/>
             </a:pPr>
             <a:r>
@@ -8753,7 +9110,7 @@
           <a:bodyPr wrap="square" lIns="0" tIns="0" rIns="0" bIns="0" rtlCol="0" anchor="ctr"/>
           <a:lstStyle/>
           <a:p>
-            <a:pPr algn="ctr" indent="0" marL="0">
+            <a:pPr marL="0" indent="0" algn="ctr">
               <a:buNone/>
             </a:pPr>
             <a:r>
@@ -8795,6 +9152,13 @@
             <a:prstDash val="dash"/>
           </a:ln>
         </p:spPr>
+        <p:txBody>
+          <a:bodyPr/>
+          <a:lstStyle/>
+          <a:p>
+            <a:endParaRPr lang="ja-JP" altLang="en-US"/>
+          </a:p>
+        </p:txBody>
       </p:sp>
       <p:sp>
         <p:nvSpPr>
@@ -8822,17 +9186,24 @@
             <a:prstDash val="solid"/>
           </a:ln>
         </p:spPr>
+        <p:txBody>
+          <a:bodyPr/>
+          <a:lstStyle/>
+          <a:p>
+            <a:endParaRPr lang="ja-JP" altLang="en-US"/>
+          </a:p>
+        </p:txBody>
       </p:sp>
       <p:pic>
         <p:nvPicPr>
-          <p:cNvPr id="58" name="Image 18" descr="/tmp/claude-0/-home-user-WeddingInvitations/2c9849ff-e4cc-5683-ac72-2a6c69aa5261/scratchpad/cat_icon.png">    </p:cNvPr>
+          <p:cNvPr id="58" name="Image 18" descr="/tmp/claude-0/-home-user-WeddingInvitations/2c9849ff-e4cc-5683-ac72-2a6c69aa5261/scratchpad/cat_icon.png"/>
           <p:cNvPicPr>
             <a:picLocks noChangeAspect="1"/>
           </p:cNvPicPr>
           <p:nvPr/>
         </p:nvPicPr>
         <p:blipFill>
-          <a:blip r:embed="rId19"/>
+          <a:blip r:embed="rId3"/>
           <a:stretch>
             <a:fillRect/>
           </a:stretch>
@@ -8849,14 +9220,14 @@
       </p:pic>
       <p:pic>
         <p:nvPicPr>
-          <p:cNvPr id="59" name="Image 19" descr="/tmp/claude-0/-home-user-WeddingInvitations/2c9849ff-e4cc-5683-ac72-2a6c69aa5261/scratchpad/cat_icon.png">    </p:cNvPr>
+          <p:cNvPr id="59" name="Image 19" descr="/tmp/claude-0/-home-user-WeddingInvitations/2c9849ff-e4cc-5683-ac72-2a6c69aa5261/scratchpad/cat_icon.png"/>
           <p:cNvPicPr>
             <a:picLocks noChangeAspect="1"/>
           </p:cNvPicPr>
           <p:nvPr/>
         </p:nvPicPr>
         <p:blipFill>
-          <a:blip r:embed="rId20"/>
+          <a:blip r:embed="rId3"/>
           <a:stretch>
             <a:fillRect/>
           </a:stretch>
@@ -8892,7 +9263,7 @@
           <a:bodyPr wrap="square" lIns="0" tIns="0" rIns="0" bIns="0" rtlCol="0" anchor="ctr"/>
           <a:lstStyle/>
           <a:p>
-            <a:pPr algn="ctr" indent="0" marL="0">
+            <a:pPr marL="0" indent="0" algn="ctr">
               <a:buNone/>
             </a:pPr>
             <a:r>
@@ -8931,7 +9302,7 @@
           <a:bodyPr wrap="square" lIns="0" tIns="0" rIns="0" bIns="0" rtlCol="0" anchor="ctr"/>
           <a:lstStyle/>
           <a:p>
-            <a:pPr algn="ctr" indent="0" marL="0">
+            <a:pPr marL="0" indent="0" algn="ctr">
               <a:buNone/>
             </a:pPr>
             <a:r>
@@ -8973,6 +9344,13 @@
             <a:prstDash val="dash"/>
           </a:ln>
         </p:spPr>
+        <p:txBody>
+          <a:bodyPr/>
+          <a:lstStyle/>
+          <a:p>
+            <a:endParaRPr lang="ja-JP" altLang="en-US"/>
+          </a:p>
+        </p:txBody>
       </p:sp>
       <p:sp>
         <p:nvSpPr>
@@ -9000,17 +9378,24 @@
             <a:prstDash val="solid"/>
           </a:ln>
         </p:spPr>
+        <p:txBody>
+          <a:bodyPr/>
+          <a:lstStyle/>
+          <a:p>
+            <a:endParaRPr lang="ja-JP" altLang="en-US"/>
+          </a:p>
+        </p:txBody>
       </p:sp>
       <p:pic>
         <p:nvPicPr>
-          <p:cNvPr id="64" name="Image 20" descr="/tmp/claude-0/-home-user-WeddingInvitations/2c9849ff-e4cc-5683-ac72-2a6c69aa5261/scratchpad/cat_icon.png">    </p:cNvPr>
+          <p:cNvPr id="64" name="Image 20" descr="/tmp/claude-0/-home-user-WeddingInvitations/2c9849ff-e4cc-5683-ac72-2a6c69aa5261/scratchpad/cat_icon.png"/>
           <p:cNvPicPr>
             <a:picLocks noChangeAspect="1"/>
           </p:cNvPicPr>
           <p:nvPr/>
         </p:nvPicPr>
         <p:blipFill>
-          <a:blip r:embed="rId21"/>
+          <a:blip r:embed="rId3"/>
           <a:stretch>
             <a:fillRect/>
           </a:stretch>
@@ -9027,14 +9412,14 @@
       </p:pic>
       <p:pic>
         <p:nvPicPr>
-          <p:cNvPr id="65" name="Image 21" descr="/tmp/claude-0/-home-user-WeddingInvitations/2c9849ff-e4cc-5683-ac72-2a6c69aa5261/scratchpad/cat_icon.png">    </p:cNvPr>
+          <p:cNvPr id="65" name="Image 21" descr="/tmp/claude-0/-home-user-WeddingInvitations/2c9849ff-e4cc-5683-ac72-2a6c69aa5261/scratchpad/cat_icon.png"/>
           <p:cNvPicPr>
             <a:picLocks noChangeAspect="1"/>
           </p:cNvPicPr>
           <p:nvPr/>
         </p:nvPicPr>
         <p:blipFill>
-          <a:blip r:embed="rId22"/>
+          <a:blip r:embed="rId3"/>
           <a:stretch>
             <a:fillRect/>
           </a:stretch>
@@ -9070,7 +9455,7 @@
           <a:bodyPr wrap="square" lIns="0" tIns="0" rIns="0" bIns="0" rtlCol="0" anchor="ctr"/>
           <a:lstStyle/>
           <a:p>
-            <a:pPr algn="ctr" indent="0" marL="0">
+            <a:pPr marL="0" indent="0" algn="ctr">
               <a:buNone/>
             </a:pPr>
             <a:r>
@@ -9109,7 +9494,7 @@
           <a:bodyPr wrap="square" lIns="0" tIns="0" rIns="0" bIns="0" rtlCol="0" anchor="ctr"/>
           <a:lstStyle/>
           <a:p>
-            <a:pPr algn="ctr" indent="0" marL="0">
+            <a:pPr marL="0" indent="0" algn="ctr">
               <a:buNone/>
             </a:pPr>
             <a:r>
@@ -9151,6 +9536,13 @@
             <a:prstDash val="dash"/>
           </a:ln>
         </p:spPr>
+        <p:txBody>
+          <a:bodyPr/>
+          <a:lstStyle/>
+          <a:p>
+            <a:endParaRPr lang="ja-JP" altLang="en-US"/>
+          </a:p>
+        </p:txBody>
       </p:sp>
       <p:sp>
         <p:nvSpPr>
@@ -9178,17 +9570,24 @@
             <a:prstDash val="solid"/>
           </a:ln>
         </p:spPr>
+        <p:txBody>
+          <a:bodyPr/>
+          <a:lstStyle/>
+          <a:p>
+            <a:endParaRPr lang="ja-JP" altLang="en-US"/>
+          </a:p>
+        </p:txBody>
       </p:sp>
       <p:pic>
         <p:nvPicPr>
-          <p:cNvPr id="70" name="Image 22" descr="/tmp/claude-0/-home-user-WeddingInvitations/2c9849ff-e4cc-5683-ac72-2a6c69aa5261/scratchpad/cat_icon.png">    </p:cNvPr>
+          <p:cNvPr id="70" name="Image 22" descr="/tmp/claude-0/-home-user-WeddingInvitations/2c9849ff-e4cc-5683-ac72-2a6c69aa5261/scratchpad/cat_icon.png"/>
           <p:cNvPicPr>
             <a:picLocks noChangeAspect="1"/>
           </p:cNvPicPr>
           <p:nvPr/>
         </p:nvPicPr>
         <p:blipFill>
-          <a:blip r:embed="rId23"/>
+          <a:blip r:embed="rId3"/>
           <a:stretch>
             <a:fillRect/>
           </a:stretch>
@@ -9205,14 +9604,14 @@
       </p:pic>
       <p:pic>
         <p:nvPicPr>
-          <p:cNvPr id="71" name="Image 23" descr="/tmp/claude-0/-home-user-WeddingInvitations/2c9849ff-e4cc-5683-ac72-2a6c69aa5261/scratchpad/cat_icon.png">    </p:cNvPr>
+          <p:cNvPr id="71" name="Image 23" descr="/tmp/claude-0/-home-user-WeddingInvitations/2c9849ff-e4cc-5683-ac72-2a6c69aa5261/scratchpad/cat_icon.png"/>
           <p:cNvPicPr>
             <a:picLocks noChangeAspect="1"/>
           </p:cNvPicPr>
           <p:nvPr/>
         </p:nvPicPr>
         <p:blipFill>
-          <a:blip r:embed="rId24"/>
+          <a:blip r:embed="rId3"/>
           <a:stretch>
             <a:fillRect/>
           </a:stretch>
@@ -9248,7 +9647,7 @@
           <a:bodyPr wrap="square" lIns="0" tIns="0" rIns="0" bIns="0" rtlCol="0" anchor="ctr"/>
           <a:lstStyle/>
           <a:p>
-            <a:pPr algn="ctr" indent="0" marL="0">
+            <a:pPr marL="0" indent="0" algn="ctr">
               <a:buNone/>
             </a:pPr>
             <a:r>
@@ -9287,7 +9686,7 @@
           <a:bodyPr wrap="square" lIns="0" tIns="0" rIns="0" bIns="0" rtlCol="0" anchor="ctr"/>
           <a:lstStyle/>
           <a:p>
-            <a:pPr algn="ctr" indent="0" marL="0">
+            <a:pPr marL="0" indent="0" algn="ctr">
               <a:buNone/>
             </a:pPr>
             <a:r>
@@ -9329,6 +9728,13 @@
             <a:prstDash val="dash"/>
           </a:ln>
         </p:spPr>
+        <p:txBody>
+          <a:bodyPr/>
+          <a:lstStyle/>
+          <a:p>
+            <a:endParaRPr lang="ja-JP" altLang="en-US"/>
+          </a:p>
+        </p:txBody>
       </p:sp>
       <p:sp>
         <p:nvSpPr>
@@ -9356,17 +9762,24 @@
             <a:prstDash val="solid"/>
           </a:ln>
         </p:spPr>
+        <p:txBody>
+          <a:bodyPr/>
+          <a:lstStyle/>
+          <a:p>
+            <a:endParaRPr lang="ja-JP" altLang="en-US"/>
+          </a:p>
+        </p:txBody>
       </p:sp>
       <p:pic>
         <p:nvPicPr>
-          <p:cNvPr id="76" name="Image 24" descr="/tmp/claude-0/-home-user-WeddingInvitations/2c9849ff-e4cc-5683-ac72-2a6c69aa5261/scratchpad/cat_icon.png">    </p:cNvPr>
+          <p:cNvPr id="76" name="Image 24" descr="/tmp/claude-0/-home-user-WeddingInvitations/2c9849ff-e4cc-5683-ac72-2a6c69aa5261/scratchpad/cat_icon.png"/>
           <p:cNvPicPr>
             <a:picLocks noChangeAspect="1"/>
           </p:cNvPicPr>
           <p:nvPr/>
         </p:nvPicPr>
         <p:blipFill>
-          <a:blip r:embed="rId25"/>
+          <a:blip r:embed="rId3"/>
           <a:stretch>
             <a:fillRect/>
           </a:stretch>
@@ -9383,14 +9796,14 @@
       </p:pic>
       <p:pic>
         <p:nvPicPr>
-          <p:cNvPr id="77" name="Image 25" descr="/tmp/claude-0/-home-user-WeddingInvitations/2c9849ff-e4cc-5683-ac72-2a6c69aa5261/scratchpad/cat_icon.png">    </p:cNvPr>
+          <p:cNvPr id="77" name="Image 25" descr="/tmp/claude-0/-home-user-WeddingInvitations/2c9849ff-e4cc-5683-ac72-2a6c69aa5261/scratchpad/cat_icon.png"/>
           <p:cNvPicPr>
             <a:picLocks noChangeAspect="1"/>
           </p:cNvPicPr>
           <p:nvPr/>
         </p:nvPicPr>
         <p:blipFill>
-          <a:blip r:embed="rId26"/>
+          <a:blip r:embed="rId3"/>
           <a:stretch>
             <a:fillRect/>
           </a:stretch>
@@ -9426,7 +9839,7 @@
           <a:bodyPr wrap="square" lIns="0" tIns="0" rIns="0" bIns="0" rtlCol="0" anchor="ctr"/>
           <a:lstStyle/>
           <a:p>
-            <a:pPr algn="ctr" indent="0" marL="0">
+            <a:pPr marL="0" indent="0" algn="ctr">
               <a:buNone/>
             </a:pPr>
             <a:r>
@@ -9465,7 +9878,7 @@
           <a:bodyPr wrap="square" lIns="0" tIns="0" rIns="0" bIns="0" rtlCol="0" anchor="ctr"/>
           <a:lstStyle/>
           <a:p>
-            <a:pPr algn="ctr" indent="0" marL="0">
+            <a:pPr marL="0" indent="0" algn="ctr">
               <a:buNone/>
             </a:pPr>
             <a:r>
@@ -9507,6 +9920,13 @@
             <a:prstDash val="dash"/>
           </a:ln>
         </p:spPr>
+        <p:txBody>
+          <a:bodyPr/>
+          <a:lstStyle/>
+          <a:p>
+            <a:endParaRPr lang="ja-JP" altLang="en-US"/>
+          </a:p>
+        </p:txBody>
       </p:sp>
       <p:sp>
         <p:nvSpPr>
@@ -9534,17 +9954,24 @@
             <a:prstDash val="solid"/>
           </a:ln>
         </p:spPr>
+        <p:txBody>
+          <a:bodyPr/>
+          <a:lstStyle/>
+          <a:p>
+            <a:endParaRPr lang="ja-JP" altLang="en-US"/>
+          </a:p>
+        </p:txBody>
       </p:sp>
       <p:pic>
         <p:nvPicPr>
-          <p:cNvPr id="82" name="Image 26" descr="/tmp/claude-0/-home-user-WeddingInvitations/2c9849ff-e4cc-5683-ac72-2a6c69aa5261/scratchpad/cat_icon.png">    </p:cNvPr>
+          <p:cNvPr id="82" name="Image 26" descr="/tmp/claude-0/-home-user-WeddingInvitations/2c9849ff-e4cc-5683-ac72-2a6c69aa5261/scratchpad/cat_icon.png"/>
           <p:cNvPicPr>
             <a:picLocks noChangeAspect="1"/>
           </p:cNvPicPr>
           <p:nvPr/>
         </p:nvPicPr>
         <p:blipFill>
-          <a:blip r:embed="rId27"/>
+          <a:blip r:embed="rId3"/>
           <a:stretch>
             <a:fillRect/>
           </a:stretch>
@@ -9561,14 +9988,14 @@
       </p:pic>
       <p:pic>
         <p:nvPicPr>
-          <p:cNvPr id="83" name="Image 27" descr="/tmp/claude-0/-home-user-WeddingInvitations/2c9849ff-e4cc-5683-ac72-2a6c69aa5261/scratchpad/cat_icon.png">    </p:cNvPr>
+          <p:cNvPr id="83" name="Image 27" descr="/tmp/claude-0/-home-user-WeddingInvitations/2c9849ff-e4cc-5683-ac72-2a6c69aa5261/scratchpad/cat_icon.png"/>
           <p:cNvPicPr>
             <a:picLocks noChangeAspect="1"/>
           </p:cNvPicPr>
           <p:nvPr/>
         </p:nvPicPr>
         <p:blipFill>
-          <a:blip r:embed="rId28"/>
+          <a:blip r:embed="rId3"/>
           <a:stretch>
             <a:fillRect/>
           </a:stretch>
@@ -9604,7 +10031,7 @@
           <a:bodyPr wrap="square" lIns="0" tIns="0" rIns="0" bIns="0" rtlCol="0" anchor="ctr"/>
           <a:lstStyle/>
           <a:p>
-            <a:pPr algn="ctr" indent="0" marL="0">
+            <a:pPr marL="0" indent="0" algn="ctr">
               <a:buNone/>
             </a:pPr>
             <a:r>
@@ -9643,7 +10070,7 @@
           <a:bodyPr wrap="square" lIns="0" tIns="0" rIns="0" bIns="0" rtlCol="0" anchor="ctr"/>
           <a:lstStyle/>
           <a:p>
-            <a:pPr algn="ctr" indent="0" marL="0">
+            <a:pPr marL="0" indent="0" algn="ctr">
               <a:buNone/>
             </a:pPr>
             <a:r>
@@ -9685,6 +10112,13 @@
             <a:prstDash val="dash"/>
           </a:ln>
         </p:spPr>
+        <p:txBody>
+          <a:bodyPr/>
+          <a:lstStyle/>
+          <a:p>
+            <a:endParaRPr lang="ja-JP" altLang="en-US"/>
+          </a:p>
+        </p:txBody>
       </p:sp>
       <p:sp>
         <p:nvSpPr>
@@ -9712,17 +10146,24 @@
             <a:prstDash val="solid"/>
           </a:ln>
         </p:spPr>
+        <p:txBody>
+          <a:bodyPr/>
+          <a:lstStyle/>
+          <a:p>
+            <a:endParaRPr lang="ja-JP" altLang="en-US"/>
+          </a:p>
+        </p:txBody>
       </p:sp>
       <p:pic>
         <p:nvPicPr>
-          <p:cNvPr id="88" name="Image 28" descr="/tmp/claude-0/-home-user-WeddingInvitations/2c9849ff-e4cc-5683-ac72-2a6c69aa5261/scratchpad/cat_icon.png">    </p:cNvPr>
+          <p:cNvPr id="88" name="Image 28" descr="/tmp/claude-0/-home-user-WeddingInvitations/2c9849ff-e4cc-5683-ac72-2a6c69aa5261/scratchpad/cat_icon.png"/>
           <p:cNvPicPr>
             <a:picLocks noChangeAspect="1"/>
           </p:cNvPicPr>
           <p:nvPr/>
         </p:nvPicPr>
         <p:blipFill>
-          <a:blip r:embed="rId29"/>
+          <a:blip r:embed="rId3"/>
           <a:stretch>
             <a:fillRect/>
           </a:stretch>
@@ -9739,14 +10180,14 @@
       </p:pic>
       <p:pic>
         <p:nvPicPr>
-          <p:cNvPr id="89" name="Image 29" descr="/tmp/claude-0/-home-user-WeddingInvitations/2c9849ff-e4cc-5683-ac72-2a6c69aa5261/scratchpad/cat_icon.png">    </p:cNvPr>
+          <p:cNvPr id="89" name="Image 29" descr="/tmp/claude-0/-home-user-WeddingInvitations/2c9849ff-e4cc-5683-ac72-2a6c69aa5261/scratchpad/cat_icon.png"/>
           <p:cNvPicPr>
             <a:picLocks noChangeAspect="1"/>
           </p:cNvPicPr>
           <p:nvPr/>
         </p:nvPicPr>
         <p:blipFill>
-          <a:blip r:embed="rId30"/>
+          <a:blip r:embed="rId3"/>
           <a:stretch>
             <a:fillRect/>
           </a:stretch>
@@ -9782,7 +10223,7 @@
           <a:bodyPr wrap="square" lIns="0" tIns="0" rIns="0" bIns="0" rtlCol="0" anchor="ctr"/>
           <a:lstStyle/>
           <a:p>
-            <a:pPr algn="ctr" indent="0" marL="0">
+            <a:pPr marL="0" indent="0" algn="ctr">
               <a:buNone/>
             </a:pPr>
             <a:r>
@@ -9821,7 +10262,7 @@
           <a:bodyPr wrap="square" lIns="0" tIns="0" rIns="0" bIns="0" rtlCol="0" anchor="ctr"/>
           <a:lstStyle/>
           <a:p>
-            <a:pPr algn="ctr" indent="0" marL="0">
+            <a:pPr marL="0" indent="0" algn="ctr">
               <a:buNone/>
             </a:pPr>
             <a:r>
@@ -9863,6 +10304,13 @@
             <a:prstDash val="dash"/>
           </a:ln>
         </p:spPr>
+        <p:txBody>
+          <a:bodyPr/>
+          <a:lstStyle/>
+          <a:p>
+            <a:endParaRPr lang="ja-JP" altLang="en-US"/>
+          </a:p>
+        </p:txBody>
       </p:sp>
       <p:sp>
         <p:nvSpPr>
@@ -9890,17 +10338,24 @@
             <a:prstDash val="solid"/>
           </a:ln>
         </p:spPr>
+        <p:txBody>
+          <a:bodyPr/>
+          <a:lstStyle/>
+          <a:p>
+            <a:endParaRPr lang="ja-JP" altLang="en-US"/>
+          </a:p>
+        </p:txBody>
       </p:sp>
       <p:pic>
         <p:nvPicPr>
-          <p:cNvPr id="94" name="Image 30" descr="/tmp/claude-0/-home-user-WeddingInvitations/2c9849ff-e4cc-5683-ac72-2a6c69aa5261/scratchpad/cat_icon.png">    </p:cNvPr>
+          <p:cNvPr id="94" name="Image 30" descr="/tmp/claude-0/-home-user-WeddingInvitations/2c9849ff-e4cc-5683-ac72-2a6c69aa5261/scratchpad/cat_icon.png"/>
           <p:cNvPicPr>
             <a:picLocks noChangeAspect="1"/>
           </p:cNvPicPr>
           <p:nvPr/>
         </p:nvPicPr>
         <p:blipFill>
-          <a:blip r:embed="rId31"/>
+          <a:blip r:embed="rId3"/>
           <a:stretch>
             <a:fillRect/>
           </a:stretch>
@@ -9917,14 +10372,14 @@
       </p:pic>
       <p:pic>
         <p:nvPicPr>
-          <p:cNvPr id="95" name="Image 31" descr="/tmp/claude-0/-home-user-WeddingInvitations/2c9849ff-e4cc-5683-ac72-2a6c69aa5261/scratchpad/cat_icon.png">    </p:cNvPr>
+          <p:cNvPr id="95" name="Image 31" descr="/tmp/claude-0/-home-user-WeddingInvitations/2c9849ff-e4cc-5683-ac72-2a6c69aa5261/scratchpad/cat_icon.png"/>
           <p:cNvPicPr>
             <a:picLocks noChangeAspect="1"/>
           </p:cNvPicPr>
           <p:nvPr/>
         </p:nvPicPr>
         <p:blipFill>
-          <a:blip r:embed="rId32"/>
+          <a:blip r:embed="rId3"/>
           <a:stretch>
             <a:fillRect/>
           </a:stretch>
@@ -9960,7 +10415,7 @@
           <a:bodyPr wrap="square" lIns="0" tIns="0" rIns="0" bIns="0" rtlCol="0" anchor="ctr"/>
           <a:lstStyle/>
           <a:p>
-            <a:pPr algn="ctr" indent="0" marL="0">
+            <a:pPr marL="0" indent="0" algn="ctr">
               <a:buNone/>
             </a:pPr>
             <a:r>
@@ -9999,7 +10454,7 @@
           <a:bodyPr wrap="square" lIns="0" tIns="0" rIns="0" bIns="0" rtlCol="0" anchor="ctr"/>
           <a:lstStyle/>
           <a:p>
-            <a:pPr algn="ctr" indent="0" marL="0">
+            <a:pPr marL="0" indent="0" algn="ctr">
               <a:buNone/>
             </a:pPr>
             <a:r>
@@ -10033,6 +10488,7 @@
         <a:solidFill>
           <a:srgbClr val="FFFFFF"/>
         </a:solidFill>
+        <a:effectLst/>
       </p:bgPr>
     </p:bg>
     <p:spTree>
@@ -10073,6 +10529,13 @@
             <a:prstDash val="dash"/>
           </a:ln>
         </p:spPr>
+        <p:txBody>
+          <a:bodyPr/>
+          <a:lstStyle/>
+          <a:p>
+            <a:endParaRPr lang="ja-JP" altLang="en-US"/>
+          </a:p>
+        </p:txBody>
       </p:sp>
       <p:sp>
         <p:nvSpPr>
@@ -10100,17 +10563,24 @@
             <a:prstDash val="solid"/>
           </a:ln>
         </p:spPr>
+        <p:txBody>
+          <a:bodyPr/>
+          <a:lstStyle/>
+          <a:p>
+            <a:endParaRPr lang="ja-JP" altLang="en-US"/>
+          </a:p>
+        </p:txBody>
       </p:sp>
       <p:pic>
         <p:nvPicPr>
-          <p:cNvPr id="4" name="Image 0" descr="/tmp/claude-0/-home-user-WeddingInvitations/2c9849ff-e4cc-5683-ac72-2a6c69aa5261/scratchpad/cat_icon.png">    </p:cNvPr>
+          <p:cNvPr id="4" name="Image 0" descr="/tmp/claude-0/-home-user-WeddingInvitations/2c9849ff-e4cc-5683-ac72-2a6c69aa5261/scratchpad/cat_icon.png"/>
           <p:cNvPicPr>
             <a:picLocks noChangeAspect="1"/>
           </p:cNvPicPr>
           <p:nvPr/>
         </p:nvPicPr>
         <p:blipFill>
-          <a:blip r:embed="rId1"/>
+          <a:blip r:embed="rId3"/>
           <a:stretch>
             <a:fillRect/>
           </a:stretch>
@@ -10127,14 +10597,14 @@
       </p:pic>
       <p:pic>
         <p:nvPicPr>
-          <p:cNvPr id="5" name="Image 1" descr="/tmp/claude-0/-home-user-WeddingInvitations/2c9849ff-e4cc-5683-ac72-2a6c69aa5261/scratchpad/cat_icon.png">    </p:cNvPr>
+          <p:cNvPr id="5" name="Image 1" descr="/tmp/claude-0/-home-user-WeddingInvitations/2c9849ff-e4cc-5683-ac72-2a6c69aa5261/scratchpad/cat_icon.png"/>
           <p:cNvPicPr>
             <a:picLocks noChangeAspect="1"/>
           </p:cNvPicPr>
           <p:nvPr/>
         </p:nvPicPr>
         <p:blipFill>
-          <a:blip r:embed="rId2"/>
+          <a:blip r:embed="rId3"/>
           <a:stretch>
             <a:fillRect/>
           </a:stretch>
@@ -10170,7 +10640,7 @@
           <a:bodyPr wrap="square" lIns="0" tIns="0" rIns="0" bIns="0" rtlCol="0" anchor="ctr"/>
           <a:lstStyle/>
           <a:p>
-            <a:pPr algn="ctr" indent="0" marL="0">
+            <a:pPr marL="0" indent="0" algn="ctr">
               <a:buNone/>
             </a:pPr>
             <a:r>
@@ -10209,7 +10679,7 @@
           <a:bodyPr wrap="square" lIns="0" tIns="0" rIns="0" bIns="0" rtlCol="0" anchor="ctr"/>
           <a:lstStyle/>
           <a:p>
-            <a:pPr algn="ctr" indent="0" marL="0">
+            <a:pPr marL="0" indent="0" algn="ctr">
               <a:buNone/>
             </a:pPr>
             <a:r>
@@ -10251,6 +10721,13 @@
             <a:prstDash val="dash"/>
           </a:ln>
         </p:spPr>
+        <p:txBody>
+          <a:bodyPr/>
+          <a:lstStyle/>
+          <a:p>
+            <a:endParaRPr lang="ja-JP" altLang="en-US"/>
+          </a:p>
+        </p:txBody>
       </p:sp>
       <p:sp>
         <p:nvSpPr>
@@ -10278,10 +10755,17 @@
             <a:prstDash val="solid"/>
           </a:ln>
         </p:spPr>
+        <p:txBody>
+          <a:bodyPr/>
+          <a:lstStyle/>
+          <a:p>
+            <a:endParaRPr lang="ja-JP" altLang="en-US"/>
+          </a:p>
+        </p:txBody>
       </p:sp>
       <p:pic>
         <p:nvPicPr>
-          <p:cNvPr id="10" name="Image 2" descr="/tmp/claude-0/-home-user-WeddingInvitations/2c9849ff-e4cc-5683-ac72-2a6c69aa5261/scratchpad/cat_icon.png">    </p:cNvPr>
+          <p:cNvPr id="10" name="Image 2" descr="/tmp/claude-0/-home-user-WeddingInvitations/2c9849ff-e4cc-5683-ac72-2a6c69aa5261/scratchpad/cat_icon.png"/>
           <p:cNvPicPr>
             <a:picLocks noChangeAspect="1"/>
           </p:cNvPicPr>
@@ -10305,14 +10789,14 @@
       </p:pic>
       <p:pic>
         <p:nvPicPr>
-          <p:cNvPr id="11" name="Image 3" descr="/tmp/claude-0/-home-user-WeddingInvitations/2c9849ff-e4cc-5683-ac72-2a6c69aa5261/scratchpad/cat_icon.png">    </p:cNvPr>
+          <p:cNvPr id="11" name="Image 3" descr="/tmp/claude-0/-home-user-WeddingInvitations/2c9849ff-e4cc-5683-ac72-2a6c69aa5261/scratchpad/cat_icon.png"/>
           <p:cNvPicPr>
             <a:picLocks noChangeAspect="1"/>
           </p:cNvPicPr>
           <p:nvPr/>
         </p:nvPicPr>
         <p:blipFill>
-          <a:blip r:embed="rId4"/>
+          <a:blip r:embed="rId3"/>
           <a:stretch>
             <a:fillRect/>
           </a:stretch>
@@ -10348,7 +10832,7 @@
           <a:bodyPr wrap="square" lIns="0" tIns="0" rIns="0" bIns="0" rtlCol="0" anchor="ctr"/>
           <a:lstStyle/>
           <a:p>
-            <a:pPr algn="ctr" indent="0" marL="0">
+            <a:pPr marL="0" indent="0" algn="ctr">
               <a:buNone/>
             </a:pPr>
             <a:r>
@@ -10387,7 +10871,7 @@
           <a:bodyPr wrap="square" lIns="0" tIns="0" rIns="0" bIns="0" rtlCol="0" anchor="ctr"/>
           <a:lstStyle/>
           <a:p>
-            <a:pPr algn="ctr" indent="0" marL="0">
+            <a:pPr marL="0" indent="0" algn="ctr">
               <a:buNone/>
             </a:pPr>
             <a:r>
@@ -10429,6 +10913,13 @@
             <a:prstDash val="dash"/>
           </a:ln>
         </p:spPr>
+        <p:txBody>
+          <a:bodyPr/>
+          <a:lstStyle/>
+          <a:p>
+            <a:endParaRPr lang="ja-JP" altLang="en-US"/>
+          </a:p>
+        </p:txBody>
       </p:sp>
       <p:sp>
         <p:nvSpPr>
@@ -10456,17 +10947,24 @@
             <a:prstDash val="solid"/>
           </a:ln>
         </p:spPr>
+        <p:txBody>
+          <a:bodyPr/>
+          <a:lstStyle/>
+          <a:p>
+            <a:endParaRPr lang="ja-JP" altLang="en-US"/>
+          </a:p>
+        </p:txBody>
       </p:sp>
       <p:pic>
         <p:nvPicPr>
-          <p:cNvPr id="16" name="Image 4" descr="/tmp/claude-0/-home-user-WeddingInvitations/2c9849ff-e4cc-5683-ac72-2a6c69aa5261/scratchpad/cat_icon.png">    </p:cNvPr>
+          <p:cNvPr id="16" name="Image 4" descr="/tmp/claude-0/-home-user-WeddingInvitations/2c9849ff-e4cc-5683-ac72-2a6c69aa5261/scratchpad/cat_icon.png"/>
           <p:cNvPicPr>
             <a:picLocks noChangeAspect="1"/>
           </p:cNvPicPr>
           <p:nvPr/>
         </p:nvPicPr>
         <p:blipFill>
-          <a:blip r:embed="rId5"/>
+          <a:blip r:embed="rId3"/>
           <a:stretch>
             <a:fillRect/>
           </a:stretch>
@@ -10483,14 +10981,14 @@
       </p:pic>
       <p:pic>
         <p:nvPicPr>
-          <p:cNvPr id="17" name="Image 5" descr="/tmp/claude-0/-home-user-WeddingInvitations/2c9849ff-e4cc-5683-ac72-2a6c69aa5261/scratchpad/cat_icon.png">    </p:cNvPr>
+          <p:cNvPr id="17" name="Image 5" descr="/tmp/claude-0/-home-user-WeddingInvitations/2c9849ff-e4cc-5683-ac72-2a6c69aa5261/scratchpad/cat_icon.png"/>
           <p:cNvPicPr>
             <a:picLocks noChangeAspect="1"/>
           </p:cNvPicPr>
           <p:nvPr/>
         </p:nvPicPr>
         <p:blipFill>
-          <a:blip r:embed="rId6"/>
+          <a:blip r:embed="rId3"/>
           <a:stretch>
             <a:fillRect/>
           </a:stretch>
@@ -10526,7 +11024,7 @@
           <a:bodyPr wrap="square" lIns="0" tIns="0" rIns="0" bIns="0" rtlCol="0" anchor="ctr"/>
           <a:lstStyle/>
           <a:p>
-            <a:pPr algn="ctr" indent="0" marL="0">
+            <a:pPr marL="0" indent="0" algn="ctr">
               <a:buNone/>
             </a:pPr>
             <a:r>
@@ -10565,7 +11063,7 @@
           <a:bodyPr wrap="square" lIns="0" tIns="0" rIns="0" bIns="0" rtlCol="0" anchor="ctr"/>
           <a:lstStyle/>
           <a:p>
-            <a:pPr algn="ctr" indent="0" marL="0">
+            <a:pPr marL="0" indent="0" algn="ctr">
               <a:buNone/>
             </a:pPr>
             <a:r>
@@ -10607,6 +11105,13 @@
             <a:prstDash val="dash"/>
           </a:ln>
         </p:spPr>
+        <p:txBody>
+          <a:bodyPr/>
+          <a:lstStyle/>
+          <a:p>
+            <a:endParaRPr lang="ja-JP" altLang="en-US"/>
+          </a:p>
+        </p:txBody>
       </p:sp>
       <p:sp>
         <p:nvSpPr>
@@ -10634,17 +11139,24 @@
             <a:prstDash val="solid"/>
           </a:ln>
         </p:spPr>
+        <p:txBody>
+          <a:bodyPr/>
+          <a:lstStyle/>
+          <a:p>
+            <a:endParaRPr lang="ja-JP" altLang="en-US"/>
+          </a:p>
+        </p:txBody>
       </p:sp>
       <p:pic>
         <p:nvPicPr>
-          <p:cNvPr id="22" name="Image 6" descr="/tmp/claude-0/-home-user-WeddingInvitations/2c9849ff-e4cc-5683-ac72-2a6c69aa5261/scratchpad/cat_icon.png">    </p:cNvPr>
+          <p:cNvPr id="22" name="Image 6" descr="/tmp/claude-0/-home-user-WeddingInvitations/2c9849ff-e4cc-5683-ac72-2a6c69aa5261/scratchpad/cat_icon.png"/>
           <p:cNvPicPr>
             <a:picLocks noChangeAspect="1"/>
           </p:cNvPicPr>
           <p:nvPr/>
         </p:nvPicPr>
         <p:blipFill>
-          <a:blip r:embed="rId7"/>
+          <a:blip r:embed="rId3"/>
           <a:stretch>
             <a:fillRect/>
           </a:stretch>
@@ -10661,14 +11173,14 @@
       </p:pic>
       <p:pic>
         <p:nvPicPr>
-          <p:cNvPr id="23" name="Image 7" descr="/tmp/claude-0/-home-user-WeddingInvitations/2c9849ff-e4cc-5683-ac72-2a6c69aa5261/scratchpad/cat_icon.png">    </p:cNvPr>
+          <p:cNvPr id="23" name="Image 7" descr="/tmp/claude-0/-home-user-WeddingInvitations/2c9849ff-e4cc-5683-ac72-2a6c69aa5261/scratchpad/cat_icon.png"/>
           <p:cNvPicPr>
             <a:picLocks noChangeAspect="1"/>
           </p:cNvPicPr>
           <p:nvPr/>
         </p:nvPicPr>
         <p:blipFill>
-          <a:blip r:embed="rId8"/>
+          <a:blip r:embed="rId3"/>
           <a:stretch>
             <a:fillRect/>
           </a:stretch>
@@ -10704,7 +11216,7 @@
           <a:bodyPr wrap="square" lIns="0" tIns="0" rIns="0" bIns="0" rtlCol="0" anchor="ctr"/>
           <a:lstStyle/>
           <a:p>
-            <a:pPr algn="ctr" indent="0" marL="0">
+            <a:pPr marL="0" indent="0" algn="ctr">
               <a:buNone/>
             </a:pPr>
             <a:r>
@@ -10743,7 +11255,7 @@
           <a:bodyPr wrap="square" lIns="0" tIns="0" rIns="0" bIns="0" rtlCol="0" anchor="ctr"/>
           <a:lstStyle/>
           <a:p>
-            <a:pPr algn="ctr" indent="0" marL="0">
+            <a:pPr marL="0" indent="0" algn="ctr">
               <a:buNone/>
             </a:pPr>
             <a:r>
@@ -10785,6 +11297,13 @@
             <a:prstDash val="dash"/>
           </a:ln>
         </p:spPr>
+        <p:txBody>
+          <a:bodyPr/>
+          <a:lstStyle/>
+          <a:p>
+            <a:endParaRPr lang="ja-JP" altLang="en-US"/>
+          </a:p>
+        </p:txBody>
       </p:sp>
       <p:sp>
         <p:nvSpPr>
@@ -10812,17 +11331,24 @@
             <a:prstDash val="solid"/>
           </a:ln>
         </p:spPr>
+        <p:txBody>
+          <a:bodyPr/>
+          <a:lstStyle/>
+          <a:p>
+            <a:endParaRPr lang="ja-JP" altLang="en-US"/>
+          </a:p>
+        </p:txBody>
       </p:sp>
       <p:pic>
         <p:nvPicPr>
-          <p:cNvPr id="28" name="Image 8" descr="/tmp/claude-0/-home-user-WeddingInvitations/2c9849ff-e4cc-5683-ac72-2a6c69aa5261/scratchpad/dress_icon.png">    </p:cNvPr>
+          <p:cNvPr id="28" name="Image 8" descr="/tmp/claude-0/-home-user-WeddingInvitations/2c9849ff-e4cc-5683-ac72-2a6c69aa5261/scratchpad/dress_icon.png"/>
           <p:cNvPicPr>
             <a:picLocks noChangeAspect="1"/>
           </p:cNvPicPr>
           <p:nvPr/>
         </p:nvPicPr>
         <p:blipFill>
-          <a:blip r:embed="rId9"/>
+          <a:blip r:embed="rId4"/>
           <a:stretch>
             <a:fillRect/>
           </a:stretch>
@@ -10839,14 +11365,14 @@
       </p:pic>
       <p:pic>
         <p:nvPicPr>
-          <p:cNvPr id="29" name="Image 9" descr="/tmp/claude-0/-home-user-WeddingInvitations/2c9849ff-e4cc-5683-ac72-2a6c69aa5261/scratchpad/dress_icon.png">    </p:cNvPr>
+          <p:cNvPr id="29" name="Image 9" descr="/tmp/claude-0/-home-user-WeddingInvitations/2c9849ff-e4cc-5683-ac72-2a6c69aa5261/scratchpad/dress_icon.png"/>
           <p:cNvPicPr>
             <a:picLocks noChangeAspect="1"/>
           </p:cNvPicPr>
           <p:nvPr/>
         </p:nvPicPr>
         <p:blipFill>
-          <a:blip r:embed="rId10"/>
+          <a:blip r:embed="rId4"/>
           <a:stretch>
             <a:fillRect/>
           </a:stretch>
@@ -10882,7 +11408,7 @@
           <a:bodyPr wrap="square" lIns="0" tIns="0" rIns="0" bIns="0" rtlCol="0" anchor="ctr"/>
           <a:lstStyle/>
           <a:p>
-            <a:pPr algn="ctr" indent="0" marL="0">
+            <a:pPr marL="0" indent="0" algn="ctr">
               <a:buNone/>
             </a:pPr>
             <a:r>
@@ -10921,7 +11447,7 @@
           <a:bodyPr wrap="square" lIns="0" tIns="0" rIns="0" bIns="0" rtlCol="0" anchor="ctr"/>
           <a:lstStyle/>
           <a:p>
-            <a:pPr algn="ctr" indent="0" marL="0">
+            <a:pPr marL="0" indent="0" algn="ctr">
               <a:buNone/>
             </a:pPr>
             <a:r>
@@ -10963,6 +11489,13 @@
             <a:prstDash val="dash"/>
           </a:ln>
         </p:spPr>
+        <p:txBody>
+          <a:bodyPr/>
+          <a:lstStyle/>
+          <a:p>
+            <a:endParaRPr lang="ja-JP" altLang="en-US"/>
+          </a:p>
+        </p:txBody>
       </p:sp>
       <p:sp>
         <p:nvSpPr>
@@ -10990,17 +11523,24 @@
             <a:prstDash val="solid"/>
           </a:ln>
         </p:spPr>
+        <p:txBody>
+          <a:bodyPr/>
+          <a:lstStyle/>
+          <a:p>
+            <a:endParaRPr lang="ja-JP" altLang="en-US"/>
+          </a:p>
+        </p:txBody>
       </p:sp>
       <p:pic>
         <p:nvPicPr>
-          <p:cNvPr id="34" name="Image 10" descr="/tmp/claude-0/-home-user-WeddingInvitations/2c9849ff-e4cc-5683-ac72-2a6c69aa5261/scratchpad/dress_icon.png">    </p:cNvPr>
+          <p:cNvPr id="34" name="Image 10" descr="/tmp/claude-0/-home-user-WeddingInvitations/2c9849ff-e4cc-5683-ac72-2a6c69aa5261/scratchpad/dress_icon.png"/>
           <p:cNvPicPr>
             <a:picLocks noChangeAspect="1"/>
           </p:cNvPicPr>
           <p:nvPr/>
         </p:nvPicPr>
         <p:blipFill>
-          <a:blip r:embed="rId11"/>
+          <a:blip r:embed="rId4"/>
           <a:stretch>
             <a:fillRect/>
           </a:stretch>
@@ -11017,14 +11557,14 @@
       </p:pic>
       <p:pic>
         <p:nvPicPr>
-          <p:cNvPr id="35" name="Image 11" descr="/tmp/claude-0/-home-user-WeddingInvitations/2c9849ff-e4cc-5683-ac72-2a6c69aa5261/scratchpad/dress_icon.png">    </p:cNvPr>
+          <p:cNvPr id="35" name="Image 11" descr="/tmp/claude-0/-home-user-WeddingInvitations/2c9849ff-e4cc-5683-ac72-2a6c69aa5261/scratchpad/dress_icon.png"/>
           <p:cNvPicPr>
             <a:picLocks noChangeAspect="1"/>
           </p:cNvPicPr>
           <p:nvPr/>
         </p:nvPicPr>
         <p:blipFill>
-          <a:blip r:embed="rId12"/>
+          <a:blip r:embed="rId4"/>
           <a:stretch>
             <a:fillRect/>
           </a:stretch>
@@ -11060,7 +11600,7 @@
           <a:bodyPr wrap="square" lIns="0" tIns="0" rIns="0" bIns="0" rtlCol="0" anchor="ctr"/>
           <a:lstStyle/>
           <a:p>
-            <a:pPr algn="ctr" indent="0" marL="0">
+            <a:pPr marL="0" indent="0" algn="ctr">
               <a:buNone/>
             </a:pPr>
             <a:r>
@@ -11099,7 +11639,7 @@
           <a:bodyPr wrap="square" lIns="0" tIns="0" rIns="0" bIns="0" rtlCol="0" anchor="ctr"/>
           <a:lstStyle/>
           <a:p>
-            <a:pPr algn="ctr" indent="0" marL="0">
+            <a:pPr marL="0" indent="0" algn="ctr">
               <a:buNone/>
             </a:pPr>
             <a:r>
@@ -11141,6 +11681,13 @@
             <a:prstDash val="dash"/>
           </a:ln>
         </p:spPr>
+        <p:txBody>
+          <a:bodyPr/>
+          <a:lstStyle/>
+          <a:p>
+            <a:endParaRPr lang="ja-JP" altLang="en-US"/>
+          </a:p>
+        </p:txBody>
       </p:sp>
       <p:sp>
         <p:nvSpPr>
@@ -11168,17 +11715,24 @@
             <a:prstDash val="solid"/>
           </a:ln>
         </p:spPr>
+        <p:txBody>
+          <a:bodyPr/>
+          <a:lstStyle/>
+          <a:p>
+            <a:endParaRPr lang="ja-JP" altLang="en-US"/>
+          </a:p>
+        </p:txBody>
       </p:sp>
       <p:pic>
         <p:nvPicPr>
-          <p:cNvPr id="40" name="Image 12" descr="/tmp/claude-0/-home-user-WeddingInvitations/2c9849ff-e4cc-5683-ac72-2a6c69aa5261/scratchpad/dress_icon.png">    </p:cNvPr>
+          <p:cNvPr id="40" name="Image 12" descr="/tmp/claude-0/-home-user-WeddingInvitations/2c9849ff-e4cc-5683-ac72-2a6c69aa5261/scratchpad/dress_icon.png"/>
           <p:cNvPicPr>
             <a:picLocks noChangeAspect="1"/>
           </p:cNvPicPr>
           <p:nvPr/>
         </p:nvPicPr>
         <p:blipFill>
-          <a:blip r:embed="rId13"/>
+          <a:blip r:embed="rId4"/>
           <a:stretch>
             <a:fillRect/>
           </a:stretch>
@@ -11195,14 +11749,14 @@
       </p:pic>
       <p:pic>
         <p:nvPicPr>
-          <p:cNvPr id="41" name="Image 13" descr="/tmp/claude-0/-home-user-WeddingInvitations/2c9849ff-e4cc-5683-ac72-2a6c69aa5261/scratchpad/dress_icon.png">    </p:cNvPr>
+          <p:cNvPr id="41" name="Image 13" descr="/tmp/claude-0/-home-user-WeddingInvitations/2c9849ff-e4cc-5683-ac72-2a6c69aa5261/scratchpad/dress_icon.png"/>
           <p:cNvPicPr>
             <a:picLocks noChangeAspect="1"/>
           </p:cNvPicPr>
           <p:nvPr/>
         </p:nvPicPr>
         <p:blipFill>
-          <a:blip r:embed="rId14"/>
+          <a:blip r:embed="rId4"/>
           <a:stretch>
             <a:fillRect/>
           </a:stretch>
@@ -11238,7 +11792,7 @@
           <a:bodyPr wrap="square" lIns="0" tIns="0" rIns="0" bIns="0" rtlCol="0" anchor="ctr"/>
           <a:lstStyle/>
           <a:p>
-            <a:pPr algn="ctr" indent="0" marL="0">
+            <a:pPr marL="0" indent="0" algn="ctr">
               <a:buNone/>
             </a:pPr>
             <a:r>
@@ -11277,7 +11831,7 @@
           <a:bodyPr wrap="square" lIns="0" tIns="0" rIns="0" bIns="0" rtlCol="0" anchor="ctr"/>
           <a:lstStyle/>
           <a:p>
-            <a:pPr algn="ctr" indent="0" marL="0">
+            <a:pPr marL="0" indent="0" algn="ctr">
               <a:buNone/>
             </a:pPr>
             <a:r>
@@ -11319,6 +11873,13 @@
             <a:prstDash val="dash"/>
           </a:ln>
         </p:spPr>
+        <p:txBody>
+          <a:bodyPr/>
+          <a:lstStyle/>
+          <a:p>
+            <a:endParaRPr lang="ja-JP" altLang="en-US"/>
+          </a:p>
+        </p:txBody>
       </p:sp>
       <p:sp>
         <p:nvSpPr>
@@ -11346,17 +11907,24 @@
             <a:prstDash val="solid"/>
           </a:ln>
         </p:spPr>
+        <p:txBody>
+          <a:bodyPr/>
+          <a:lstStyle/>
+          <a:p>
+            <a:endParaRPr lang="ja-JP" altLang="en-US"/>
+          </a:p>
+        </p:txBody>
       </p:sp>
       <p:pic>
         <p:nvPicPr>
-          <p:cNvPr id="46" name="Image 14" descr="/tmp/claude-0/-home-user-WeddingInvitations/2c9849ff-e4cc-5683-ac72-2a6c69aa5261/scratchpad/dress_icon.png">    </p:cNvPr>
+          <p:cNvPr id="46" name="Image 14" descr="/tmp/claude-0/-home-user-WeddingInvitations/2c9849ff-e4cc-5683-ac72-2a6c69aa5261/scratchpad/dress_icon.png"/>
           <p:cNvPicPr>
             <a:picLocks noChangeAspect="1"/>
           </p:cNvPicPr>
           <p:nvPr/>
         </p:nvPicPr>
         <p:blipFill>
-          <a:blip r:embed="rId15"/>
+          <a:blip r:embed="rId4"/>
           <a:stretch>
             <a:fillRect/>
           </a:stretch>
@@ -11373,14 +11941,14 @@
       </p:pic>
       <p:pic>
         <p:nvPicPr>
-          <p:cNvPr id="47" name="Image 15" descr="/tmp/claude-0/-home-user-WeddingInvitations/2c9849ff-e4cc-5683-ac72-2a6c69aa5261/scratchpad/dress_icon.png">    </p:cNvPr>
+          <p:cNvPr id="47" name="Image 15" descr="/tmp/claude-0/-home-user-WeddingInvitations/2c9849ff-e4cc-5683-ac72-2a6c69aa5261/scratchpad/dress_icon.png"/>
           <p:cNvPicPr>
             <a:picLocks noChangeAspect="1"/>
           </p:cNvPicPr>
           <p:nvPr/>
         </p:nvPicPr>
         <p:blipFill>
-          <a:blip r:embed="rId16"/>
+          <a:blip r:embed="rId4"/>
           <a:stretch>
             <a:fillRect/>
           </a:stretch>
@@ -11416,7 +11984,7 @@
           <a:bodyPr wrap="square" lIns="0" tIns="0" rIns="0" bIns="0" rtlCol="0" anchor="ctr"/>
           <a:lstStyle/>
           <a:p>
-            <a:pPr algn="ctr" indent="0" marL="0">
+            <a:pPr marL="0" indent="0" algn="ctr">
               <a:buNone/>
             </a:pPr>
             <a:r>
@@ -11455,7 +12023,7 @@
           <a:bodyPr wrap="square" lIns="0" tIns="0" rIns="0" bIns="0" rtlCol="0" anchor="ctr"/>
           <a:lstStyle/>
           <a:p>
-            <a:pPr algn="ctr" indent="0" marL="0">
+            <a:pPr marL="0" indent="0" algn="ctr">
               <a:buNone/>
             </a:pPr>
             <a:r>
@@ -11497,6 +12065,13 @@
             <a:prstDash val="dash"/>
           </a:ln>
         </p:spPr>
+        <p:txBody>
+          <a:bodyPr/>
+          <a:lstStyle/>
+          <a:p>
+            <a:endParaRPr lang="ja-JP" altLang="en-US"/>
+          </a:p>
+        </p:txBody>
       </p:sp>
       <p:sp>
         <p:nvSpPr>
@@ -11524,17 +12099,24 @@
             <a:prstDash val="solid"/>
           </a:ln>
         </p:spPr>
+        <p:txBody>
+          <a:bodyPr/>
+          <a:lstStyle/>
+          <a:p>
+            <a:endParaRPr lang="ja-JP" altLang="en-US"/>
+          </a:p>
+        </p:txBody>
       </p:sp>
       <p:pic>
         <p:nvPicPr>
-          <p:cNvPr id="52" name="Image 16" descr="/tmp/claude-0/-home-user-WeddingInvitations/2c9849ff-e4cc-5683-ac72-2a6c69aa5261/scratchpad/dress_icon.png">    </p:cNvPr>
+          <p:cNvPr id="52" name="Image 16" descr="/tmp/claude-0/-home-user-WeddingInvitations/2c9849ff-e4cc-5683-ac72-2a6c69aa5261/scratchpad/dress_icon.png"/>
           <p:cNvPicPr>
             <a:picLocks noChangeAspect="1"/>
           </p:cNvPicPr>
           <p:nvPr/>
         </p:nvPicPr>
         <p:blipFill>
-          <a:blip r:embed="rId17"/>
+          <a:blip r:embed="rId4"/>
           <a:stretch>
             <a:fillRect/>
           </a:stretch>
@@ -11551,14 +12133,14 @@
       </p:pic>
       <p:pic>
         <p:nvPicPr>
-          <p:cNvPr id="53" name="Image 17" descr="/tmp/claude-0/-home-user-WeddingInvitations/2c9849ff-e4cc-5683-ac72-2a6c69aa5261/scratchpad/dress_icon.png">    </p:cNvPr>
+          <p:cNvPr id="53" name="Image 17" descr="/tmp/claude-0/-home-user-WeddingInvitations/2c9849ff-e4cc-5683-ac72-2a6c69aa5261/scratchpad/dress_icon.png"/>
           <p:cNvPicPr>
             <a:picLocks noChangeAspect="1"/>
           </p:cNvPicPr>
           <p:nvPr/>
         </p:nvPicPr>
         <p:blipFill>
-          <a:blip r:embed="rId18"/>
+          <a:blip r:embed="rId4"/>
           <a:stretch>
             <a:fillRect/>
           </a:stretch>
@@ -11594,7 +12176,7 @@
           <a:bodyPr wrap="square" lIns="0" tIns="0" rIns="0" bIns="0" rtlCol="0" anchor="ctr"/>
           <a:lstStyle/>
           <a:p>
-            <a:pPr algn="ctr" indent="0" marL="0">
+            <a:pPr marL="0" indent="0" algn="ctr">
               <a:buNone/>
             </a:pPr>
             <a:r>
@@ -11633,7 +12215,7 @@
           <a:bodyPr wrap="square" lIns="0" tIns="0" rIns="0" bIns="0" rtlCol="0" anchor="ctr"/>
           <a:lstStyle/>
           <a:p>
-            <a:pPr algn="ctr" indent="0" marL="0">
+            <a:pPr marL="0" indent="0" algn="ctr">
               <a:buNone/>
             </a:pPr>
             <a:r>
@@ -11675,6 +12257,13 @@
             <a:prstDash val="dash"/>
           </a:ln>
         </p:spPr>
+        <p:txBody>
+          <a:bodyPr/>
+          <a:lstStyle/>
+          <a:p>
+            <a:endParaRPr lang="ja-JP" altLang="en-US"/>
+          </a:p>
+        </p:txBody>
       </p:sp>
       <p:sp>
         <p:nvSpPr>
@@ -11702,17 +12291,24 @@
             <a:prstDash val="solid"/>
           </a:ln>
         </p:spPr>
+        <p:txBody>
+          <a:bodyPr/>
+          <a:lstStyle/>
+          <a:p>
+            <a:endParaRPr lang="ja-JP" altLang="en-US"/>
+          </a:p>
+        </p:txBody>
       </p:sp>
       <p:pic>
         <p:nvPicPr>
-          <p:cNvPr id="58" name="Image 18" descr="/tmp/claude-0/-home-user-WeddingInvitations/2c9849ff-e4cc-5683-ac72-2a6c69aa5261/scratchpad/dress_icon.png">    </p:cNvPr>
+          <p:cNvPr id="58" name="Image 18" descr="/tmp/claude-0/-home-user-WeddingInvitations/2c9849ff-e4cc-5683-ac72-2a6c69aa5261/scratchpad/dress_icon.png"/>
           <p:cNvPicPr>
             <a:picLocks noChangeAspect="1"/>
           </p:cNvPicPr>
           <p:nvPr/>
         </p:nvPicPr>
         <p:blipFill>
-          <a:blip r:embed="rId19"/>
+          <a:blip r:embed="rId4"/>
           <a:stretch>
             <a:fillRect/>
           </a:stretch>
@@ -11729,14 +12325,14 @@
       </p:pic>
       <p:pic>
         <p:nvPicPr>
-          <p:cNvPr id="59" name="Image 19" descr="/tmp/claude-0/-home-user-WeddingInvitations/2c9849ff-e4cc-5683-ac72-2a6c69aa5261/scratchpad/dress_icon.png">    </p:cNvPr>
+          <p:cNvPr id="59" name="Image 19" descr="/tmp/claude-0/-home-user-WeddingInvitations/2c9849ff-e4cc-5683-ac72-2a6c69aa5261/scratchpad/dress_icon.png"/>
           <p:cNvPicPr>
             <a:picLocks noChangeAspect="1"/>
           </p:cNvPicPr>
           <p:nvPr/>
         </p:nvPicPr>
         <p:blipFill>
-          <a:blip r:embed="rId20"/>
+          <a:blip r:embed="rId4"/>
           <a:stretch>
             <a:fillRect/>
           </a:stretch>
@@ -11772,7 +12368,7 @@
           <a:bodyPr wrap="square" lIns="0" tIns="0" rIns="0" bIns="0" rtlCol="0" anchor="ctr"/>
           <a:lstStyle/>
           <a:p>
-            <a:pPr algn="ctr" indent="0" marL="0">
+            <a:pPr marL="0" indent="0" algn="ctr">
               <a:buNone/>
             </a:pPr>
             <a:r>
@@ -11811,7 +12407,7 @@
           <a:bodyPr wrap="square" lIns="0" tIns="0" rIns="0" bIns="0" rtlCol="0" anchor="ctr"/>
           <a:lstStyle/>
           <a:p>
-            <a:pPr algn="ctr" indent="0" marL="0">
+            <a:pPr marL="0" indent="0" algn="ctr">
               <a:buNone/>
             </a:pPr>
             <a:r>
@@ -11853,6 +12449,13 @@
             <a:prstDash val="dash"/>
           </a:ln>
         </p:spPr>
+        <p:txBody>
+          <a:bodyPr/>
+          <a:lstStyle/>
+          <a:p>
+            <a:endParaRPr lang="ja-JP" altLang="en-US"/>
+          </a:p>
+        </p:txBody>
       </p:sp>
       <p:sp>
         <p:nvSpPr>
@@ -11880,17 +12483,24 @@
             <a:prstDash val="solid"/>
           </a:ln>
         </p:spPr>
+        <p:txBody>
+          <a:bodyPr/>
+          <a:lstStyle/>
+          <a:p>
+            <a:endParaRPr lang="ja-JP" altLang="en-US"/>
+          </a:p>
+        </p:txBody>
       </p:sp>
       <p:pic>
         <p:nvPicPr>
-          <p:cNvPr id="64" name="Image 20" descr="/tmp/claude-0/-home-user-WeddingInvitations/2c9849ff-e4cc-5683-ac72-2a6c69aa5261/scratchpad/dress_icon.png">    </p:cNvPr>
+          <p:cNvPr id="64" name="Image 20" descr="/tmp/claude-0/-home-user-WeddingInvitations/2c9849ff-e4cc-5683-ac72-2a6c69aa5261/scratchpad/dress_icon.png"/>
           <p:cNvPicPr>
             <a:picLocks noChangeAspect="1"/>
           </p:cNvPicPr>
           <p:nvPr/>
         </p:nvPicPr>
         <p:blipFill>
-          <a:blip r:embed="rId21"/>
+          <a:blip r:embed="rId4"/>
           <a:stretch>
             <a:fillRect/>
           </a:stretch>
@@ -11907,14 +12517,14 @@
       </p:pic>
       <p:pic>
         <p:nvPicPr>
-          <p:cNvPr id="65" name="Image 21" descr="/tmp/claude-0/-home-user-WeddingInvitations/2c9849ff-e4cc-5683-ac72-2a6c69aa5261/scratchpad/dress_icon.png">    </p:cNvPr>
+          <p:cNvPr id="65" name="Image 21" descr="/tmp/claude-0/-home-user-WeddingInvitations/2c9849ff-e4cc-5683-ac72-2a6c69aa5261/scratchpad/dress_icon.png"/>
           <p:cNvPicPr>
             <a:picLocks noChangeAspect="1"/>
           </p:cNvPicPr>
           <p:nvPr/>
         </p:nvPicPr>
         <p:blipFill>
-          <a:blip r:embed="rId22"/>
+          <a:blip r:embed="rId4"/>
           <a:stretch>
             <a:fillRect/>
           </a:stretch>
@@ -11950,7 +12560,7 @@
           <a:bodyPr wrap="square" lIns="0" tIns="0" rIns="0" bIns="0" rtlCol="0" anchor="ctr"/>
           <a:lstStyle/>
           <a:p>
-            <a:pPr algn="ctr" indent="0" marL="0">
+            <a:pPr marL="0" indent="0" algn="ctr">
               <a:buNone/>
             </a:pPr>
             <a:r>
@@ -11989,7 +12599,7 @@
           <a:bodyPr wrap="square" lIns="0" tIns="0" rIns="0" bIns="0" rtlCol="0" anchor="ctr"/>
           <a:lstStyle/>
           <a:p>
-            <a:pPr algn="ctr" indent="0" marL="0">
+            <a:pPr marL="0" indent="0" algn="ctr">
               <a:buNone/>
             </a:pPr>
             <a:r>
@@ -12031,6 +12641,13 @@
             <a:prstDash val="dash"/>
           </a:ln>
         </p:spPr>
+        <p:txBody>
+          <a:bodyPr/>
+          <a:lstStyle/>
+          <a:p>
+            <a:endParaRPr lang="ja-JP" altLang="en-US"/>
+          </a:p>
+        </p:txBody>
       </p:sp>
       <p:sp>
         <p:nvSpPr>
@@ -12058,17 +12675,24 @@
             <a:prstDash val="solid"/>
           </a:ln>
         </p:spPr>
+        <p:txBody>
+          <a:bodyPr/>
+          <a:lstStyle/>
+          <a:p>
+            <a:endParaRPr lang="ja-JP" altLang="en-US"/>
+          </a:p>
+        </p:txBody>
       </p:sp>
       <p:pic>
         <p:nvPicPr>
-          <p:cNvPr id="70" name="Image 22" descr="/tmp/claude-0/-home-user-WeddingInvitations/2c9849ff-e4cc-5683-ac72-2a6c69aa5261/scratchpad/dress_icon.png">    </p:cNvPr>
+          <p:cNvPr id="70" name="Image 22" descr="/tmp/claude-0/-home-user-WeddingInvitations/2c9849ff-e4cc-5683-ac72-2a6c69aa5261/scratchpad/dress_icon.png"/>
           <p:cNvPicPr>
             <a:picLocks noChangeAspect="1"/>
           </p:cNvPicPr>
           <p:nvPr/>
         </p:nvPicPr>
         <p:blipFill>
-          <a:blip r:embed="rId23"/>
+          <a:blip r:embed="rId4"/>
           <a:stretch>
             <a:fillRect/>
           </a:stretch>
@@ -12085,14 +12709,14 @@
       </p:pic>
       <p:pic>
         <p:nvPicPr>
-          <p:cNvPr id="71" name="Image 23" descr="/tmp/claude-0/-home-user-WeddingInvitations/2c9849ff-e4cc-5683-ac72-2a6c69aa5261/scratchpad/dress_icon.png">    </p:cNvPr>
+          <p:cNvPr id="71" name="Image 23" descr="/tmp/claude-0/-home-user-WeddingInvitations/2c9849ff-e4cc-5683-ac72-2a6c69aa5261/scratchpad/dress_icon.png"/>
           <p:cNvPicPr>
             <a:picLocks noChangeAspect="1"/>
           </p:cNvPicPr>
           <p:nvPr/>
         </p:nvPicPr>
         <p:blipFill>
-          <a:blip r:embed="rId24"/>
+          <a:blip r:embed="rId4"/>
           <a:stretch>
             <a:fillRect/>
           </a:stretch>
@@ -12128,7 +12752,7 @@
           <a:bodyPr wrap="square" lIns="0" tIns="0" rIns="0" bIns="0" rtlCol="0" anchor="ctr"/>
           <a:lstStyle/>
           <a:p>
-            <a:pPr algn="ctr" indent="0" marL="0">
+            <a:pPr marL="0" indent="0" algn="ctr">
               <a:buNone/>
             </a:pPr>
             <a:r>
@@ -12167,7 +12791,7 @@
           <a:bodyPr wrap="square" lIns="0" tIns="0" rIns="0" bIns="0" rtlCol="0" anchor="ctr"/>
           <a:lstStyle/>
           <a:p>
-            <a:pPr algn="ctr" indent="0" marL="0">
+            <a:pPr marL="0" indent="0" algn="ctr">
               <a:buNone/>
             </a:pPr>
             <a:r>
@@ -12209,6 +12833,13 @@
             <a:prstDash val="dash"/>
           </a:ln>
         </p:spPr>
+        <p:txBody>
+          <a:bodyPr/>
+          <a:lstStyle/>
+          <a:p>
+            <a:endParaRPr lang="ja-JP" altLang="en-US"/>
+          </a:p>
+        </p:txBody>
       </p:sp>
       <p:sp>
         <p:nvSpPr>
@@ -12236,17 +12867,24 @@
             <a:prstDash val="solid"/>
           </a:ln>
         </p:spPr>
+        <p:txBody>
+          <a:bodyPr/>
+          <a:lstStyle/>
+          <a:p>
+            <a:endParaRPr lang="ja-JP" altLang="en-US"/>
+          </a:p>
+        </p:txBody>
       </p:sp>
       <p:pic>
         <p:nvPicPr>
-          <p:cNvPr id="76" name="Image 24" descr="/tmp/claude-0/-home-user-WeddingInvitations/2c9849ff-e4cc-5683-ac72-2a6c69aa5261/scratchpad/dress_icon.png">    </p:cNvPr>
+          <p:cNvPr id="76" name="Image 24" descr="/tmp/claude-0/-home-user-WeddingInvitations/2c9849ff-e4cc-5683-ac72-2a6c69aa5261/scratchpad/dress_icon.png"/>
           <p:cNvPicPr>
             <a:picLocks noChangeAspect="1"/>
           </p:cNvPicPr>
           <p:nvPr/>
         </p:nvPicPr>
         <p:blipFill>
-          <a:blip r:embed="rId25"/>
+          <a:blip r:embed="rId4"/>
           <a:stretch>
             <a:fillRect/>
           </a:stretch>
@@ -12263,14 +12901,14 @@
       </p:pic>
       <p:pic>
         <p:nvPicPr>
-          <p:cNvPr id="77" name="Image 25" descr="/tmp/claude-0/-home-user-WeddingInvitations/2c9849ff-e4cc-5683-ac72-2a6c69aa5261/scratchpad/dress_icon.png">    </p:cNvPr>
+          <p:cNvPr id="77" name="Image 25" descr="/tmp/claude-0/-home-user-WeddingInvitations/2c9849ff-e4cc-5683-ac72-2a6c69aa5261/scratchpad/dress_icon.png"/>
           <p:cNvPicPr>
             <a:picLocks noChangeAspect="1"/>
           </p:cNvPicPr>
           <p:nvPr/>
         </p:nvPicPr>
         <p:blipFill>
-          <a:blip r:embed="rId26"/>
+          <a:blip r:embed="rId4"/>
           <a:stretch>
             <a:fillRect/>
           </a:stretch>
@@ -12306,7 +12944,7 @@
           <a:bodyPr wrap="square" lIns="0" tIns="0" rIns="0" bIns="0" rtlCol="0" anchor="ctr"/>
           <a:lstStyle/>
           <a:p>
-            <a:pPr algn="ctr" indent="0" marL="0">
+            <a:pPr marL="0" indent="0" algn="ctr">
               <a:buNone/>
             </a:pPr>
             <a:r>
@@ -12345,7 +12983,7 @@
           <a:bodyPr wrap="square" lIns="0" tIns="0" rIns="0" bIns="0" rtlCol="0" anchor="ctr"/>
           <a:lstStyle/>
           <a:p>
-            <a:pPr algn="ctr" indent="0" marL="0">
+            <a:pPr marL="0" indent="0" algn="ctr">
               <a:buNone/>
             </a:pPr>
             <a:r>
@@ -12387,6 +13025,13 @@
             <a:prstDash val="dash"/>
           </a:ln>
         </p:spPr>
+        <p:txBody>
+          <a:bodyPr/>
+          <a:lstStyle/>
+          <a:p>
+            <a:endParaRPr lang="ja-JP" altLang="en-US"/>
+          </a:p>
+        </p:txBody>
       </p:sp>
       <p:sp>
         <p:nvSpPr>
@@ -12414,17 +13059,24 @@
             <a:prstDash val="solid"/>
           </a:ln>
         </p:spPr>
+        <p:txBody>
+          <a:bodyPr/>
+          <a:lstStyle/>
+          <a:p>
+            <a:endParaRPr lang="ja-JP" altLang="en-US"/>
+          </a:p>
+        </p:txBody>
       </p:sp>
       <p:pic>
         <p:nvPicPr>
-          <p:cNvPr id="82" name="Image 26" descr="/tmp/claude-0/-home-user-WeddingInvitations/2c9849ff-e4cc-5683-ac72-2a6c69aa5261/scratchpad/dress_icon.png">    </p:cNvPr>
+          <p:cNvPr id="82" name="Image 26" descr="/tmp/claude-0/-home-user-WeddingInvitations/2c9849ff-e4cc-5683-ac72-2a6c69aa5261/scratchpad/dress_icon.png"/>
           <p:cNvPicPr>
             <a:picLocks noChangeAspect="1"/>
           </p:cNvPicPr>
           <p:nvPr/>
         </p:nvPicPr>
         <p:blipFill>
-          <a:blip r:embed="rId27"/>
+          <a:blip r:embed="rId4"/>
           <a:stretch>
             <a:fillRect/>
           </a:stretch>
@@ -12441,14 +13093,14 @@
       </p:pic>
       <p:pic>
         <p:nvPicPr>
-          <p:cNvPr id="83" name="Image 27" descr="/tmp/claude-0/-home-user-WeddingInvitations/2c9849ff-e4cc-5683-ac72-2a6c69aa5261/scratchpad/dress_icon.png">    </p:cNvPr>
+          <p:cNvPr id="83" name="Image 27" descr="/tmp/claude-0/-home-user-WeddingInvitations/2c9849ff-e4cc-5683-ac72-2a6c69aa5261/scratchpad/dress_icon.png"/>
           <p:cNvPicPr>
             <a:picLocks noChangeAspect="1"/>
           </p:cNvPicPr>
           <p:nvPr/>
         </p:nvPicPr>
         <p:blipFill>
-          <a:blip r:embed="rId28"/>
+          <a:blip r:embed="rId4"/>
           <a:stretch>
             <a:fillRect/>
           </a:stretch>
@@ -12484,7 +13136,7 @@
           <a:bodyPr wrap="square" lIns="0" tIns="0" rIns="0" bIns="0" rtlCol="0" anchor="ctr"/>
           <a:lstStyle/>
           <a:p>
-            <a:pPr algn="ctr" indent="0" marL="0">
+            <a:pPr marL="0" indent="0" algn="ctr">
               <a:buNone/>
             </a:pPr>
             <a:r>
@@ -12523,7 +13175,7 @@
           <a:bodyPr wrap="square" lIns="0" tIns="0" rIns="0" bIns="0" rtlCol="0" anchor="ctr"/>
           <a:lstStyle/>
           <a:p>
-            <a:pPr algn="ctr" indent="0" marL="0">
+            <a:pPr marL="0" indent="0" algn="ctr">
               <a:buNone/>
             </a:pPr>
             <a:r>
@@ -12565,6 +13217,13 @@
             <a:prstDash val="dash"/>
           </a:ln>
         </p:spPr>
+        <p:txBody>
+          <a:bodyPr/>
+          <a:lstStyle/>
+          <a:p>
+            <a:endParaRPr lang="ja-JP" altLang="en-US"/>
+          </a:p>
+        </p:txBody>
       </p:sp>
       <p:sp>
         <p:nvSpPr>
@@ -12592,17 +13251,24 @@
             <a:prstDash val="solid"/>
           </a:ln>
         </p:spPr>
+        <p:txBody>
+          <a:bodyPr/>
+          <a:lstStyle/>
+          <a:p>
+            <a:endParaRPr lang="ja-JP" altLang="en-US"/>
+          </a:p>
+        </p:txBody>
       </p:sp>
       <p:pic>
         <p:nvPicPr>
-          <p:cNvPr id="88" name="Image 28" descr="/tmp/claude-0/-home-user-WeddingInvitations/2c9849ff-e4cc-5683-ac72-2a6c69aa5261/scratchpad/dress_icon.png">    </p:cNvPr>
+          <p:cNvPr id="88" name="Image 28" descr="/tmp/claude-0/-home-user-WeddingInvitations/2c9849ff-e4cc-5683-ac72-2a6c69aa5261/scratchpad/dress_icon.png"/>
           <p:cNvPicPr>
             <a:picLocks noChangeAspect="1"/>
           </p:cNvPicPr>
           <p:nvPr/>
         </p:nvPicPr>
         <p:blipFill>
-          <a:blip r:embed="rId29"/>
+          <a:blip r:embed="rId4"/>
           <a:stretch>
             <a:fillRect/>
           </a:stretch>
@@ -12619,14 +13285,14 @@
       </p:pic>
       <p:pic>
         <p:nvPicPr>
-          <p:cNvPr id="89" name="Image 29" descr="/tmp/claude-0/-home-user-WeddingInvitations/2c9849ff-e4cc-5683-ac72-2a6c69aa5261/scratchpad/dress_icon.png">    </p:cNvPr>
+          <p:cNvPr id="89" name="Image 29" descr="/tmp/claude-0/-home-user-WeddingInvitations/2c9849ff-e4cc-5683-ac72-2a6c69aa5261/scratchpad/dress_icon.png"/>
           <p:cNvPicPr>
             <a:picLocks noChangeAspect="1"/>
           </p:cNvPicPr>
           <p:nvPr/>
         </p:nvPicPr>
         <p:blipFill>
-          <a:blip r:embed="rId30"/>
+          <a:blip r:embed="rId4"/>
           <a:stretch>
             <a:fillRect/>
           </a:stretch>
@@ -12662,7 +13328,7 @@
           <a:bodyPr wrap="square" lIns="0" tIns="0" rIns="0" bIns="0" rtlCol="0" anchor="ctr"/>
           <a:lstStyle/>
           <a:p>
-            <a:pPr algn="ctr" indent="0" marL="0">
+            <a:pPr marL="0" indent="0" algn="ctr">
               <a:buNone/>
             </a:pPr>
             <a:r>
@@ -12701,7 +13367,7 @@
           <a:bodyPr wrap="square" lIns="0" tIns="0" rIns="0" bIns="0" rtlCol="0" anchor="ctr"/>
           <a:lstStyle/>
           <a:p>
-            <a:pPr algn="ctr" indent="0" marL="0">
+            <a:pPr marL="0" indent="0" algn="ctr">
               <a:buNone/>
             </a:pPr>
             <a:r>
@@ -12713,7 +13379,29 @@
                 <a:ea typeface="Yu Gothic" pitchFamily="34" charset="-122"/>
                 <a:cs typeface="Yu Gothic" pitchFamily="34" charset="-120"/>
               </a:rPr>
-              <a:t>渡邊 彩音 様</a:t>
+              <a:t>渡</a:t>
+            </a:r>
+            <a:r>
+              <a:rPr lang="ja-JP" altLang="en-US" sz="2200" b="1" dirty="0">
+                <a:solidFill>
+                  <a:srgbClr val="5A2D3E"/>
+                </a:solidFill>
+                <a:latin typeface="Yu Gothic" pitchFamily="34" charset="0"/>
+                <a:ea typeface="Yu Gothic" pitchFamily="34" charset="-122"/>
+                <a:cs typeface="Yu Gothic" pitchFamily="34" charset="-120"/>
+              </a:rPr>
+              <a:t>邉</a:t>
+            </a:r>
+            <a:r>
+              <a:rPr lang="en-US" sz="2200" b="1" dirty="0">
+                <a:solidFill>
+                  <a:srgbClr val="5A2D3E"/>
+                </a:solidFill>
+                <a:latin typeface="Yu Gothic" pitchFamily="34" charset="0"/>
+                <a:ea typeface="Yu Gothic" pitchFamily="34" charset="-122"/>
+                <a:cs typeface="Yu Gothic" pitchFamily="34" charset="-120"/>
+              </a:rPr>
+              <a:t> 彩音 様</a:t>
             </a:r>
             <a:endParaRPr lang="en-US" sz="2200" dirty="0"/>
           </a:p>
@@ -12743,6 +13431,13 @@
             <a:prstDash val="dash"/>
           </a:ln>
         </p:spPr>
+        <p:txBody>
+          <a:bodyPr/>
+          <a:lstStyle/>
+          <a:p>
+            <a:endParaRPr lang="ja-JP" altLang="en-US"/>
+          </a:p>
+        </p:txBody>
       </p:sp>
       <p:sp>
         <p:nvSpPr>
@@ -12770,17 +13465,24 @@
             <a:prstDash val="solid"/>
           </a:ln>
         </p:spPr>
+        <p:txBody>
+          <a:bodyPr/>
+          <a:lstStyle/>
+          <a:p>
+            <a:endParaRPr lang="ja-JP" altLang="en-US"/>
+          </a:p>
+        </p:txBody>
       </p:sp>
       <p:pic>
         <p:nvPicPr>
-          <p:cNvPr id="94" name="Image 30" descr="/tmp/claude-0/-home-user-WeddingInvitations/2c9849ff-e4cc-5683-ac72-2a6c69aa5261/scratchpad/dress_icon.png">    </p:cNvPr>
+          <p:cNvPr id="94" name="Image 30" descr="/tmp/claude-0/-home-user-WeddingInvitations/2c9849ff-e4cc-5683-ac72-2a6c69aa5261/scratchpad/dress_icon.png"/>
           <p:cNvPicPr>
             <a:picLocks noChangeAspect="1"/>
           </p:cNvPicPr>
           <p:nvPr/>
         </p:nvPicPr>
         <p:blipFill>
-          <a:blip r:embed="rId31"/>
+          <a:blip r:embed="rId4"/>
           <a:stretch>
             <a:fillRect/>
           </a:stretch>
@@ -12797,14 +13499,14 @@
       </p:pic>
       <p:pic>
         <p:nvPicPr>
-          <p:cNvPr id="95" name="Image 31" descr="/tmp/claude-0/-home-user-WeddingInvitations/2c9849ff-e4cc-5683-ac72-2a6c69aa5261/scratchpad/dress_icon.png">    </p:cNvPr>
+          <p:cNvPr id="95" name="Image 31" descr="/tmp/claude-0/-home-user-WeddingInvitations/2c9849ff-e4cc-5683-ac72-2a6c69aa5261/scratchpad/dress_icon.png"/>
           <p:cNvPicPr>
             <a:picLocks noChangeAspect="1"/>
           </p:cNvPicPr>
           <p:nvPr/>
         </p:nvPicPr>
         <p:blipFill>
-          <a:blip r:embed="rId32"/>
+          <a:blip r:embed="rId4"/>
           <a:stretch>
             <a:fillRect/>
           </a:stretch>
@@ -12840,7 +13542,7 @@
           <a:bodyPr wrap="square" lIns="0" tIns="0" rIns="0" bIns="0" rtlCol="0" anchor="ctr"/>
           <a:lstStyle/>
           <a:p>
-            <a:pPr algn="ctr" indent="0" marL="0">
+            <a:pPr marL="0" indent="0" algn="ctr">
               <a:buNone/>
             </a:pPr>
             <a:r>
@@ -12879,7 +13581,7 @@
           <a:bodyPr wrap="square" lIns="0" tIns="0" rIns="0" bIns="0" rtlCol="0" anchor="ctr"/>
           <a:lstStyle/>
           <a:p>
-            <a:pPr algn="ctr" indent="0" marL="0">
+            <a:pPr marL="0" indent="0" algn="ctr">
               <a:buNone/>
             </a:pPr>
             <a:r>
@@ -12913,6 +13615,7 @@
         <a:solidFill>
           <a:srgbClr val="FFFFFF"/>
         </a:solidFill>
+        <a:effectLst/>
       </p:bgPr>
     </p:bg>
     <p:spTree>
@@ -12953,6 +13656,13 @@
             <a:prstDash val="dash"/>
           </a:ln>
         </p:spPr>
+        <p:txBody>
+          <a:bodyPr/>
+          <a:lstStyle/>
+          <a:p>
+            <a:endParaRPr lang="ja-JP" altLang="en-US"/>
+          </a:p>
+        </p:txBody>
       </p:sp>
       <p:sp>
         <p:nvSpPr>
@@ -12980,17 +13690,24 @@
             <a:prstDash val="solid"/>
           </a:ln>
         </p:spPr>
+        <p:txBody>
+          <a:bodyPr/>
+          <a:lstStyle/>
+          <a:p>
+            <a:endParaRPr lang="ja-JP" altLang="en-US"/>
+          </a:p>
+        </p:txBody>
       </p:sp>
       <p:pic>
         <p:nvPicPr>
-          <p:cNvPr id="4" name="Image 0" descr="/tmp/claude-0/-home-user-WeddingInvitations/2c9849ff-e4cc-5683-ac72-2a6c69aa5261/scratchpad/dress_icon.png">    </p:cNvPr>
+          <p:cNvPr id="4" name="Image 0" descr="/tmp/claude-0/-home-user-WeddingInvitations/2c9849ff-e4cc-5683-ac72-2a6c69aa5261/scratchpad/dress_icon.png"/>
           <p:cNvPicPr>
             <a:picLocks noChangeAspect="1"/>
           </p:cNvPicPr>
           <p:nvPr/>
         </p:nvPicPr>
         <p:blipFill>
-          <a:blip r:embed="rId1"/>
+          <a:blip r:embed="rId3"/>
           <a:stretch>
             <a:fillRect/>
           </a:stretch>
@@ -13007,14 +13724,14 @@
       </p:pic>
       <p:pic>
         <p:nvPicPr>
-          <p:cNvPr id="5" name="Image 1" descr="/tmp/claude-0/-home-user-WeddingInvitations/2c9849ff-e4cc-5683-ac72-2a6c69aa5261/scratchpad/dress_icon.png">    </p:cNvPr>
+          <p:cNvPr id="5" name="Image 1" descr="/tmp/claude-0/-home-user-WeddingInvitations/2c9849ff-e4cc-5683-ac72-2a6c69aa5261/scratchpad/dress_icon.png"/>
           <p:cNvPicPr>
             <a:picLocks noChangeAspect="1"/>
           </p:cNvPicPr>
           <p:nvPr/>
         </p:nvPicPr>
         <p:blipFill>
-          <a:blip r:embed="rId2"/>
+          <a:blip r:embed="rId3"/>
           <a:stretch>
             <a:fillRect/>
           </a:stretch>
@@ -13050,7 +13767,7 @@
           <a:bodyPr wrap="square" lIns="0" tIns="0" rIns="0" bIns="0" rtlCol="0" anchor="ctr"/>
           <a:lstStyle/>
           <a:p>
-            <a:pPr algn="ctr" indent="0" marL="0">
+            <a:pPr marL="0" indent="0" algn="ctr">
               <a:buNone/>
             </a:pPr>
             <a:r>
@@ -13089,7 +13806,7 @@
           <a:bodyPr wrap="square" lIns="0" tIns="0" rIns="0" bIns="0" rtlCol="0" anchor="ctr"/>
           <a:lstStyle/>
           <a:p>
-            <a:pPr algn="ctr" indent="0" marL="0">
+            <a:pPr marL="0" indent="0" algn="ctr">
               <a:buNone/>
             </a:pPr>
             <a:r>
@@ -13131,6 +13848,13 @@
             <a:prstDash val="dash"/>
           </a:ln>
         </p:spPr>
+        <p:txBody>
+          <a:bodyPr/>
+          <a:lstStyle/>
+          <a:p>
+            <a:endParaRPr lang="ja-JP" altLang="en-US"/>
+          </a:p>
+        </p:txBody>
       </p:sp>
       <p:sp>
         <p:nvSpPr>
@@ -13158,10 +13882,17 @@
             <a:prstDash val="solid"/>
           </a:ln>
         </p:spPr>
+        <p:txBody>
+          <a:bodyPr/>
+          <a:lstStyle/>
+          <a:p>
+            <a:endParaRPr lang="ja-JP" altLang="en-US"/>
+          </a:p>
+        </p:txBody>
       </p:sp>
       <p:pic>
         <p:nvPicPr>
-          <p:cNvPr id="10" name="Image 2" descr="/tmp/claude-0/-home-user-WeddingInvitations/2c9849ff-e4cc-5683-ac72-2a6c69aa5261/scratchpad/dress_icon.png">    </p:cNvPr>
+          <p:cNvPr id="10" name="Image 2" descr="/tmp/claude-0/-home-user-WeddingInvitations/2c9849ff-e4cc-5683-ac72-2a6c69aa5261/scratchpad/dress_icon.png"/>
           <p:cNvPicPr>
             <a:picLocks noChangeAspect="1"/>
           </p:cNvPicPr>
@@ -13185,14 +13916,14 @@
       </p:pic>
       <p:pic>
         <p:nvPicPr>
-          <p:cNvPr id="11" name="Image 3" descr="/tmp/claude-0/-home-user-WeddingInvitations/2c9849ff-e4cc-5683-ac72-2a6c69aa5261/scratchpad/dress_icon.png">    </p:cNvPr>
+          <p:cNvPr id="11" name="Image 3" descr="/tmp/claude-0/-home-user-WeddingInvitations/2c9849ff-e4cc-5683-ac72-2a6c69aa5261/scratchpad/dress_icon.png"/>
           <p:cNvPicPr>
             <a:picLocks noChangeAspect="1"/>
           </p:cNvPicPr>
           <p:nvPr/>
         </p:nvPicPr>
         <p:blipFill>
-          <a:blip r:embed="rId4"/>
+          <a:blip r:embed="rId3"/>
           <a:stretch>
             <a:fillRect/>
           </a:stretch>
@@ -13228,7 +13959,7 @@
           <a:bodyPr wrap="square" lIns="0" tIns="0" rIns="0" bIns="0" rtlCol="0" anchor="ctr"/>
           <a:lstStyle/>
           <a:p>
-            <a:pPr algn="ctr" indent="0" marL="0">
+            <a:pPr marL="0" indent="0" algn="ctr">
               <a:buNone/>
             </a:pPr>
             <a:r>
@@ -13267,7 +13998,7 @@
           <a:bodyPr wrap="square" lIns="0" tIns="0" rIns="0" bIns="0" rtlCol="0" anchor="ctr"/>
           <a:lstStyle/>
           <a:p>
-            <a:pPr algn="ctr" indent="0" marL="0">
+            <a:pPr marL="0" indent="0" algn="ctr">
               <a:buNone/>
             </a:pPr>
             <a:r>
@@ -13309,6 +14040,13 @@
             <a:prstDash val="dash"/>
           </a:ln>
         </p:spPr>
+        <p:txBody>
+          <a:bodyPr/>
+          <a:lstStyle/>
+          <a:p>
+            <a:endParaRPr lang="ja-JP" altLang="en-US"/>
+          </a:p>
+        </p:txBody>
       </p:sp>
       <p:sp>
         <p:nvSpPr>
@@ -13336,17 +14074,24 @@
             <a:prstDash val="solid"/>
           </a:ln>
         </p:spPr>
+        <p:txBody>
+          <a:bodyPr/>
+          <a:lstStyle/>
+          <a:p>
+            <a:endParaRPr lang="ja-JP" altLang="en-US"/>
+          </a:p>
+        </p:txBody>
       </p:sp>
       <p:pic>
         <p:nvPicPr>
-          <p:cNvPr id="16" name="Image 4" descr="/tmp/claude-0/-home-user-WeddingInvitations/2c9849ff-e4cc-5683-ac72-2a6c69aa5261/scratchpad/dress_icon.png">    </p:cNvPr>
+          <p:cNvPr id="16" name="Image 4" descr="/tmp/claude-0/-home-user-WeddingInvitations/2c9849ff-e4cc-5683-ac72-2a6c69aa5261/scratchpad/dress_icon.png"/>
           <p:cNvPicPr>
             <a:picLocks noChangeAspect="1"/>
           </p:cNvPicPr>
           <p:nvPr/>
         </p:nvPicPr>
         <p:blipFill>
-          <a:blip r:embed="rId5"/>
+          <a:blip r:embed="rId3"/>
           <a:stretch>
             <a:fillRect/>
           </a:stretch>
@@ -13363,14 +14108,14 @@
       </p:pic>
       <p:pic>
         <p:nvPicPr>
-          <p:cNvPr id="17" name="Image 5" descr="/tmp/claude-0/-home-user-WeddingInvitations/2c9849ff-e4cc-5683-ac72-2a6c69aa5261/scratchpad/dress_icon.png">    </p:cNvPr>
+          <p:cNvPr id="17" name="Image 5" descr="/tmp/claude-0/-home-user-WeddingInvitations/2c9849ff-e4cc-5683-ac72-2a6c69aa5261/scratchpad/dress_icon.png"/>
           <p:cNvPicPr>
             <a:picLocks noChangeAspect="1"/>
           </p:cNvPicPr>
           <p:nvPr/>
         </p:nvPicPr>
         <p:blipFill>
-          <a:blip r:embed="rId6"/>
+          <a:blip r:embed="rId3"/>
           <a:stretch>
             <a:fillRect/>
           </a:stretch>
@@ -13406,7 +14151,7 @@
           <a:bodyPr wrap="square" lIns="0" tIns="0" rIns="0" bIns="0" rtlCol="0" anchor="ctr"/>
           <a:lstStyle/>
           <a:p>
-            <a:pPr algn="ctr" indent="0" marL="0">
+            <a:pPr marL="0" indent="0" algn="ctr">
               <a:buNone/>
             </a:pPr>
             <a:r>
@@ -13445,7 +14190,7 @@
           <a:bodyPr wrap="square" lIns="0" tIns="0" rIns="0" bIns="0" rtlCol="0" anchor="ctr"/>
           <a:lstStyle/>
           <a:p>
-            <a:pPr algn="ctr" indent="0" marL="0">
+            <a:pPr marL="0" indent="0" algn="ctr">
               <a:buNone/>
             </a:pPr>
             <a:r>
@@ -13487,6 +14232,13 @@
             <a:prstDash val="dash"/>
           </a:ln>
         </p:spPr>
+        <p:txBody>
+          <a:bodyPr/>
+          <a:lstStyle/>
+          <a:p>
+            <a:endParaRPr lang="ja-JP" altLang="en-US"/>
+          </a:p>
+        </p:txBody>
       </p:sp>
       <p:sp>
         <p:nvSpPr>
@@ -13514,17 +14266,24 @@
             <a:prstDash val="solid"/>
           </a:ln>
         </p:spPr>
+        <p:txBody>
+          <a:bodyPr/>
+          <a:lstStyle/>
+          <a:p>
+            <a:endParaRPr lang="ja-JP" altLang="en-US"/>
+          </a:p>
+        </p:txBody>
       </p:sp>
       <p:pic>
         <p:nvPicPr>
-          <p:cNvPr id="22" name="Image 6" descr="/tmp/claude-0/-home-user-WeddingInvitations/2c9849ff-e4cc-5683-ac72-2a6c69aa5261/scratchpad/dress_icon.png">    </p:cNvPr>
+          <p:cNvPr id="22" name="Image 6" descr="/tmp/claude-0/-home-user-WeddingInvitations/2c9849ff-e4cc-5683-ac72-2a6c69aa5261/scratchpad/dress_icon.png"/>
           <p:cNvPicPr>
             <a:picLocks noChangeAspect="1"/>
           </p:cNvPicPr>
           <p:nvPr/>
         </p:nvPicPr>
         <p:blipFill>
-          <a:blip r:embed="rId7"/>
+          <a:blip r:embed="rId3"/>
           <a:stretch>
             <a:fillRect/>
           </a:stretch>
@@ -13541,14 +14300,14 @@
       </p:pic>
       <p:pic>
         <p:nvPicPr>
-          <p:cNvPr id="23" name="Image 7" descr="/tmp/claude-0/-home-user-WeddingInvitations/2c9849ff-e4cc-5683-ac72-2a6c69aa5261/scratchpad/dress_icon.png">    </p:cNvPr>
+          <p:cNvPr id="23" name="Image 7" descr="/tmp/claude-0/-home-user-WeddingInvitations/2c9849ff-e4cc-5683-ac72-2a6c69aa5261/scratchpad/dress_icon.png"/>
           <p:cNvPicPr>
             <a:picLocks noChangeAspect="1"/>
           </p:cNvPicPr>
           <p:nvPr/>
         </p:nvPicPr>
         <p:blipFill>
-          <a:blip r:embed="rId8"/>
+          <a:blip r:embed="rId3"/>
           <a:stretch>
             <a:fillRect/>
           </a:stretch>
@@ -13584,7 +14343,7 @@
           <a:bodyPr wrap="square" lIns="0" tIns="0" rIns="0" bIns="0" rtlCol="0" anchor="ctr"/>
           <a:lstStyle/>
           <a:p>
-            <a:pPr algn="ctr" indent="0" marL="0">
+            <a:pPr marL="0" indent="0" algn="ctr">
               <a:buNone/>
             </a:pPr>
             <a:r>
@@ -13623,7 +14382,7 @@
           <a:bodyPr wrap="square" lIns="0" tIns="0" rIns="0" bIns="0" rtlCol="0" anchor="ctr"/>
           <a:lstStyle/>
           <a:p>
-            <a:pPr algn="ctr" indent="0" marL="0">
+            <a:pPr marL="0" indent="0" algn="ctr">
               <a:buNone/>
             </a:pPr>
             <a:r>
@@ -13665,6 +14424,13 @@
             <a:prstDash val="dash"/>
           </a:ln>
         </p:spPr>
+        <p:txBody>
+          <a:bodyPr/>
+          <a:lstStyle/>
+          <a:p>
+            <a:endParaRPr lang="ja-JP" altLang="en-US"/>
+          </a:p>
+        </p:txBody>
       </p:sp>
       <p:sp>
         <p:nvSpPr>
@@ -13692,17 +14458,24 @@
             <a:prstDash val="solid"/>
           </a:ln>
         </p:spPr>
+        <p:txBody>
+          <a:bodyPr/>
+          <a:lstStyle/>
+          <a:p>
+            <a:endParaRPr lang="ja-JP" altLang="en-US"/>
+          </a:p>
+        </p:txBody>
       </p:sp>
       <p:pic>
         <p:nvPicPr>
-          <p:cNvPr id="28" name="Image 8" descr="/tmp/claude-0/-home-user-WeddingInvitations/2c9849ff-e4cc-5683-ac72-2a6c69aa5261/scratchpad/dress_icon.png">    </p:cNvPr>
+          <p:cNvPr id="28" name="Image 8" descr="/tmp/claude-0/-home-user-WeddingInvitations/2c9849ff-e4cc-5683-ac72-2a6c69aa5261/scratchpad/dress_icon.png"/>
           <p:cNvPicPr>
             <a:picLocks noChangeAspect="1"/>
           </p:cNvPicPr>
           <p:nvPr/>
         </p:nvPicPr>
         <p:blipFill>
-          <a:blip r:embed="rId9"/>
+          <a:blip r:embed="rId3"/>
           <a:stretch>
             <a:fillRect/>
           </a:stretch>
@@ -13719,14 +14492,14 @@
       </p:pic>
       <p:pic>
         <p:nvPicPr>
-          <p:cNvPr id="29" name="Image 9" descr="/tmp/claude-0/-home-user-WeddingInvitations/2c9849ff-e4cc-5683-ac72-2a6c69aa5261/scratchpad/dress_icon.png">    </p:cNvPr>
+          <p:cNvPr id="29" name="Image 9" descr="/tmp/claude-0/-home-user-WeddingInvitations/2c9849ff-e4cc-5683-ac72-2a6c69aa5261/scratchpad/dress_icon.png"/>
           <p:cNvPicPr>
             <a:picLocks noChangeAspect="1"/>
           </p:cNvPicPr>
           <p:nvPr/>
         </p:nvPicPr>
         <p:blipFill>
-          <a:blip r:embed="rId10"/>
+          <a:blip r:embed="rId3"/>
           <a:stretch>
             <a:fillRect/>
           </a:stretch>
@@ -13762,7 +14535,7 @@
           <a:bodyPr wrap="square" lIns="0" tIns="0" rIns="0" bIns="0" rtlCol="0" anchor="ctr"/>
           <a:lstStyle/>
           <a:p>
-            <a:pPr algn="ctr" indent="0" marL="0">
+            <a:pPr marL="0" indent="0" algn="ctr">
               <a:buNone/>
             </a:pPr>
             <a:r>
@@ -13801,7 +14574,7 @@
           <a:bodyPr wrap="square" lIns="0" tIns="0" rIns="0" bIns="0" rtlCol="0" anchor="ctr"/>
           <a:lstStyle/>
           <a:p>
-            <a:pPr algn="ctr" indent="0" marL="0">
+            <a:pPr marL="0" indent="0" algn="ctr">
               <a:buNone/>
             </a:pPr>
             <a:r>
@@ -13843,6 +14616,13 @@
             <a:prstDash val="dash"/>
           </a:ln>
         </p:spPr>
+        <p:txBody>
+          <a:bodyPr/>
+          <a:lstStyle/>
+          <a:p>
+            <a:endParaRPr lang="ja-JP" altLang="en-US"/>
+          </a:p>
+        </p:txBody>
       </p:sp>
       <p:sp>
         <p:nvSpPr>
@@ -13870,17 +14650,24 @@
             <a:prstDash val="solid"/>
           </a:ln>
         </p:spPr>
+        <p:txBody>
+          <a:bodyPr/>
+          <a:lstStyle/>
+          <a:p>
+            <a:endParaRPr lang="ja-JP" altLang="en-US"/>
+          </a:p>
+        </p:txBody>
       </p:sp>
       <p:pic>
         <p:nvPicPr>
-          <p:cNvPr id="34" name="Image 10" descr="/tmp/claude-0/-home-user-WeddingInvitations/2c9849ff-e4cc-5683-ac72-2a6c69aa5261/scratchpad/dress_icon.png">    </p:cNvPr>
+          <p:cNvPr id="34" name="Image 10" descr="/tmp/claude-0/-home-user-WeddingInvitations/2c9849ff-e4cc-5683-ac72-2a6c69aa5261/scratchpad/dress_icon.png"/>
           <p:cNvPicPr>
             <a:picLocks noChangeAspect="1"/>
           </p:cNvPicPr>
           <p:nvPr/>
         </p:nvPicPr>
         <p:blipFill>
-          <a:blip r:embed="rId11"/>
+          <a:blip r:embed="rId3"/>
           <a:stretch>
             <a:fillRect/>
           </a:stretch>
@@ -13897,14 +14684,14 @@
       </p:pic>
       <p:pic>
         <p:nvPicPr>
-          <p:cNvPr id="35" name="Image 11" descr="/tmp/claude-0/-home-user-WeddingInvitations/2c9849ff-e4cc-5683-ac72-2a6c69aa5261/scratchpad/dress_icon.png">    </p:cNvPr>
+          <p:cNvPr id="35" name="Image 11" descr="/tmp/claude-0/-home-user-WeddingInvitations/2c9849ff-e4cc-5683-ac72-2a6c69aa5261/scratchpad/dress_icon.png"/>
           <p:cNvPicPr>
             <a:picLocks noChangeAspect="1"/>
           </p:cNvPicPr>
           <p:nvPr/>
         </p:nvPicPr>
         <p:blipFill>
-          <a:blip r:embed="rId12"/>
+          <a:blip r:embed="rId3"/>
           <a:stretch>
             <a:fillRect/>
           </a:stretch>
@@ -13940,7 +14727,7 @@
           <a:bodyPr wrap="square" lIns="0" tIns="0" rIns="0" bIns="0" rtlCol="0" anchor="ctr"/>
           <a:lstStyle/>
           <a:p>
-            <a:pPr algn="ctr" indent="0" marL="0">
+            <a:pPr marL="0" indent="0" algn="ctr">
               <a:buNone/>
             </a:pPr>
             <a:r>
@@ -13979,7 +14766,7 @@
           <a:bodyPr wrap="square" lIns="0" tIns="0" rIns="0" bIns="0" rtlCol="0" anchor="ctr"/>
           <a:lstStyle/>
           <a:p>
-            <a:pPr algn="ctr" indent="0" marL="0">
+            <a:pPr marL="0" indent="0" algn="ctr">
               <a:buNone/>
             </a:pPr>
             <a:r>
@@ -14021,6 +14808,13 @@
             <a:prstDash val="dash"/>
           </a:ln>
         </p:spPr>
+        <p:txBody>
+          <a:bodyPr/>
+          <a:lstStyle/>
+          <a:p>
+            <a:endParaRPr lang="ja-JP" altLang="en-US"/>
+          </a:p>
+        </p:txBody>
       </p:sp>
       <p:sp>
         <p:nvSpPr>
@@ -14048,17 +14842,24 @@
             <a:prstDash val="solid"/>
           </a:ln>
         </p:spPr>
+        <p:txBody>
+          <a:bodyPr/>
+          <a:lstStyle/>
+          <a:p>
+            <a:endParaRPr lang="ja-JP" altLang="en-US"/>
+          </a:p>
+        </p:txBody>
       </p:sp>
       <p:pic>
         <p:nvPicPr>
-          <p:cNvPr id="40" name="Image 12" descr="/tmp/claude-0/-home-user-WeddingInvitations/2c9849ff-e4cc-5683-ac72-2a6c69aa5261/scratchpad/dress_icon.png">    </p:cNvPr>
+          <p:cNvPr id="40" name="Image 12" descr="/tmp/claude-0/-home-user-WeddingInvitations/2c9849ff-e4cc-5683-ac72-2a6c69aa5261/scratchpad/dress_icon.png"/>
           <p:cNvPicPr>
             <a:picLocks noChangeAspect="1"/>
           </p:cNvPicPr>
           <p:nvPr/>
         </p:nvPicPr>
         <p:blipFill>
-          <a:blip r:embed="rId13"/>
+          <a:blip r:embed="rId3"/>
           <a:stretch>
             <a:fillRect/>
           </a:stretch>
@@ -14075,14 +14876,14 @@
       </p:pic>
       <p:pic>
         <p:nvPicPr>
-          <p:cNvPr id="41" name="Image 13" descr="/tmp/claude-0/-home-user-WeddingInvitations/2c9849ff-e4cc-5683-ac72-2a6c69aa5261/scratchpad/dress_icon.png">    </p:cNvPr>
+          <p:cNvPr id="41" name="Image 13" descr="/tmp/claude-0/-home-user-WeddingInvitations/2c9849ff-e4cc-5683-ac72-2a6c69aa5261/scratchpad/dress_icon.png"/>
           <p:cNvPicPr>
             <a:picLocks noChangeAspect="1"/>
           </p:cNvPicPr>
           <p:nvPr/>
         </p:nvPicPr>
         <p:blipFill>
-          <a:blip r:embed="rId14"/>
+          <a:blip r:embed="rId3"/>
           <a:stretch>
             <a:fillRect/>
           </a:stretch>
@@ -14118,7 +14919,7 @@
           <a:bodyPr wrap="square" lIns="0" tIns="0" rIns="0" bIns="0" rtlCol="0" anchor="ctr"/>
           <a:lstStyle/>
           <a:p>
-            <a:pPr algn="ctr" indent="0" marL="0">
+            <a:pPr marL="0" indent="0" algn="ctr">
               <a:buNone/>
             </a:pPr>
             <a:r>
@@ -14157,9 +14958,20 @@
           <a:bodyPr wrap="square" lIns="0" tIns="0" rIns="0" bIns="0" rtlCol="0" anchor="ctr"/>
           <a:lstStyle/>
           <a:p>
-            <a:pPr algn="ctr" indent="0" marL="0">
+            <a:pPr marL="0" indent="0" algn="ctr">
               <a:buNone/>
             </a:pPr>
+            <a:r>
+              <a:rPr lang="ja-JP" altLang="en-US" sz="2200" b="1" dirty="0">
+                <a:solidFill>
+                  <a:srgbClr val="5A2D3E"/>
+                </a:solidFill>
+                <a:latin typeface="Yu Gothic" pitchFamily="34" charset="0"/>
+                <a:ea typeface="Yu Gothic" pitchFamily="34" charset="-122"/>
+                <a:cs typeface="Yu Gothic" pitchFamily="34" charset="-120"/>
+              </a:rPr>
+              <a:t>渡邉</a:t>
+            </a:r>
             <a:r>
               <a:rPr lang="en-US" sz="2200" b="1" dirty="0">
                 <a:solidFill>
@@ -14169,7 +14981,7 @@
                 <a:ea typeface="Yu Gothic" pitchFamily="34" charset="-122"/>
                 <a:cs typeface="Yu Gothic" pitchFamily="34" charset="-120"/>
               </a:rPr>
-              <a:t>渡邊 雅之 様</a:t>
+              <a:t> 雅之 様</a:t>
             </a:r>
             <a:endParaRPr lang="en-US" sz="2200" dirty="0"/>
           </a:p>
@@ -14199,6 +15011,13 @@
             <a:prstDash val="dash"/>
           </a:ln>
         </p:spPr>
+        <p:txBody>
+          <a:bodyPr/>
+          <a:lstStyle/>
+          <a:p>
+            <a:endParaRPr lang="ja-JP" altLang="en-US"/>
+          </a:p>
+        </p:txBody>
       </p:sp>
       <p:sp>
         <p:nvSpPr>
@@ -14226,17 +15045,24 @@
             <a:prstDash val="solid"/>
           </a:ln>
         </p:spPr>
+        <p:txBody>
+          <a:bodyPr/>
+          <a:lstStyle/>
+          <a:p>
+            <a:endParaRPr lang="ja-JP" altLang="en-US"/>
+          </a:p>
+        </p:txBody>
       </p:sp>
       <p:pic>
         <p:nvPicPr>
-          <p:cNvPr id="46" name="Image 14" descr="/tmp/claude-0/-home-user-WeddingInvitations/2c9849ff-e4cc-5683-ac72-2a6c69aa5261/scratchpad/dress_icon.png">    </p:cNvPr>
+          <p:cNvPr id="46" name="Image 14" descr="/tmp/claude-0/-home-user-WeddingInvitations/2c9849ff-e4cc-5683-ac72-2a6c69aa5261/scratchpad/dress_icon.png"/>
           <p:cNvPicPr>
             <a:picLocks noChangeAspect="1"/>
           </p:cNvPicPr>
           <p:nvPr/>
         </p:nvPicPr>
         <p:blipFill>
-          <a:blip r:embed="rId15"/>
+          <a:blip r:embed="rId3"/>
           <a:stretch>
             <a:fillRect/>
           </a:stretch>
@@ -14253,14 +15079,14 @@
       </p:pic>
       <p:pic>
         <p:nvPicPr>
-          <p:cNvPr id="47" name="Image 15" descr="/tmp/claude-0/-home-user-WeddingInvitations/2c9849ff-e4cc-5683-ac72-2a6c69aa5261/scratchpad/dress_icon.png">    </p:cNvPr>
+          <p:cNvPr id="47" name="Image 15" descr="/tmp/claude-0/-home-user-WeddingInvitations/2c9849ff-e4cc-5683-ac72-2a6c69aa5261/scratchpad/dress_icon.png"/>
           <p:cNvPicPr>
             <a:picLocks noChangeAspect="1"/>
           </p:cNvPicPr>
           <p:nvPr/>
         </p:nvPicPr>
         <p:blipFill>
-          <a:blip r:embed="rId16"/>
+          <a:blip r:embed="rId3"/>
           <a:stretch>
             <a:fillRect/>
           </a:stretch>
@@ -14296,7 +15122,7 @@
           <a:bodyPr wrap="square" lIns="0" tIns="0" rIns="0" bIns="0" rtlCol="0" anchor="ctr"/>
           <a:lstStyle/>
           <a:p>
-            <a:pPr algn="ctr" indent="0" marL="0">
+            <a:pPr marL="0" indent="0" algn="ctr">
               <a:buNone/>
             </a:pPr>
             <a:r>
@@ -14335,7 +15161,7 @@
           <a:bodyPr wrap="square" lIns="0" tIns="0" rIns="0" bIns="0" rtlCol="0" anchor="ctr"/>
           <a:lstStyle/>
           <a:p>
-            <a:pPr algn="ctr" indent="0" marL="0">
+            <a:pPr marL="0" indent="0" algn="ctr">
               <a:buNone/>
             </a:pPr>
             <a:r>
@@ -14377,6 +15203,13 @@
             <a:prstDash val="dash"/>
           </a:ln>
         </p:spPr>
+        <p:txBody>
+          <a:bodyPr/>
+          <a:lstStyle/>
+          <a:p>
+            <a:endParaRPr lang="ja-JP" altLang="en-US"/>
+          </a:p>
+        </p:txBody>
       </p:sp>
       <p:sp>
         <p:nvSpPr>
@@ -14404,17 +15237,24 @@
             <a:prstDash val="solid"/>
           </a:ln>
         </p:spPr>
+        <p:txBody>
+          <a:bodyPr/>
+          <a:lstStyle/>
+          <a:p>
+            <a:endParaRPr lang="ja-JP" altLang="en-US"/>
+          </a:p>
+        </p:txBody>
       </p:sp>
       <p:pic>
         <p:nvPicPr>
-          <p:cNvPr id="52" name="Image 16" descr="/tmp/claude-0/-home-user-WeddingInvitations/2c9849ff-e4cc-5683-ac72-2a6c69aa5261/scratchpad/dress_icon.png">    </p:cNvPr>
+          <p:cNvPr id="52" name="Image 16" descr="/tmp/claude-0/-home-user-WeddingInvitations/2c9849ff-e4cc-5683-ac72-2a6c69aa5261/scratchpad/dress_icon.png"/>
           <p:cNvPicPr>
             <a:picLocks noChangeAspect="1"/>
           </p:cNvPicPr>
           <p:nvPr/>
         </p:nvPicPr>
         <p:blipFill>
-          <a:blip r:embed="rId17"/>
+          <a:blip r:embed="rId3"/>
           <a:stretch>
             <a:fillRect/>
           </a:stretch>
@@ -14431,14 +15271,14 @@
       </p:pic>
       <p:pic>
         <p:nvPicPr>
-          <p:cNvPr id="53" name="Image 17" descr="/tmp/claude-0/-home-user-WeddingInvitations/2c9849ff-e4cc-5683-ac72-2a6c69aa5261/scratchpad/dress_icon.png">    </p:cNvPr>
+          <p:cNvPr id="53" name="Image 17" descr="/tmp/claude-0/-home-user-WeddingInvitations/2c9849ff-e4cc-5683-ac72-2a6c69aa5261/scratchpad/dress_icon.png"/>
           <p:cNvPicPr>
             <a:picLocks noChangeAspect="1"/>
           </p:cNvPicPr>
           <p:nvPr/>
         </p:nvPicPr>
         <p:blipFill>
-          <a:blip r:embed="rId18"/>
+          <a:blip r:embed="rId3"/>
           <a:stretch>
             <a:fillRect/>
           </a:stretch>
@@ -14474,7 +15314,7 @@
           <a:bodyPr wrap="square" lIns="0" tIns="0" rIns="0" bIns="0" rtlCol="0" anchor="ctr"/>
           <a:lstStyle/>
           <a:p>
-            <a:pPr algn="ctr" indent="0" marL="0">
+            <a:pPr marL="0" indent="0" algn="ctr">
               <a:buNone/>
             </a:pPr>
             <a:r>
@@ -14513,7 +15353,7 @@
           <a:bodyPr wrap="square" lIns="0" tIns="0" rIns="0" bIns="0" rtlCol="0" anchor="ctr"/>
           <a:lstStyle/>
           <a:p>
-            <a:pPr algn="ctr" indent="0" marL="0">
+            <a:pPr marL="0" indent="0" algn="ctr">
               <a:buNone/>
             </a:pPr>
             <a:r>
@@ -14555,6 +15395,13 @@
             <a:prstDash val="dash"/>
           </a:ln>
         </p:spPr>
+        <p:txBody>
+          <a:bodyPr/>
+          <a:lstStyle/>
+          <a:p>
+            <a:endParaRPr lang="ja-JP" altLang="en-US"/>
+          </a:p>
+        </p:txBody>
       </p:sp>
       <p:sp>
         <p:nvSpPr>
@@ -14582,17 +15429,24 @@
             <a:prstDash val="solid"/>
           </a:ln>
         </p:spPr>
+        <p:txBody>
+          <a:bodyPr/>
+          <a:lstStyle/>
+          <a:p>
+            <a:endParaRPr lang="ja-JP" altLang="en-US"/>
+          </a:p>
+        </p:txBody>
       </p:sp>
       <p:pic>
         <p:nvPicPr>
-          <p:cNvPr id="58" name="Image 18" descr="/tmp/claude-0/-home-user-WeddingInvitations/2c9849ff-e4cc-5683-ac72-2a6c69aa5261/scratchpad/dress_icon.png">    </p:cNvPr>
+          <p:cNvPr id="58" name="Image 18" descr="/tmp/claude-0/-home-user-WeddingInvitations/2c9849ff-e4cc-5683-ac72-2a6c69aa5261/scratchpad/dress_icon.png"/>
           <p:cNvPicPr>
             <a:picLocks noChangeAspect="1"/>
           </p:cNvPicPr>
           <p:nvPr/>
         </p:nvPicPr>
         <p:blipFill>
-          <a:blip r:embed="rId19"/>
+          <a:blip r:embed="rId3"/>
           <a:stretch>
             <a:fillRect/>
           </a:stretch>
@@ -14609,14 +15463,14 @@
       </p:pic>
       <p:pic>
         <p:nvPicPr>
-          <p:cNvPr id="59" name="Image 19" descr="/tmp/claude-0/-home-user-WeddingInvitations/2c9849ff-e4cc-5683-ac72-2a6c69aa5261/scratchpad/dress_icon.png">    </p:cNvPr>
+          <p:cNvPr id="59" name="Image 19" descr="/tmp/claude-0/-home-user-WeddingInvitations/2c9849ff-e4cc-5683-ac72-2a6c69aa5261/scratchpad/dress_icon.png"/>
           <p:cNvPicPr>
             <a:picLocks noChangeAspect="1"/>
           </p:cNvPicPr>
           <p:nvPr/>
         </p:nvPicPr>
         <p:blipFill>
-          <a:blip r:embed="rId20"/>
+          <a:blip r:embed="rId3"/>
           <a:stretch>
             <a:fillRect/>
           </a:stretch>
@@ -14652,7 +15506,7 @@
           <a:bodyPr wrap="square" lIns="0" tIns="0" rIns="0" bIns="0" rtlCol="0" anchor="ctr"/>
           <a:lstStyle/>
           <a:p>
-            <a:pPr algn="ctr" indent="0" marL="0">
+            <a:pPr marL="0" indent="0" algn="ctr">
               <a:buNone/>
             </a:pPr>
             <a:r>
@@ -14691,7 +15545,7 @@
           <a:bodyPr wrap="square" lIns="0" tIns="0" rIns="0" bIns="0" rtlCol="0" anchor="ctr"/>
           <a:lstStyle/>
           <a:p>
-            <a:pPr algn="ctr" indent="0" marL="0">
+            <a:pPr marL="0" indent="0" algn="ctr">
               <a:buNone/>
             </a:pPr>
             <a:r>
@@ -14733,6 +15587,13 @@
             <a:prstDash val="dash"/>
           </a:ln>
         </p:spPr>
+        <p:txBody>
+          <a:bodyPr/>
+          <a:lstStyle/>
+          <a:p>
+            <a:endParaRPr lang="ja-JP" altLang="en-US"/>
+          </a:p>
+        </p:txBody>
       </p:sp>
       <p:sp>
         <p:nvSpPr>
@@ -14760,17 +15621,24 @@
             <a:prstDash val="solid"/>
           </a:ln>
         </p:spPr>
+        <p:txBody>
+          <a:bodyPr/>
+          <a:lstStyle/>
+          <a:p>
+            <a:endParaRPr lang="ja-JP" altLang="en-US"/>
+          </a:p>
+        </p:txBody>
       </p:sp>
       <p:pic>
         <p:nvPicPr>
-          <p:cNvPr id="64" name="Image 20" descr="/tmp/claude-0/-home-user-WeddingInvitations/2c9849ff-e4cc-5683-ac72-2a6c69aa5261/scratchpad/dress_icon.png">    </p:cNvPr>
+          <p:cNvPr id="64" name="Image 20" descr="/tmp/claude-0/-home-user-WeddingInvitations/2c9849ff-e4cc-5683-ac72-2a6c69aa5261/scratchpad/dress_icon.png"/>
           <p:cNvPicPr>
             <a:picLocks noChangeAspect="1"/>
           </p:cNvPicPr>
           <p:nvPr/>
         </p:nvPicPr>
         <p:blipFill>
-          <a:blip r:embed="rId21"/>
+          <a:blip r:embed="rId3"/>
           <a:stretch>
             <a:fillRect/>
           </a:stretch>
@@ -14787,14 +15655,14 @@
       </p:pic>
       <p:pic>
         <p:nvPicPr>
-          <p:cNvPr id="65" name="Image 21" descr="/tmp/claude-0/-home-user-WeddingInvitations/2c9849ff-e4cc-5683-ac72-2a6c69aa5261/scratchpad/dress_icon.png">    </p:cNvPr>
+          <p:cNvPr id="65" name="Image 21" descr="/tmp/claude-0/-home-user-WeddingInvitations/2c9849ff-e4cc-5683-ac72-2a6c69aa5261/scratchpad/dress_icon.png"/>
           <p:cNvPicPr>
             <a:picLocks noChangeAspect="1"/>
           </p:cNvPicPr>
           <p:nvPr/>
         </p:nvPicPr>
         <p:blipFill>
-          <a:blip r:embed="rId22"/>
+          <a:blip r:embed="rId3"/>
           <a:stretch>
             <a:fillRect/>
           </a:stretch>
@@ -14830,7 +15698,7 @@
           <a:bodyPr wrap="square" lIns="0" tIns="0" rIns="0" bIns="0" rtlCol="0" anchor="ctr"/>
           <a:lstStyle/>
           <a:p>
-            <a:pPr algn="ctr" indent="0" marL="0">
+            <a:pPr marL="0" indent="0" algn="ctr">
               <a:buNone/>
             </a:pPr>
             <a:r>
@@ -14869,7 +15737,7 @@
           <a:bodyPr wrap="square" lIns="0" tIns="0" rIns="0" bIns="0" rtlCol="0" anchor="ctr"/>
           <a:lstStyle/>
           <a:p>
-            <a:pPr algn="ctr" indent="0" marL="0">
+            <a:pPr marL="0" indent="0" algn="ctr">
               <a:buNone/>
             </a:pPr>
             <a:r>
@@ -14911,6 +15779,13 @@
             <a:prstDash val="dash"/>
           </a:ln>
         </p:spPr>
+        <p:txBody>
+          <a:bodyPr/>
+          <a:lstStyle/>
+          <a:p>
+            <a:endParaRPr lang="ja-JP" altLang="en-US"/>
+          </a:p>
+        </p:txBody>
       </p:sp>
       <p:sp>
         <p:nvSpPr>
@@ -14938,17 +15813,24 @@
             <a:prstDash val="solid"/>
           </a:ln>
         </p:spPr>
+        <p:txBody>
+          <a:bodyPr/>
+          <a:lstStyle/>
+          <a:p>
+            <a:endParaRPr lang="ja-JP" altLang="en-US"/>
+          </a:p>
+        </p:txBody>
       </p:sp>
       <p:pic>
         <p:nvPicPr>
-          <p:cNvPr id="70" name="Image 22" descr="/tmp/claude-0/-home-user-WeddingInvitations/2c9849ff-e4cc-5683-ac72-2a6c69aa5261/scratchpad/dress_icon.png">    </p:cNvPr>
+          <p:cNvPr id="70" name="Image 22" descr="/tmp/claude-0/-home-user-WeddingInvitations/2c9849ff-e4cc-5683-ac72-2a6c69aa5261/scratchpad/dress_icon.png"/>
           <p:cNvPicPr>
             <a:picLocks noChangeAspect="1"/>
           </p:cNvPicPr>
           <p:nvPr/>
         </p:nvPicPr>
         <p:blipFill>
-          <a:blip r:embed="rId23"/>
+          <a:blip r:embed="rId3"/>
           <a:stretch>
             <a:fillRect/>
           </a:stretch>
@@ -14965,14 +15847,14 @@
       </p:pic>
       <p:pic>
         <p:nvPicPr>
-          <p:cNvPr id="71" name="Image 23" descr="/tmp/claude-0/-home-user-WeddingInvitations/2c9849ff-e4cc-5683-ac72-2a6c69aa5261/scratchpad/dress_icon.png">    </p:cNvPr>
+          <p:cNvPr id="71" name="Image 23" descr="/tmp/claude-0/-home-user-WeddingInvitations/2c9849ff-e4cc-5683-ac72-2a6c69aa5261/scratchpad/dress_icon.png"/>
           <p:cNvPicPr>
             <a:picLocks noChangeAspect="1"/>
           </p:cNvPicPr>
           <p:nvPr/>
         </p:nvPicPr>
         <p:blipFill>
-          <a:blip r:embed="rId24"/>
+          <a:blip r:embed="rId3"/>
           <a:stretch>
             <a:fillRect/>
           </a:stretch>
@@ -15008,7 +15890,7 @@
           <a:bodyPr wrap="square" lIns="0" tIns="0" rIns="0" bIns="0" rtlCol="0" anchor="ctr"/>
           <a:lstStyle/>
           <a:p>
-            <a:pPr algn="ctr" indent="0" marL="0">
+            <a:pPr marL="0" indent="0" algn="ctr">
               <a:buNone/>
             </a:pPr>
             <a:r>
@@ -15047,7 +15929,7 @@
           <a:bodyPr wrap="square" lIns="0" tIns="0" rIns="0" bIns="0" rtlCol="0" anchor="ctr"/>
           <a:lstStyle/>
           <a:p>
-            <a:pPr algn="ctr" indent="0" marL="0">
+            <a:pPr marL="0" indent="0" algn="ctr">
               <a:buNone/>
             </a:pPr>
             <a:r>
@@ -15089,6 +15971,13 @@
             <a:prstDash val="dash"/>
           </a:ln>
         </p:spPr>
+        <p:txBody>
+          <a:bodyPr/>
+          <a:lstStyle/>
+          <a:p>
+            <a:endParaRPr lang="ja-JP" altLang="en-US"/>
+          </a:p>
+        </p:txBody>
       </p:sp>
       <p:sp>
         <p:nvSpPr>
@@ -15116,17 +16005,24 @@
             <a:prstDash val="solid"/>
           </a:ln>
         </p:spPr>
+        <p:txBody>
+          <a:bodyPr/>
+          <a:lstStyle/>
+          <a:p>
+            <a:endParaRPr lang="ja-JP" altLang="en-US"/>
+          </a:p>
+        </p:txBody>
       </p:sp>
       <p:pic>
         <p:nvPicPr>
-          <p:cNvPr id="76" name="Image 24" descr="/tmp/claude-0/-home-user-WeddingInvitations/2c9849ff-e4cc-5683-ac72-2a6c69aa5261/scratchpad/dress_icon.png">    </p:cNvPr>
+          <p:cNvPr id="76" name="Image 24" descr="/tmp/claude-0/-home-user-WeddingInvitations/2c9849ff-e4cc-5683-ac72-2a6c69aa5261/scratchpad/dress_icon.png"/>
           <p:cNvPicPr>
             <a:picLocks noChangeAspect="1"/>
           </p:cNvPicPr>
           <p:nvPr/>
         </p:nvPicPr>
         <p:blipFill>
-          <a:blip r:embed="rId25"/>
+          <a:blip r:embed="rId3"/>
           <a:stretch>
             <a:fillRect/>
           </a:stretch>
@@ -15143,14 +16039,14 @@
       </p:pic>
       <p:pic>
         <p:nvPicPr>
-          <p:cNvPr id="77" name="Image 25" descr="/tmp/claude-0/-home-user-WeddingInvitations/2c9849ff-e4cc-5683-ac72-2a6c69aa5261/scratchpad/dress_icon.png">    </p:cNvPr>
+          <p:cNvPr id="77" name="Image 25" descr="/tmp/claude-0/-home-user-WeddingInvitations/2c9849ff-e4cc-5683-ac72-2a6c69aa5261/scratchpad/dress_icon.png"/>
           <p:cNvPicPr>
             <a:picLocks noChangeAspect="1"/>
           </p:cNvPicPr>
           <p:nvPr/>
         </p:nvPicPr>
         <p:blipFill>
-          <a:blip r:embed="rId26"/>
+          <a:blip r:embed="rId3"/>
           <a:stretch>
             <a:fillRect/>
           </a:stretch>
@@ -15186,7 +16082,7 @@
           <a:bodyPr wrap="square" lIns="0" tIns="0" rIns="0" bIns="0" rtlCol="0" anchor="ctr"/>
           <a:lstStyle/>
           <a:p>
-            <a:pPr algn="ctr" indent="0" marL="0">
+            <a:pPr marL="0" indent="0" algn="ctr">
               <a:buNone/>
             </a:pPr>
             <a:r>
@@ -15225,7 +16121,7 @@
           <a:bodyPr wrap="square" lIns="0" tIns="0" rIns="0" bIns="0" rtlCol="0" anchor="ctr"/>
           <a:lstStyle/>
           <a:p>
-            <a:pPr algn="ctr" indent="0" marL="0">
+            <a:pPr marL="0" indent="0" algn="ctr">
               <a:buNone/>
             </a:pPr>
             <a:r>
@@ -15267,6 +16163,13 @@
             <a:prstDash val="dash"/>
           </a:ln>
         </p:spPr>
+        <p:txBody>
+          <a:bodyPr/>
+          <a:lstStyle/>
+          <a:p>
+            <a:endParaRPr lang="ja-JP" altLang="en-US"/>
+          </a:p>
+        </p:txBody>
       </p:sp>
       <p:sp>
         <p:nvSpPr>
@@ -15294,17 +16197,24 @@
             <a:prstDash val="solid"/>
           </a:ln>
         </p:spPr>
+        <p:txBody>
+          <a:bodyPr/>
+          <a:lstStyle/>
+          <a:p>
+            <a:endParaRPr lang="ja-JP" altLang="en-US"/>
+          </a:p>
+        </p:txBody>
       </p:sp>
       <p:pic>
         <p:nvPicPr>
-          <p:cNvPr id="82" name="Image 26" descr="/tmp/claude-0/-home-user-WeddingInvitations/2c9849ff-e4cc-5683-ac72-2a6c69aa5261/scratchpad/dress_icon.png">    </p:cNvPr>
+          <p:cNvPr id="82" name="Image 26" descr="/tmp/claude-0/-home-user-WeddingInvitations/2c9849ff-e4cc-5683-ac72-2a6c69aa5261/scratchpad/dress_icon.png"/>
           <p:cNvPicPr>
             <a:picLocks noChangeAspect="1"/>
           </p:cNvPicPr>
           <p:nvPr/>
         </p:nvPicPr>
         <p:blipFill>
-          <a:blip r:embed="rId27"/>
+          <a:blip r:embed="rId3"/>
           <a:stretch>
             <a:fillRect/>
           </a:stretch>
@@ -15321,14 +16231,14 @@
       </p:pic>
       <p:pic>
         <p:nvPicPr>
-          <p:cNvPr id="83" name="Image 27" descr="/tmp/claude-0/-home-user-WeddingInvitations/2c9849ff-e4cc-5683-ac72-2a6c69aa5261/scratchpad/dress_icon.png">    </p:cNvPr>
+          <p:cNvPr id="83" name="Image 27" descr="/tmp/claude-0/-home-user-WeddingInvitations/2c9849ff-e4cc-5683-ac72-2a6c69aa5261/scratchpad/dress_icon.png"/>
           <p:cNvPicPr>
             <a:picLocks noChangeAspect="1"/>
           </p:cNvPicPr>
           <p:nvPr/>
         </p:nvPicPr>
         <p:blipFill>
-          <a:blip r:embed="rId28"/>
+          <a:blip r:embed="rId3"/>
           <a:stretch>
             <a:fillRect/>
           </a:stretch>
@@ -15364,7 +16274,7 @@
           <a:bodyPr wrap="square" lIns="0" tIns="0" rIns="0" bIns="0" rtlCol="0" anchor="ctr"/>
           <a:lstStyle/>
           <a:p>
-            <a:pPr algn="ctr" indent="0" marL="0">
+            <a:pPr marL="0" indent="0" algn="ctr">
               <a:buNone/>
             </a:pPr>
             <a:r>
@@ -15403,7 +16313,7 @@
           <a:bodyPr wrap="square" lIns="0" tIns="0" rIns="0" bIns="0" rtlCol="0" anchor="ctr"/>
           <a:lstStyle/>
           <a:p>
-            <a:pPr algn="ctr" indent="0" marL="0">
+            <a:pPr marL="0" indent="0" algn="ctr">
               <a:buNone/>
             </a:pPr>
             <a:r>
@@ -15445,6 +16355,13 @@
             <a:prstDash val="dash"/>
           </a:ln>
         </p:spPr>
+        <p:txBody>
+          <a:bodyPr/>
+          <a:lstStyle/>
+          <a:p>
+            <a:endParaRPr lang="ja-JP" altLang="en-US"/>
+          </a:p>
+        </p:txBody>
       </p:sp>
       <p:sp>
         <p:nvSpPr>
@@ -15472,17 +16389,24 @@
             <a:prstDash val="solid"/>
           </a:ln>
         </p:spPr>
+        <p:txBody>
+          <a:bodyPr/>
+          <a:lstStyle/>
+          <a:p>
+            <a:endParaRPr lang="ja-JP" altLang="en-US"/>
+          </a:p>
+        </p:txBody>
       </p:sp>
       <p:pic>
         <p:nvPicPr>
-          <p:cNvPr id="88" name="Image 28" descr="/tmp/claude-0/-home-user-WeddingInvitations/2c9849ff-e4cc-5683-ac72-2a6c69aa5261/scratchpad/dress_icon.png">    </p:cNvPr>
+          <p:cNvPr id="88" name="Image 28" descr="/tmp/claude-0/-home-user-WeddingInvitations/2c9849ff-e4cc-5683-ac72-2a6c69aa5261/scratchpad/dress_icon.png"/>
           <p:cNvPicPr>
             <a:picLocks noChangeAspect="1"/>
           </p:cNvPicPr>
           <p:nvPr/>
         </p:nvPicPr>
         <p:blipFill>
-          <a:blip r:embed="rId29"/>
+          <a:blip r:embed="rId3"/>
           <a:stretch>
             <a:fillRect/>
           </a:stretch>
@@ -15499,14 +16423,14 @@
       </p:pic>
       <p:pic>
         <p:nvPicPr>
-          <p:cNvPr id="89" name="Image 29" descr="/tmp/claude-0/-home-user-WeddingInvitations/2c9849ff-e4cc-5683-ac72-2a6c69aa5261/scratchpad/dress_icon.png">    </p:cNvPr>
+          <p:cNvPr id="89" name="Image 29" descr="/tmp/claude-0/-home-user-WeddingInvitations/2c9849ff-e4cc-5683-ac72-2a6c69aa5261/scratchpad/dress_icon.png"/>
           <p:cNvPicPr>
             <a:picLocks noChangeAspect="1"/>
           </p:cNvPicPr>
           <p:nvPr/>
         </p:nvPicPr>
         <p:blipFill>
-          <a:blip r:embed="rId30"/>
+          <a:blip r:embed="rId3"/>
           <a:stretch>
             <a:fillRect/>
           </a:stretch>
@@ -15542,7 +16466,7 @@
           <a:bodyPr wrap="square" lIns="0" tIns="0" rIns="0" bIns="0" rtlCol="0" anchor="ctr"/>
           <a:lstStyle/>
           <a:p>
-            <a:pPr algn="ctr" indent="0" marL="0">
+            <a:pPr marL="0" indent="0" algn="ctr">
               <a:buNone/>
             </a:pPr>
             <a:r>
@@ -15581,7 +16505,7 @@
           <a:bodyPr wrap="square" lIns="0" tIns="0" rIns="0" bIns="0" rtlCol="0" anchor="ctr"/>
           <a:lstStyle/>
           <a:p>
-            <a:pPr algn="ctr" indent="0" marL="0">
+            <a:pPr marL="0" indent="0" algn="ctr">
               <a:buNone/>
             </a:pPr>
             <a:r>
@@ -15623,6 +16547,13 @@
             <a:prstDash val="dash"/>
           </a:ln>
         </p:spPr>
+        <p:txBody>
+          <a:bodyPr/>
+          <a:lstStyle/>
+          <a:p>
+            <a:endParaRPr lang="ja-JP" altLang="en-US"/>
+          </a:p>
+        </p:txBody>
       </p:sp>
       <p:sp>
         <p:nvSpPr>
@@ -15650,17 +16581,24 @@
             <a:prstDash val="solid"/>
           </a:ln>
         </p:spPr>
+        <p:txBody>
+          <a:bodyPr/>
+          <a:lstStyle/>
+          <a:p>
+            <a:endParaRPr lang="ja-JP" altLang="en-US"/>
+          </a:p>
+        </p:txBody>
       </p:sp>
       <p:pic>
         <p:nvPicPr>
-          <p:cNvPr id="94" name="Image 30" descr="/tmp/claude-0/-home-user-WeddingInvitations/2c9849ff-e4cc-5683-ac72-2a6c69aa5261/scratchpad/dress_icon.png">    </p:cNvPr>
+          <p:cNvPr id="94" name="Image 30" descr="/tmp/claude-0/-home-user-WeddingInvitations/2c9849ff-e4cc-5683-ac72-2a6c69aa5261/scratchpad/dress_icon.png"/>
           <p:cNvPicPr>
             <a:picLocks noChangeAspect="1"/>
           </p:cNvPicPr>
           <p:nvPr/>
         </p:nvPicPr>
         <p:blipFill>
-          <a:blip r:embed="rId31"/>
+          <a:blip r:embed="rId3"/>
           <a:stretch>
             <a:fillRect/>
           </a:stretch>
@@ -15677,14 +16615,14 @@
       </p:pic>
       <p:pic>
         <p:nvPicPr>
-          <p:cNvPr id="95" name="Image 31" descr="/tmp/claude-0/-home-user-WeddingInvitations/2c9849ff-e4cc-5683-ac72-2a6c69aa5261/scratchpad/dress_icon.png">    </p:cNvPr>
+          <p:cNvPr id="95" name="Image 31" descr="/tmp/claude-0/-home-user-WeddingInvitations/2c9849ff-e4cc-5683-ac72-2a6c69aa5261/scratchpad/dress_icon.png"/>
           <p:cNvPicPr>
             <a:picLocks noChangeAspect="1"/>
           </p:cNvPicPr>
           <p:nvPr/>
         </p:nvPicPr>
         <p:blipFill>
-          <a:blip r:embed="rId32"/>
+          <a:blip r:embed="rId3"/>
           <a:stretch>
             <a:fillRect/>
           </a:stretch>
@@ -15720,7 +16658,7 @@
           <a:bodyPr wrap="square" lIns="0" tIns="0" rIns="0" bIns="0" rtlCol="0" anchor="ctr"/>
           <a:lstStyle/>
           <a:p>
-            <a:pPr algn="ctr" indent="0" marL="0">
+            <a:pPr marL="0" indent="0" algn="ctr">
               <a:buNone/>
             </a:pPr>
             <a:r>
@@ -15759,7 +16697,7 @@
           <a:bodyPr wrap="square" lIns="0" tIns="0" rIns="0" bIns="0" rtlCol="0" anchor="ctr"/>
           <a:lstStyle/>
           <a:p>
-            <a:pPr algn="ctr" indent="0" marL="0">
+            <a:pPr marL="0" indent="0" algn="ctr">
               <a:buNone/>
             </a:pPr>
             <a:r>
@@ -15793,6 +16731,7 @@
         <a:solidFill>
           <a:srgbClr val="FFFFFF"/>
         </a:solidFill>
+        <a:effectLst/>
       </p:bgPr>
     </p:bg>
     <p:spTree>
@@ -15833,6 +16772,13 @@
             <a:prstDash val="dash"/>
           </a:ln>
         </p:spPr>
+        <p:txBody>
+          <a:bodyPr/>
+          <a:lstStyle/>
+          <a:p>
+            <a:endParaRPr lang="ja-JP" altLang="en-US"/>
+          </a:p>
+        </p:txBody>
       </p:sp>
       <p:sp>
         <p:nvSpPr>
@@ -15860,17 +16806,24 @@
             <a:prstDash val="solid"/>
           </a:ln>
         </p:spPr>
+        <p:txBody>
+          <a:bodyPr/>
+          <a:lstStyle/>
+          <a:p>
+            <a:endParaRPr lang="ja-JP" altLang="en-US"/>
+          </a:p>
+        </p:txBody>
       </p:sp>
       <p:pic>
         <p:nvPicPr>
-          <p:cNvPr id="4" name="Image 0" descr="/tmp/claude-0/-home-user-WeddingInvitations/2c9849ff-e4cc-5683-ac72-2a6c69aa5261/scratchpad/dress_icon.png">    </p:cNvPr>
+          <p:cNvPr id="4" name="Image 0" descr="/tmp/claude-0/-home-user-WeddingInvitations/2c9849ff-e4cc-5683-ac72-2a6c69aa5261/scratchpad/dress_icon.png"/>
           <p:cNvPicPr>
             <a:picLocks noChangeAspect="1"/>
           </p:cNvPicPr>
           <p:nvPr/>
         </p:nvPicPr>
         <p:blipFill>
-          <a:blip r:embed="rId1"/>
+          <a:blip r:embed="rId3"/>
           <a:stretch>
             <a:fillRect/>
           </a:stretch>
@@ -15887,14 +16840,14 @@
       </p:pic>
       <p:pic>
         <p:nvPicPr>
-          <p:cNvPr id="5" name="Image 1" descr="/tmp/claude-0/-home-user-WeddingInvitations/2c9849ff-e4cc-5683-ac72-2a6c69aa5261/scratchpad/dress_icon.png">    </p:cNvPr>
+          <p:cNvPr id="5" name="Image 1" descr="/tmp/claude-0/-home-user-WeddingInvitations/2c9849ff-e4cc-5683-ac72-2a6c69aa5261/scratchpad/dress_icon.png"/>
           <p:cNvPicPr>
             <a:picLocks noChangeAspect="1"/>
           </p:cNvPicPr>
           <p:nvPr/>
         </p:nvPicPr>
         <p:blipFill>
-          <a:blip r:embed="rId2"/>
+          <a:blip r:embed="rId3"/>
           <a:stretch>
             <a:fillRect/>
           </a:stretch>
@@ -15930,7 +16883,7 @@
           <a:bodyPr wrap="square" lIns="0" tIns="0" rIns="0" bIns="0" rtlCol="0" anchor="ctr"/>
           <a:lstStyle/>
           <a:p>
-            <a:pPr algn="ctr" indent="0" marL="0">
+            <a:pPr marL="0" indent="0" algn="ctr">
               <a:buNone/>
             </a:pPr>
             <a:r>
@@ -15969,7 +16922,7 @@
           <a:bodyPr wrap="square" lIns="0" tIns="0" rIns="0" bIns="0" rtlCol="0" anchor="ctr"/>
           <a:lstStyle/>
           <a:p>
-            <a:pPr algn="ctr" indent="0" marL="0">
+            <a:pPr marL="0" indent="0" algn="ctr">
               <a:buNone/>
             </a:pPr>
             <a:r>
@@ -16011,6 +16964,13 @@
             <a:prstDash val="dash"/>
           </a:ln>
         </p:spPr>
+        <p:txBody>
+          <a:bodyPr/>
+          <a:lstStyle/>
+          <a:p>
+            <a:endParaRPr lang="ja-JP" altLang="en-US"/>
+          </a:p>
+        </p:txBody>
       </p:sp>
       <p:sp>
         <p:nvSpPr>
@@ -16038,10 +16998,17 @@
             <a:prstDash val="solid"/>
           </a:ln>
         </p:spPr>
+        <p:txBody>
+          <a:bodyPr/>
+          <a:lstStyle/>
+          <a:p>
+            <a:endParaRPr lang="ja-JP" altLang="en-US"/>
+          </a:p>
+        </p:txBody>
       </p:sp>
       <p:pic>
         <p:nvPicPr>
-          <p:cNvPr id="10" name="Image 2" descr="/tmp/claude-0/-home-user-WeddingInvitations/2c9849ff-e4cc-5683-ac72-2a6c69aa5261/scratchpad/dress_icon.png">    </p:cNvPr>
+          <p:cNvPr id="10" name="Image 2" descr="/tmp/claude-0/-home-user-WeddingInvitations/2c9849ff-e4cc-5683-ac72-2a6c69aa5261/scratchpad/dress_icon.png"/>
           <p:cNvPicPr>
             <a:picLocks noChangeAspect="1"/>
           </p:cNvPicPr>
@@ -16065,14 +17032,14 @@
       </p:pic>
       <p:pic>
         <p:nvPicPr>
-          <p:cNvPr id="11" name="Image 3" descr="/tmp/claude-0/-home-user-WeddingInvitations/2c9849ff-e4cc-5683-ac72-2a6c69aa5261/scratchpad/dress_icon.png">    </p:cNvPr>
+          <p:cNvPr id="11" name="Image 3" descr="/tmp/claude-0/-home-user-WeddingInvitations/2c9849ff-e4cc-5683-ac72-2a6c69aa5261/scratchpad/dress_icon.png"/>
           <p:cNvPicPr>
             <a:picLocks noChangeAspect="1"/>
           </p:cNvPicPr>
           <p:nvPr/>
         </p:nvPicPr>
         <p:blipFill>
-          <a:blip r:embed="rId4"/>
+          <a:blip r:embed="rId3"/>
           <a:stretch>
             <a:fillRect/>
           </a:stretch>
@@ -16108,7 +17075,7 @@
           <a:bodyPr wrap="square" lIns="0" tIns="0" rIns="0" bIns="0" rtlCol="0" anchor="ctr"/>
           <a:lstStyle/>
           <a:p>
-            <a:pPr algn="ctr" indent="0" marL="0">
+            <a:pPr marL="0" indent="0" algn="ctr">
               <a:buNone/>
             </a:pPr>
             <a:r>
@@ -16147,7 +17114,7 @@
           <a:bodyPr wrap="square" lIns="0" tIns="0" rIns="0" bIns="0" rtlCol="0" anchor="ctr"/>
           <a:lstStyle/>
           <a:p>
-            <a:pPr algn="ctr" indent="0" marL="0">
+            <a:pPr marL="0" indent="0" algn="ctr">
               <a:buNone/>
             </a:pPr>
             <a:r>
@@ -16189,6 +17156,13 @@
             <a:prstDash val="dash"/>
           </a:ln>
         </p:spPr>
+        <p:txBody>
+          <a:bodyPr/>
+          <a:lstStyle/>
+          <a:p>
+            <a:endParaRPr lang="ja-JP" altLang="en-US"/>
+          </a:p>
+        </p:txBody>
       </p:sp>
       <p:sp>
         <p:nvSpPr>
@@ -16216,17 +17190,24 @@
             <a:prstDash val="solid"/>
           </a:ln>
         </p:spPr>
+        <p:txBody>
+          <a:bodyPr/>
+          <a:lstStyle/>
+          <a:p>
+            <a:endParaRPr lang="ja-JP" altLang="en-US"/>
+          </a:p>
+        </p:txBody>
       </p:sp>
       <p:pic>
         <p:nvPicPr>
-          <p:cNvPr id="16" name="Image 4" descr="/tmp/claude-0/-home-user-WeddingInvitations/2c9849ff-e4cc-5683-ac72-2a6c69aa5261/scratchpad/dress_icon.png">    </p:cNvPr>
+          <p:cNvPr id="16" name="Image 4" descr="/tmp/claude-0/-home-user-WeddingInvitations/2c9849ff-e4cc-5683-ac72-2a6c69aa5261/scratchpad/dress_icon.png"/>
           <p:cNvPicPr>
             <a:picLocks noChangeAspect="1"/>
           </p:cNvPicPr>
           <p:nvPr/>
         </p:nvPicPr>
         <p:blipFill>
-          <a:blip r:embed="rId5"/>
+          <a:blip r:embed="rId3"/>
           <a:stretch>
             <a:fillRect/>
           </a:stretch>
@@ -16243,14 +17224,14 @@
       </p:pic>
       <p:pic>
         <p:nvPicPr>
-          <p:cNvPr id="17" name="Image 5" descr="/tmp/claude-0/-home-user-WeddingInvitations/2c9849ff-e4cc-5683-ac72-2a6c69aa5261/scratchpad/dress_icon.png">    </p:cNvPr>
+          <p:cNvPr id="17" name="Image 5" descr="/tmp/claude-0/-home-user-WeddingInvitations/2c9849ff-e4cc-5683-ac72-2a6c69aa5261/scratchpad/dress_icon.png"/>
           <p:cNvPicPr>
             <a:picLocks noChangeAspect="1"/>
           </p:cNvPicPr>
           <p:nvPr/>
         </p:nvPicPr>
         <p:blipFill>
-          <a:blip r:embed="rId6"/>
+          <a:blip r:embed="rId3"/>
           <a:stretch>
             <a:fillRect/>
           </a:stretch>
@@ -16286,7 +17267,7 @@
           <a:bodyPr wrap="square" lIns="0" tIns="0" rIns="0" bIns="0" rtlCol="0" anchor="ctr"/>
           <a:lstStyle/>
           <a:p>
-            <a:pPr algn="ctr" indent="0" marL="0">
+            <a:pPr marL="0" indent="0" algn="ctr">
               <a:buNone/>
             </a:pPr>
             <a:r>
@@ -16325,7 +17306,7 @@
           <a:bodyPr wrap="square" lIns="0" tIns="0" rIns="0" bIns="0" rtlCol="0" anchor="ctr"/>
           <a:lstStyle/>
           <a:p>
-            <a:pPr algn="ctr" indent="0" marL="0">
+            <a:pPr marL="0" indent="0" algn="ctr">
               <a:buNone/>
             </a:pPr>
             <a:r>
@@ -16367,6 +17348,13 @@
             <a:prstDash val="dash"/>
           </a:ln>
         </p:spPr>
+        <p:txBody>
+          <a:bodyPr/>
+          <a:lstStyle/>
+          <a:p>
+            <a:endParaRPr lang="ja-JP" altLang="en-US"/>
+          </a:p>
+        </p:txBody>
       </p:sp>
       <p:sp>
         <p:nvSpPr>
@@ -16394,17 +17382,24 @@
             <a:prstDash val="solid"/>
           </a:ln>
         </p:spPr>
+        <p:txBody>
+          <a:bodyPr/>
+          <a:lstStyle/>
+          <a:p>
+            <a:endParaRPr lang="ja-JP" altLang="en-US"/>
+          </a:p>
+        </p:txBody>
       </p:sp>
       <p:pic>
         <p:nvPicPr>
-          <p:cNvPr id="22" name="Image 6" descr="/tmp/claude-0/-home-user-WeddingInvitations/2c9849ff-e4cc-5683-ac72-2a6c69aa5261/scratchpad/dress_icon.png">    </p:cNvPr>
+          <p:cNvPr id="22" name="Image 6" descr="/tmp/claude-0/-home-user-WeddingInvitations/2c9849ff-e4cc-5683-ac72-2a6c69aa5261/scratchpad/dress_icon.png"/>
           <p:cNvPicPr>
             <a:picLocks noChangeAspect="1"/>
           </p:cNvPicPr>
           <p:nvPr/>
         </p:nvPicPr>
         <p:blipFill>
-          <a:blip r:embed="rId7"/>
+          <a:blip r:embed="rId3"/>
           <a:stretch>
             <a:fillRect/>
           </a:stretch>
@@ -16421,14 +17416,14 @@
       </p:pic>
       <p:pic>
         <p:nvPicPr>
-          <p:cNvPr id="23" name="Image 7" descr="/tmp/claude-0/-home-user-WeddingInvitations/2c9849ff-e4cc-5683-ac72-2a6c69aa5261/scratchpad/dress_icon.png">    </p:cNvPr>
+          <p:cNvPr id="23" name="Image 7" descr="/tmp/claude-0/-home-user-WeddingInvitations/2c9849ff-e4cc-5683-ac72-2a6c69aa5261/scratchpad/dress_icon.png"/>
           <p:cNvPicPr>
             <a:picLocks noChangeAspect="1"/>
           </p:cNvPicPr>
           <p:nvPr/>
         </p:nvPicPr>
         <p:blipFill>
-          <a:blip r:embed="rId8"/>
+          <a:blip r:embed="rId3"/>
           <a:stretch>
             <a:fillRect/>
           </a:stretch>
@@ -16464,7 +17459,7 @@
           <a:bodyPr wrap="square" lIns="0" tIns="0" rIns="0" bIns="0" rtlCol="0" anchor="ctr"/>
           <a:lstStyle/>
           <a:p>
-            <a:pPr algn="ctr" indent="0" marL="0">
+            <a:pPr marL="0" indent="0" algn="ctr">
               <a:buNone/>
             </a:pPr>
             <a:r>
@@ -16503,7 +17498,7 @@
           <a:bodyPr wrap="square" lIns="0" tIns="0" rIns="0" bIns="0" rtlCol="0" anchor="ctr"/>
           <a:lstStyle/>
           <a:p>
-            <a:pPr algn="ctr" indent="0" marL="0">
+            <a:pPr marL="0" indent="0" algn="ctr">
               <a:buNone/>
             </a:pPr>
             <a:r>
@@ -16545,6 +17540,13 @@
             <a:prstDash val="dash"/>
           </a:ln>
         </p:spPr>
+        <p:txBody>
+          <a:bodyPr/>
+          <a:lstStyle/>
+          <a:p>
+            <a:endParaRPr lang="ja-JP" altLang="en-US"/>
+          </a:p>
+        </p:txBody>
       </p:sp>
       <p:sp>
         <p:nvSpPr>
@@ -16572,17 +17574,24 @@
             <a:prstDash val="solid"/>
           </a:ln>
         </p:spPr>
+        <p:txBody>
+          <a:bodyPr/>
+          <a:lstStyle/>
+          <a:p>
+            <a:endParaRPr lang="ja-JP" altLang="en-US"/>
+          </a:p>
+        </p:txBody>
       </p:sp>
       <p:pic>
         <p:nvPicPr>
-          <p:cNvPr id="28" name="Image 8" descr="/tmp/claude-0/-home-user-WeddingInvitations/2c9849ff-e4cc-5683-ac72-2a6c69aa5261/scratchpad/dress_icon.png">    </p:cNvPr>
+          <p:cNvPr id="28" name="Image 8" descr="/tmp/claude-0/-home-user-WeddingInvitations/2c9849ff-e4cc-5683-ac72-2a6c69aa5261/scratchpad/dress_icon.png"/>
           <p:cNvPicPr>
             <a:picLocks noChangeAspect="1"/>
           </p:cNvPicPr>
           <p:nvPr/>
         </p:nvPicPr>
         <p:blipFill>
-          <a:blip r:embed="rId9"/>
+          <a:blip r:embed="rId3"/>
           <a:stretch>
             <a:fillRect/>
           </a:stretch>
@@ -16599,14 +17608,14 @@
       </p:pic>
       <p:pic>
         <p:nvPicPr>
-          <p:cNvPr id="29" name="Image 9" descr="/tmp/claude-0/-home-user-WeddingInvitations/2c9849ff-e4cc-5683-ac72-2a6c69aa5261/scratchpad/dress_icon.png">    </p:cNvPr>
+          <p:cNvPr id="29" name="Image 9" descr="/tmp/claude-0/-home-user-WeddingInvitations/2c9849ff-e4cc-5683-ac72-2a6c69aa5261/scratchpad/dress_icon.png"/>
           <p:cNvPicPr>
             <a:picLocks noChangeAspect="1"/>
           </p:cNvPicPr>
           <p:nvPr/>
         </p:nvPicPr>
         <p:blipFill>
-          <a:blip r:embed="rId10"/>
+          <a:blip r:embed="rId3"/>
           <a:stretch>
             <a:fillRect/>
           </a:stretch>
@@ -16642,7 +17651,7 @@
           <a:bodyPr wrap="square" lIns="0" tIns="0" rIns="0" bIns="0" rtlCol="0" anchor="ctr"/>
           <a:lstStyle/>
           <a:p>
-            <a:pPr algn="ctr" indent="0" marL="0">
+            <a:pPr marL="0" indent="0" algn="ctr">
               <a:buNone/>
             </a:pPr>
             <a:r>
@@ -16681,7 +17690,7 @@
           <a:bodyPr wrap="square" lIns="0" tIns="0" rIns="0" bIns="0" rtlCol="0" anchor="ctr"/>
           <a:lstStyle/>
           <a:p>
-            <a:pPr algn="ctr" indent="0" marL="0">
+            <a:pPr marL="0" indent="0" algn="ctr">
               <a:buNone/>
             </a:pPr>
             <a:r>
@@ -16723,6 +17732,13 @@
             <a:prstDash val="dash"/>
           </a:ln>
         </p:spPr>
+        <p:txBody>
+          <a:bodyPr/>
+          <a:lstStyle/>
+          <a:p>
+            <a:endParaRPr lang="ja-JP" altLang="en-US"/>
+          </a:p>
+        </p:txBody>
       </p:sp>
       <p:sp>
         <p:nvSpPr>
@@ -16750,17 +17766,24 @@
             <a:prstDash val="solid"/>
           </a:ln>
         </p:spPr>
+        <p:txBody>
+          <a:bodyPr/>
+          <a:lstStyle/>
+          <a:p>
+            <a:endParaRPr lang="ja-JP" altLang="en-US"/>
+          </a:p>
+        </p:txBody>
       </p:sp>
       <p:pic>
         <p:nvPicPr>
-          <p:cNvPr id="34" name="Image 10" descr="/tmp/claude-0/-home-user-WeddingInvitations/2c9849ff-e4cc-5683-ac72-2a6c69aa5261/scratchpad/dress_icon.png">    </p:cNvPr>
+          <p:cNvPr id="34" name="Image 10" descr="/tmp/claude-0/-home-user-WeddingInvitations/2c9849ff-e4cc-5683-ac72-2a6c69aa5261/scratchpad/dress_icon.png"/>
           <p:cNvPicPr>
             <a:picLocks noChangeAspect="1"/>
           </p:cNvPicPr>
           <p:nvPr/>
         </p:nvPicPr>
         <p:blipFill>
-          <a:blip r:embed="rId11"/>
+          <a:blip r:embed="rId3"/>
           <a:stretch>
             <a:fillRect/>
           </a:stretch>
@@ -16777,14 +17800,14 @@
       </p:pic>
       <p:pic>
         <p:nvPicPr>
-          <p:cNvPr id="35" name="Image 11" descr="/tmp/claude-0/-home-user-WeddingInvitations/2c9849ff-e4cc-5683-ac72-2a6c69aa5261/scratchpad/dress_icon.png">    </p:cNvPr>
+          <p:cNvPr id="35" name="Image 11" descr="/tmp/claude-0/-home-user-WeddingInvitations/2c9849ff-e4cc-5683-ac72-2a6c69aa5261/scratchpad/dress_icon.png"/>
           <p:cNvPicPr>
             <a:picLocks noChangeAspect="1"/>
           </p:cNvPicPr>
           <p:nvPr/>
         </p:nvPicPr>
         <p:blipFill>
-          <a:blip r:embed="rId12"/>
+          <a:blip r:embed="rId3"/>
           <a:stretch>
             <a:fillRect/>
           </a:stretch>
@@ -16820,7 +17843,7 @@
           <a:bodyPr wrap="square" lIns="0" tIns="0" rIns="0" bIns="0" rtlCol="0" anchor="ctr"/>
           <a:lstStyle/>
           <a:p>
-            <a:pPr algn="ctr" indent="0" marL="0">
+            <a:pPr marL="0" indent="0" algn="ctr">
               <a:buNone/>
             </a:pPr>
             <a:r>
@@ -16859,7 +17882,7 @@
           <a:bodyPr wrap="square" lIns="0" tIns="0" rIns="0" bIns="0" rtlCol="0" anchor="ctr"/>
           <a:lstStyle/>
           <a:p>
-            <a:pPr algn="ctr" indent="0" marL="0">
+            <a:pPr marL="0" indent="0" algn="ctr">
               <a:buNone/>
             </a:pPr>
             <a:r>
@@ -16901,6 +17924,13 @@
             <a:prstDash val="dash"/>
           </a:ln>
         </p:spPr>
+        <p:txBody>
+          <a:bodyPr/>
+          <a:lstStyle/>
+          <a:p>
+            <a:endParaRPr lang="ja-JP" altLang="en-US"/>
+          </a:p>
+        </p:txBody>
       </p:sp>
       <p:sp>
         <p:nvSpPr>
@@ -16928,17 +17958,24 @@
             <a:prstDash val="solid"/>
           </a:ln>
         </p:spPr>
+        <p:txBody>
+          <a:bodyPr/>
+          <a:lstStyle/>
+          <a:p>
+            <a:endParaRPr lang="ja-JP" altLang="en-US"/>
+          </a:p>
+        </p:txBody>
       </p:sp>
       <p:pic>
         <p:nvPicPr>
-          <p:cNvPr id="40" name="Image 12" descr="/tmp/claude-0/-home-user-WeddingInvitations/2c9849ff-e4cc-5683-ac72-2a6c69aa5261/scratchpad/dress_icon.png">    </p:cNvPr>
+          <p:cNvPr id="40" name="Image 12" descr="/tmp/claude-0/-home-user-WeddingInvitations/2c9849ff-e4cc-5683-ac72-2a6c69aa5261/scratchpad/dress_icon.png"/>
           <p:cNvPicPr>
             <a:picLocks noChangeAspect="1"/>
           </p:cNvPicPr>
           <p:nvPr/>
         </p:nvPicPr>
         <p:blipFill>
-          <a:blip r:embed="rId13"/>
+          <a:blip r:embed="rId3"/>
           <a:stretch>
             <a:fillRect/>
           </a:stretch>
@@ -16955,14 +17992,14 @@
       </p:pic>
       <p:pic>
         <p:nvPicPr>
-          <p:cNvPr id="41" name="Image 13" descr="/tmp/claude-0/-home-user-WeddingInvitations/2c9849ff-e4cc-5683-ac72-2a6c69aa5261/scratchpad/dress_icon.png">    </p:cNvPr>
+          <p:cNvPr id="41" name="Image 13" descr="/tmp/claude-0/-home-user-WeddingInvitations/2c9849ff-e4cc-5683-ac72-2a6c69aa5261/scratchpad/dress_icon.png"/>
           <p:cNvPicPr>
             <a:picLocks noChangeAspect="1"/>
           </p:cNvPicPr>
           <p:nvPr/>
         </p:nvPicPr>
         <p:blipFill>
-          <a:blip r:embed="rId14"/>
+          <a:blip r:embed="rId3"/>
           <a:stretch>
             <a:fillRect/>
           </a:stretch>
@@ -16998,7 +18035,7 @@
           <a:bodyPr wrap="square" lIns="0" tIns="0" rIns="0" bIns="0" rtlCol="0" anchor="ctr"/>
           <a:lstStyle/>
           <a:p>
-            <a:pPr algn="ctr" indent="0" marL="0">
+            <a:pPr marL="0" indent="0" algn="ctr">
               <a:buNone/>
             </a:pPr>
             <a:r>
@@ -17037,7 +18074,7 @@
           <a:bodyPr wrap="square" lIns="0" tIns="0" rIns="0" bIns="0" rtlCol="0" anchor="ctr"/>
           <a:lstStyle/>
           <a:p>
-            <a:pPr algn="ctr" indent="0" marL="0">
+            <a:pPr marL="0" indent="0" algn="ctr">
               <a:buNone/>
             </a:pPr>
             <a:r>
@@ -17079,6 +18116,13 @@
             <a:prstDash val="dash"/>
           </a:ln>
         </p:spPr>
+        <p:txBody>
+          <a:bodyPr/>
+          <a:lstStyle/>
+          <a:p>
+            <a:endParaRPr lang="ja-JP" altLang="en-US"/>
+          </a:p>
+        </p:txBody>
       </p:sp>
       <p:sp>
         <p:nvSpPr>
@@ -17106,17 +18150,24 @@
             <a:prstDash val="solid"/>
           </a:ln>
         </p:spPr>
+        <p:txBody>
+          <a:bodyPr/>
+          <a:lstStyle/>
+          <a:p>
+            <a:endParaRPr lang="ja-JP" altLang="en-US"/>
+          </a:p>
+        </p:txBody>
       </p:sp>
       <p:pic>
         <p:nvPicPr>
-          <p:cNvPr id="46" name="Image 14" descr="/tmp/claude-0/-home-user-WeddingInvitations/2c9849ff-e4cc-5683-ac72-2a6c69aa5261/scratchpad/dress_icon.png">    </p:cNvPr>
+          <p:cNvPr id="46" name="Image 14" descr="/tmp/claude-0/-home-user-WeddingInvitations/2c9849ff-e4cc-5683-ac72-2a6c69aa5261/scratchpad/dress_icon.png"/>
           <p:cNvPicPr>
             <a:picLocks noChangeAspect="1"/>
           </p:cNvPicPr>
           <p:nvPr/>
         </p:nvPicPr>
         <p:blipFill>
-          <a:blip r:embed="rId15"/>
+          <a:blip r:embed="rId3"/>
           <a:stretch>
             <a:fillRect/>
           </a:stretch>
@@ -17133,14 +18184,14 @@
       </p:pic>
       <p:pic>
         <p:nvPicPr>
-          <p:cNvPr id="47" name="Image 15" descr="/tmp/claude-0/-home-user-WeddingInvitations/2c9849ff-e4cc-5683-ac72-2a6c69aa5261/scratchpad/dress_icon.png">    </p:cNvPr>
+          <p:cNvPr id="47" name="Image 15" descr="/tmp/claude-0/-home-user-WeddingInvitations/2c9849ff-e4cc-5683-ac72-2a6c69aa5261/scratchpad/dress_icon.png"/>
           <p:cNvPicPr>
             <a:picLocks noChangeAspect="1"/>
           </p:cNvPicPr>
           <p:nvPr/>
         </p:nvPicPr>
         <p:blipFill>
-          <a:blip r:embed="rId16"/>
+          <a:blip r:embed="rId3"/>
           <a:stretch>
             <a:fillRect/>
           </a:stretch>
@@ -17176,7 +18227,7 @@
           <a:bodyPr wrap="square" lIns="0" tIns="0" rIns="0" bIns="0" rtlCol="0" anchor="ctr"/>
           <a:lstStyle/>
           <a:p>
-            <a:pPr algn="ctr" indent="0" marL="0">
+            <a:pPr marL="0" indent="0" algn="ctr">
               <a:buNone/>
             </a:pPr>
             <a:r>
@@ -17215,7 +18266,7 @@
           <a:bodyPr wrap="square" lIns="0" tIns="0" rIns="0" bIns="0" rtlCol="0" anchor="ctr"/>
           <a:lstStyle/>
           <a:p>
-            <a:pPr algn="ctr" indent="0" marL="0">
+            <a:pPr marL="0" indent="0" algn="ctr">
               <a:buNone/>
             </a:pPr>
             <a:r>
@@ -17257,6 +18308,13 @@
             <a:prstDash val="dash"/>
           </a:ln>
         </p:spPr>
+        <p:txBody>
+          <a:bodyPr/>
+          <a:lstStyle/>
+          <a:p>
+            <a:endParaRPr lang="ja-JP" altLang="en-US"/>
+          </a:p>
+        </p:txBody>
       </p:sp>
       <p:sp>
         <p:nvSpPr>
@@ -17284,17 +18342,24 @@
             <a:prstDash val="solid"/>
           </a:ln>
         </p:spPr>
+        <p:txBody>
+          <a:bodyPr/>
+          <a:lstStyle/>
+          <a:p>
+            <a:endParaRPr lang="ja-JP" altLang="en-US"/>
+          </a:p>
+        </p:txBody>
       </p:sp>
       <p:pic>
         <p:nvPicPr>
-          <p:cNvPr id="52" name="Image 16" descr="/tmp/claude-0/-home-user-WeddingInvitations/2c9849ff-e4cc-5683-ac72-2a6c69aa5261/scratchpad/dress_icon.png">    </p:cNvPr>
+          <p:cNvPr id="52" name="Image 16" descr="/tmp/claude-0/-home-user-WeddingInvitations/2c9849ff-e4cc-5683-ac72-2a6c69aa5261/scratchpad/dress_icon.png"/>
           <p:cNvPicPr>
             <a:picLocks noChangeAspect="1"/>
           </p:cNvPicPr>
           <p:nvPr/>
         </p:nvPicPr>
         <p:blipFill>
-          <a:blip r:embed="rId17"/>
+          <a:blip r:embed="rId3"/>
           <a:stretch>
             <a:fillRect/>
           </a:stretch>
@@ -17311,14 +18376,14 @@
       </p:pic>
       <p:pic>
         <p:nvPicPr>
-          <p:cNvPr id="53" name="Image 17" descr="/tmp/claude-0/-home-user-WeddingInvitations/2c9849ff-e4cc-5683-ac72-2a6c69aa5261/scratchpad/dress_icon.png">    </p:cNvPr>
+          <p:cNvPr id="53" name="Image 17" descr="/tmp/claude-0/-home-user-WeddingInvitations/2c9849ff-e4cc-5683-ac72-2a6c69aa5261/scratchpad/dress_icon.png"/>
           <p:cNvPicPr>
             <a:picLocks noChangeAspect="1"/>
           </p:cNvPicPr>
           <p:nvPr/>
         </p:nvPicPr>
         <p:blipFill>
-          <a:blip r:embed="rId18"/>
+          <a:blip r:embed="rId3"/>
           <a:stretch>
             <a:fillRect/>
           </a:stretch>
@@ -17354,7 +18419,7 @@
           <a:bodyPr wrap="square" lIns="0" tIns="0" rIns="0" bIns="0" rtlCol="0" anchor="ctr"/>
           <a:lstStyle/>
           <a:p>
-            <a:pPr algn="ctr" indent="0" marL="0">
+            <a:pPr marL="0" indent="0" algn="ctr">
               <a:buNone/>
             </a:pPr>
             <a:r>
@@ -17393,7 +18458,7 @@
           <a:bodyPr wrap="square" lIns="0" tIns="0" rIns="0" bIns="0" rtlCol="0" anchor="ctr"/>
           <a:lstStyle/>
           <a:p>
-            <a:pPr algn="ctr" indent="0" marL="0">
+            <a:pPr marL="0" indent="0" algn="ctr">
               <a:buNone/>
             </a:pPr>
             <a:r>
@@ -17435,6 +18500,13 @@
             <a:prstDash val="dash"/>
           </a:ln>
         </p:spPr>
+        <p:txBody>
+          <a:bodyPr/>
+          <a:lstStyle/>
+          <a:p>
+            <a:endParaRPr lang="ja-JP" altLang="en-US"/>
+          </a:p>
+        </p:txBody>
       </p:sp>
       <p:sp>
         <p:nvSpPr>
@@ -17462,17 +18534,24 @@
             <a:prstDash val="solid"/>
           </a:ln>
         </p:spPr>
+        <p:txBody>
+          <a:bodyPr/>
+          <a:lstStyle/>
+          <a:p>
+            <a:endParaRPr lang="ja-JP" altLang="en-US"/>
+          </a:p>
+        </p:txBody>
       </p:sp>
       <p:pic>
         <p:nvPicPr>
-          <p:cNvPr id="58" name="Image 18" descr="/tmp/claude-0/-home-user-WeddingInvitations/2c9849ff-e4cc-5683-ac72-2a6c69aa5261/scratchpad/dress_icon.png">    </p:cNvPr>
+          <p:cNvPr id="58" name="Image 18" descr="/tmp/claude-0/-home-user-WeddingInvitations/2c9849ff-e4cc-5683-ac72-2a6c69aa5261/scratchpad/dress_icon.png"/>
           <p:cNvPicPr>
             <a:picLocks noChangeAspect="1"/>
           </p:cNvPicPr>
           <p:nvPr/>
         </p:nvPicPr>
         <p:blipFill>
-          <a:blip r:embed="rId19"/>
+          <a:blip r:embed="rId3"/>
           <a:stretch>
             <a:fillRect/>
           </a:stretch>
@@ -17489,14 +18568,14 @@
       </p:pic>
       <p:pic>
         <p:nvPicPr>
-          <p:cNvPr id="59" name="Image 19" descr="/tmp/claude-0/-home-user-WeddingInvitations/2c9849ff-e4cc-5683-ac72-2a6c69aa5261/scratchpad/dress_icon.png">    </p:cNvPr>
+          <p:cNvPr id="59" name="Image 19" descr="/tmp/claude-0/-home-user-WeddingInvitations/2c9849ff-e4cc-5683-ac72-2a6c69aa5261/scratchpad/dress_icon.png"/>
           <p:cNvPicPr>
             <a:picLocks noChangeAspect="1"/>
           </p:cNvPicPr>
           <p:nvPr/>
         </p:nvPicPr>
         <p:blipFill>
-          <a:blip r:embed="rId20"/>
+          <a:blip r:embed="rId3"/>
           <a:stretch>
             <a:fillRect/>
           </a:stretch>
@@ -17532,7 +18611,7 @@
           <a:bodyPr wrap="square" lIns="0" tIns="0" rIns="0" bIns="0" rtlCol="0" anchor="ctr"/>
           <a:lstStyle/>
           <a:p>
-            <a:pPr algn="ctr" indent="0" marL="0">
+            <a:pPr marL="0" indent="0" algn="ctr">
               <a:buNone/>
             </a:pPr>
             <a:r>
@@ -17571,7 +18650,7 @@
           <a:bodyPr wrap="square" lIns="0" tIns="0" rIns="0" bIns="0" rtlCol="0" anchor="ctr"/>
           <a:lstStyle/>
           <a:p>
-            <a:pPr algn="ctr" indent="0" marL="0">
+            <a:pPr marL="0" indent="0" algn="ctr">
               <a:buNone/>
             </a:pPr>
             <a:r>
@@ -17613,6 +18692,13 @@
             <a:prstDash val="dash"/>
           </a:ln>
         </p:spPr>
+        <p:txBody>
+          <a:bodyPr/>
+          <a:lstStyle/>
+          <a:p>
+            <a:endParaRPr lang="ja-JP" altLang="en-US"/>
+          </a:p>
+        </p:txBody>
       </p:sp>
       <p:sp>
         <p:nvSpPr>
@@ -17640,17 +18726,24 @@
             <a:prstDash val="solid"/>
           </a:ln>
         </p:spPr>
+        <p:txBody>
+          <a:bodyPr/>
+          <a:lstStyle/>
+          <a:p>
+            <a:endParaRPr lang="ja-JP" altLang="en-US"/>
+          </a:p>
+        </p:txBody>
       </p:sp>
       <p:pic>
         <p:nvPicPr>
-          <p:cNvPr id="64" name="Image 20" descr="/tmp/claude-0/-home-user-WeddingInvitations/2c9849ff-e4cc-5683-ac72-2a6c69aa5261/scratchpad/dress_icon.png">    </p:cNvPr>
+          <p:cNvPr id="64" name="Image 20" descr="/tmp/claude-0/-home-user-WeddingInvitations/2c9849ff-e4cc-5683-ac72-2a6c69aa5261/scratchpad/dress_icon.png"/>
           <p:cNvPicPr>
             <a:picLocks noChangeAspect="1"/>
           </p:cNvPicPr>
           <p:nvPr/>
         </p:nvPicPr>
         <p:blipFill>
-          <a:blip r:embed="rId21"/>
+          <a:blip r:embed="rId3"/>
           <a:stretch>
             <a:fillRect/>
           </a:stretch>
@@ -17667,14 +18760,14 @@
       </p:pic>
       <p:pic>
         <p:nvPicPr>
-          <p:cNvPr id="65" name="Image 21" descr="/tmp/claude-0/-home-user-WeddingInvitations/2c9849ff-e4cc-5683-ac72-2a6c69aa5261/scratchpad/dress_icon.png">    </p:cNvPr>
+          <p:cNvPr id="65" name="Image 21" descr="/tmp/claude-0/-home-user-WeddingInvitations/2c9849ff-e4cc-5683-ac72-2a6c69aa5261/scratchpad/dress_icon.png"/>
           <p:cNvPicPr>
             <a:picLocks noChangeAspect="1"/>
           </p:cNvPicPr>
           <p:nvPr/>
         </p:nvPicPr>
         <p:blipFill>
-          <a:blip r:embed="rId22"/>
+          <a:blip r:embed="rId3"/>
           <a:stretch>
             <a:fillRect/>
           </a:stretch>
@@ -17710,7 +18803,7 @@
           <a:bodyPr wrap="square" lIns="0" tIns="0" rIns="0" bIns="0" rtlCol="0" anchor="ctr"/>
           <a:lstStyle/>
           <a:p>
-            <a:pPr algn="ctr" indent="0" marL="0">
+            <a:pPr marL="0" indent="0" algn="ctr">
               <a:buNone/>
             </a:pPr>
             <a:r>
@@ -17749,7 +18842,7 @@
           <a:bodyPr wrap="square" lIns="0" tIns="0" rIns="0" bIns="0" rtlCol="0" anchor="ctr"/>
           <a:lstStyle/>
           <a:p>
-            <a:pPr algn="ctr" indent="0" marL="0">
+            <a:pPr marL="0" indent="0" algn="ctr">
               <a:buNone/>
             </a:pPr>
             <a:r>
@@ -17791,6 +18884,13 @@
             <a:prstDash val="dash"/>
           </a:ln>
         </p:spPr>
+        <p:txBody>
+          <a:bodyPr/>
+          <a:lstStyle/>
+          <a:p>
+            <a:endParaRPr lang="ja-JP" altLang="en-US"/>
+          </a:p>
+        </p:txBody>
       </p:sp>
       <p:sp>
         <p:nvSpPr>
@@ -17818,17 +18918,24 @@
             <a:prstDash val="solid"/>
           </a:ln>
         </p:spPr>
+        <p:txBody>
+          <a:bodyPr/>
+          <a:lstStyle/>
+          <a:p>
+            <a:endParaRPr lang="ja-JP" altLang="en-US"/>
+          </a:p>
+        </p:txBody>
       </p:sp>
       <p:pic>
         <p:nvPicPr>
-          <p:cNvPr id="70" name="Image 22" descr="/tmp/claude-0/-home-user-WeddingInvitations/2c9849ff-e4cc-5683-ac72-2a6c69aa5261/scratchpad/dress_icon.png">    </p:cNvPr>
+          <p:cNvPr id="70" name="Image 22" descr="/tmp/claude-0/-home-user-WeddingInvitations/2c9849ff-e4cc-5683-ac72-2a6c69aa5261/scratchpad/dress_icon.png"/>
           <p:cNvPicPr>
             <a:picLocks noChangeAspect="1"/>
           </p:cNvPicPr>
           <p:nvPr/>
         </p:nvPicPr>
         <p:blipFill>
-          <a:blip r:embed="rId23"/>
+          <a:blip r:embed="rId3"/>
           <a:stretch>
             <a:fillRect/>
           </a:stretch>
@@ -17845,14 +18952,14 @@
       </p:pic>
       <p:pic>
         <p:nvPicPr>
-          <p:cNvPr id="71" name="Image 23" descr="/tmp/claude-0/-home-user-WeddingInvitations/2c9849ff-e4cc-5683-ac72-2a6c69aa5261/scratchpad/dress_icon.png">    </p:cNvPr>
+          <p:cNvPr id="71" name="Image 23" descr="/tmp/claude-0/-home-user-WeddingInvitations/2c9849ff-e4cc-5683-ac72-2a6c69aa5261/scratchpad/dress_icon.png"/>
           <p:cNvPicPr>
             <a:picLocks noChangeAspect="1"/>
           </p:cNvPicPr>
           <p:nvPr/>
         </p:nvPicPr>
         <p:blipFill>
-          <a:blip r:embed="rId24"/>
+          <a:blip r:embed="rId3"/>
           <a:stretch>
             <a:fillRect/>
           </a:stretch>
@@ -17888,7 +18995,7 @@
           <a:bodyPr wrap="square" lIns="0" tIns="0" rIns="0" bIns="0" rtlCol="0" anchor="ctr"/>
           <a:lstStyle/>
           <a:p>
-            <a:pPr algn="ctr" indent="0" marL="0">
+            <a:pPr marL="0" indent="0" algn="ctr">
               <a:buNone/>
             </a:pPr>
             <a:r>
@@ -17927,7 +19034,7 @@
           <a:bodyPr wrap="square" lIns="0" tIns="0" rIns="0" bIns="0" rtlCol="0" anchor="ctr"/>
           <a:lstStyle/>
           <a:p>
-            <a:pPr algn="ctr" indent="0" marL="0">
+            <a:pPr marL="0" indent="0" algn="ctr">
               <a:buNone/>
             </a:pPr>
             <a:r>
@@ -17969,6 +19076,13 @@
             <a:prstDash val="dash"/>
           </a:ln>
         </p:spPr>
+        <p:txBody>
+          <a:bodyPr/>
+          <a:lstStyle/>
+          <a:p>
+            <a:endParaRPr lang="ja-JP" altLang="en-US"/>
+          </a:p>
+        </p:txBody>
       </p:sp>
       <p:sp>
         <p:nvSpPr>
@@ -17996,17 +19110,24 @@
             <a:prstDash val="solid"/>
           </a:ln>
         </p:spPr>
+        <p:txBody>
+          <a:bodyPr/>
+          <a:lstStyle/>
+          <a:p>
+            <a:endParaRPr lang="ja-JP" altLang="en-US"/>
+          </a:p>
+        </p:txBody>
       </p:sp>
       <p:pic>
         <p:nvPicPr>
-          <p:cNvPr id="76" name="Image 24" descr="/tmp/claude-0/-home-user-WeddingInvitations/2c9849ff-e4cc-5683-ac72-2a6c69aa5261/scratchpad/dress_icon.png">    </p:cNvPr>
+          <p:cNvPr id="76" name="Image 24" descr="/tmp/claude-0/-home-user-WeddingInvitations/2c9849ff-e4cc-5683-ac72-2a6c69aa5261/scratchpad/dress_icon.png"/>
           <p:cNvPicPr>
             <a:picLocks noChangeAspect="1"/>
           </p:cNvPicPr>
           <p:nvPr/>
         </p:nvPicPr>
         <p:blipFill>
-          <a:blip r:embed="rId25"/>
+          <a:blip r:embed="rId3"/>
           <a:stretch>
             <a:fillRect/>
           </a:stretch>
@@ -18023,14 +19144,14 @@
       </p:pic>
       <p:pic>
         <p:nvPicPr>
-          <p:cNvPr id="77" name="Image 25" descr="/tmp/claude-0/-home-user-WeddingInvitations/2c9849ff-e4cc-5683-ac72-2a6c69aa5261/scratchpad/dress_icon.png">    </p:cNvPr>
+          <p:cNvPr id="77" name="Image 25" descr="/tmp/claude-0/-home-user-WeddingInvitations/2c9849ff-e4cc-5683-ac72-2a6c69aa5261/scratchpad/dress_icon.png"/>
           <p:cNvPicPr>
             <a:picLocks noChangeAspect="1"/>
           </p:cNvPicPr>
           <p:nvPr/>
         </p:nvPicPr>
         <p:blipFill>
-          <a:blip r:embed="rId26"/>
+          <a:blip r:embed="rId3"/>
           <a:stretch>
             <a:fillRect/>
           </a:stretch>
@@ -18066,7 +19187,7 @@
           <a:bodyPr wrap="square" lIns="0" tIns="0" rIns="0" bIns="0" rtlCol="0" anchor="ctr"/>
           <a:lstStyle/>
           <a:p>
-            <a:pPr algn="ctr" indent="0" marL="0">
+            <a:pPr marL="0" indent="0" algn="ctr">
               <a:buNone/>
             </a:pPr>
             <a:r>
@@ -18105,7 +19226,7 @@
           <a:bodyPr wrap="square" lIns="0" tIns="0" rIns="0" bIns="0" rtlCol="0" anchor="ctr"/>
           <a:lstStyle/>
           <a:p>
-            <a:pPr algn="ctr" indent="0" marL="0">
+            <a:pPr marL="0" indent="0" algn="ctr">
               <a:buNone/>
             </a:pPr>
             <a:r>
@@ -18147,6 +19268,13 @@
             <a:prstDash val="dash"/>
           </a:ln>
         </p:spPr>
+        <p:txBody>
+          <a:bodyPr/>
+          <a:lstStyle/>
+          <a:p>
+            <a:endParaRPr lang="ja-JP" altLang="en-US"/>
+          </a:p>
+        </p:txBody>
       </p:sp>
       <p:sp>
         <p:nvSpPr>
@@ -18174,17 +19302,24 @@
             <a:prstDash val="solid"/>
           </a:ln>
         </p:spPr>
+        <p:txBody>
+          <a:bodyPr/>
+          <a:lstStyle/>
+          <a:p>
+            <a:endParaRPr lang="ja-JP" altLang="en-US"/>
+          </a:p>
+        </p:txBody>
       </p:sp>
       <p:pic>
         <p:nvPicPr>
-          <p:cNvPr id="82" name="Image 26" descr="/tmp/claude-0/-home-user-WeddingInvitations/2c9849ff-e4cc-5683-ac72-2a6c69aa5261/scratchpad/dress_icon.png">    </p:cNvPr>
+          <p:cNvPr id="82" name="Image 26" descr="/tmp/claude-0/-home-user-WeddingInvitations/2c9849ff-e4cc-5683-ac72-2a6c69aa5261/scratchpad/dress_icon.png"/>
           <p:cNvPicPr>
             <a:picLocks noChangeAspect="1"/>
           </p:cNvPicPr>
           <p:nvPr/>
         </p:nvPicPr>
         <p:blipFill>
-          <a:blip r:embed="rId27"/>
+          <a:blip r:embed="rId3"/>
           <a:stretch>
             <a:fillRect/>
           </a:stretch>
@@ -18201,14 +19336,14 @@
       </p:pic>
       <p:pic>
         <p:nvPicPr>
-          <p:cNvPr id="83" name="Image 27" descr="/tmp/claude-0/-home-user-WeddingInvitations/2c9849ff-e4cc-5683-ac72-2a6c69aa5261/scratchpad/dress_icon.png">    </p:cNvPr>
+          <p:cNvPr id="83" name="Image 27" descr="/tmp/claude-0/-home-user-WeddingInvitations/2c9849ff-e4cc-5683-ac72-2a6c69aa5261/scratchpad/dress_icon.png"/>
           <p:cNvPicPr>
             <a:picLocks noChangeAspect="1"/>
           </p:cNvPicPr>
           <p:nvPr/>
         </p:nvPicPr>
         <p:blipFill>
-          <a:blip r:embed="rId28"/>
+          <a:blip r:embed="rId3"/>
           <a:stretch>
             <a:fillRect/>
           </a:stretch>
@@ -18244,7 +19379,7 @@
           <a:bodyPr wrap="square" lIns="0" tIns="0" rIns="0" bIns="0" rtlCol="0" anchor="ctr"/>
           <a:lstStyle/>
           <a:p>
-            <a:pPr algn="ctr" indent="0" marL="0">
+            <a:pPr marL="0" indent="0" algn="ctr">
               <a:buNone/>
             </a:pPr>
             <a:r>
@@ -18283,7 +19418,7 @@
           <a:bodyPr wrap="square" lIns="0" tIns="0" rIns="0" bIns="0" rtlCol="0" anchor="ctr"/>
           <a:lstStyle/>
           <a:p>
-            <a:pPr algn="ctr" indent="0" marL="0">
+            <a:pPr marL="0" indent="0" algn="ctr">
               <a:buNone/>
             </a:pPr>
             <a:r>
@@ -18325,6 +19460,13 @@
             <a:prstDash val="dash"/>
           </a:ln>
         </p:spPr>
+        <p:txBody>
+          <a:bodyPr/>
+          <a:lstStyle/>
+          <a:p>
+            <a:endParaRPr lang="ja-JP" altLang="en-US"/>
+          </a:p>
+        </p:txBody>
       </p:sp>
       <p:sp>
         <p:nvSpPr>
@@ -18352,17 +19494,24 @@
             <a:prstDash val="solid"/>
           </a:ln>
         </p:spPr>
+        <p:txBody>
+          <a:bodyPr/>
+          <a:lstStyle/>
+          <a:p>
+            <a:endParaRPr lang="ja-JP" altLang="en-US"/>
+          </a:p>
+        </p:txBody>
       </p:sp>
       <p:pic>
         <p:nvPicPr>
-          <p:cNvPr id="88" name="Image 28" descr="/tmp/claude-0/-home-user-WeddingInvitations/2c9849ff-e4cc-5683-ac72-2a6c69aa5261/scratchpad/dress_icon.png">    </p:cNvPr>
+          <p:cNvPr id="88" name="Image 28" descr="/tmp/claude-0/-home-user-WeddingInvitations/2c9849ff-e4cc-5683-ac72-2a6c69aa5261/scratchpad/dress_icon.png"/>
           <p:cNvPicPr>
             <a:picLocks noChangeAspect="1"/>
           </p:cNvPicPr>
           <p:nvPr/>
         </p:nvPicPr>
         <p:blipFill>
-          <a:blip r:embed="rId29"/>
+          <a:blip r:embed="rId3"/>
           <a:stretch>
             <a:fillRect/>
           </a:stretch>
@@ -18379,14 +19528,14 @@
       </p:pic>
       <p:pic>
         <p:nvPicPr>
-          <p:cNvPr id="89" name="Image 29" descr="/tmp/claude-0/-home-user-WeddingInvitations/2c9849ff-e4cc-5683-ac72-2a6c69aa5261/scratchpad/dress_icon.png">    </p:cNvPr>
+          <p:cNvPr id="89" name="Image 29" descr="/tmp/claude-0/-home-user-WeddingInvitations/2c9849ff-e4cc-5683-ac72-2a6c69aa5261/scratchpad/dress_icon.png"/>
           <p:cNvPicPr>
             <a:picLocks noChangeAspect="1"/>
           </p:cNvPicPr>
           <p:nvPr/>
         </p:nvPicPr>
         <p:blipFill>
-          <a:blip r:embed="rId30"/>
+          <a:blip r:embed="rId3"/>
           <a:stretch>
             <a:fillRect/>
           </a:stretch>
@@ -18422,7 +19571,7 @@
           <a:bodyPr wrap="square" lIns="0" tIns="0" rIns="0" bIns="0" rtlCol="0" anchor="ctr"/>
           <a:lstStyle/>
           <a:p>
-            <a:pPr algn="ctr" indent="0" marL="0">
+            <a:pPr marL="0" indent="0" algn="ctr">
               <a:buNone/>
             </a:pPr>
             <a:r>
@@ -18461,7 +19610,7 @@
           <a:bodyPr wrap="square" lIns="0" tIns="0" rIns="0" bIns="0" rtlCol="0" anchor="ctr"/>
           <a:lstStyle/>
           <a:p>
-            <a:pPr algn="ctr" indent="0" marL="0">
+            <a:pPr marL="0" indent="0" algn="ctr">
               <a:buNone/>
             </a:pPr>
             <a:r>
@@ -18503,6 +19652,13 @@
             <a:prstDash val="dash"/>
           </a:ln>
         </p:spPr>
+        <p:txBody>
+          <a:bodyPr/>
+          <a:lstStyle/>
+          <a:p>
+            <a:endParaRPr lang="ja-JP" altLang="en-US"/>
+          </a:p>
+        </p:txBody>
       </p:sp>
       <p:sp>
         <p:nvSpPr>
@@ -18530,17 +19686,24 @@
             <a:prstDash val="solid"/>
           </a:ln>
         </p:spPr>
+        <p:txBody>
+          <a:bodyPr/>
+          <a:lstStyle/>
+          <a:p>
+            <a:endParaRPr lang="ja-JP" altLang="en-US"/>
+          </a:p>
+        </p:txBody>
       </p:sp>
       <p:pic>
         <p:nvPicPr>
-          <p:cNvPr id="94" name="Image 30" descr="/tmp/claude-0/-home-user-WeddingInvitations/2c9849ff-e4cc-5683-ac72-2a6c69aa5261/scratchpad/dress_icon.png">    </p:cNvPr>
+          <p:cNvPr id="94" name="Image 30" descr="/tmp/claude-0/-home-user-WeddingInvitations/2c9849ff-e4cc-5683-ac72-2a6c69aa5261/scratchpad/dress_icon.png"/>
           <p:cNvPicPr>
             <a:picLocks noChangeAspect="1"/>
           </p:cNvPicPr>
           <p:nvPr/>
         </p:nvPicPr>
         <p:blipFill>
-          <a:blip r:embed="rId31"/>
+          <a:blip r:embed="rId3"/>
           <a:stretch>
             <a:fillRect/>
           </a:stretch>
@@ -18557,14 +19720,14 @@
       </p:pic>
       <p:pic>
         <p:nvPicPr>
-          <p:cNvPr id="95" name="Image 31" descr="/tmp/claude-0/-home-user-WeddingInvitations/2c9849ff-e4cc-5683-ac72-2a6c69aa5261/scratchpad/dress_icon.png">    </p:cNvPr>
+          <p:cNvPr id="95" name="Image 31" descr="/tmp/claude-0/-home-user-WeddingInvitations/2c9849ff-e4cc-5683-ac72-2a6c69aa5261/scratchpad/dress_icon.png"/>
           <p:cNvPicPr>
             <a:picLocks noChangeAspect="1"/>
           </p:cNvPicPr>
           <p:nvPr/>
         </p:nvPicPr>
         <p:blipFill>
-          <a:blip r:embed="rId32"/>
+          <a:blip r:embed="rId3"/>
           <a:stretch>
             <a:fillRect/>
           </a:stretch>
@@ -18600,7 +19763,7 @@
           <a:bodyPr wrap="square" lIns="0" tIns="0" rIns="0" bIns="0" rtlCol="0" anchor="ctr"/>
           <a:lstStyle/>
           <a:p>
-            <a:pPr algn="ctr" indent="0" marL="0">
+            <a:pPr marL="0" indent="0" algn="ctr">
               <a:buNone/>
             </a:pPr>
             <a:r>
@@ -18639,7 +19802,7 @@
           <a:bodyPr wrap="square" lIns="0" tIns="0" rIns="0" bIns="0" rtlCol="0" anchor="ctr"/>
           <a:lstStyle/>
           <a:p>
-            <a:pPr algn="ctr" indent="0" marL="0">
+            <a:pPr marL="0" indent="0" algn="ctr">
               <a:buNone/>
             </a:pPr>
             <a:r>
@@ -18673,6 +19836,7 @@
         <a:solidFill>
           <a:srgbClr val="FFFFFF"/>
         </a:solidFill>
+        <a:effectLst/>
       </p:bgPr>
     </p:bg>
     <p:spTree>
@@ -18713,6 +19877,13 @@
             <a:prstDash val="dash"/>
           </a:ln>
         </p:spPr>
+        <p:txBody>
+          <a:bodyPr/>
+          <a:lstStyle/>
+          <a:p>
+            <a:endParaRPr lang="ja-JP" altLang="en-US"/>
+          </a:p>
+        </p:txBody>
       </p:sp>
       <p:sp>
         <p:nvSpPr>
@@ -18740,17 +19911,24 @@
             <a:prstDash val="solid"/>
           </a:ln>
         </p:spPr>
+        <p:txBody>
+          <a:bodyPr/>
+          <a:lstStyle/>
+          <a:p>
+            <a:endParaRPr lang="ja-JP" altLang="en-US"/>
+          </a:p>
+        </p:txBody>
       </p:sp>
       <p:pic>
         <p:nvPicPr>
-          <p:cNvPr id="4" name="Image 0" descr="/tmp/claude-0/-home-user-WeddingInvitations/2c9849ff-e4cc-5683-ac72-2a6c69aa5261/scratchpad/dress_icon.png">    </p:cNvPr>
+          <p:cNvPr id="4" name="Image 0" descr="/tmp/claude-0/-home-user-WeddingInvitations/2c9849ff-e4cc-5683-ac72-2a6c69aa5261/scratchpad/dress_icon.png"/>
           <p:cNvPicPr>
             <a:picLocks noChangeAspect="1"/>
           </p:cNvPicPr>
           <p:nvPr/>
         </p:nvPicPr>
         <p:blipFill>
-          <a:blip r:embed="rId1"/>
+          <a:blip r:embed="rId3"/>
           <a:stretch>
             <a:fillRect/>
           </a:stretch>
@@ -18767,14 +19945,14 @@
       </p:pic>
       <p:pic>
         <p:nvPicPr>
-          <p:cNvPr id="5" name="Image 1" descr="/tmp/claude-0/-home-user-WeddingInvitations/2c9849ff-e4cc-5683-ac72-2a6c69aa5261/scratchpad/dress_icon.png">    </p:cNvPr>
+          <p:cNvPr id="5" name="Image 1" descr="/tmp/claude-0/-home-user-WeddingInvitations/2c9849ff-e4cc-5683-ac72-2a6c69aa5261/scratchpad/dress_icon.png"/>
           <p:cNvPicPr>
             <a:picLocks noChangeAspect="1"/>
           </p:cNvPicPr>
           <p:nvPr/>
         </p:nvPicPr>
         <p:blipFill>
-          <a:blip r:embed="rId2"/>
+          <a:blip r:embed="rId3"/>
           <a:stretch>
             <a:fillRect/>
           </a:stretch>
@@ -18810,7 +19988,7 @@
           <a:bodyPr wrap="square" lIns="0" tIns="0" rIns="0" bIns="0" rtlCol="0" anchor="ctr"/>
           <a:lstStyle/>
           <a:p>
-            <a:pPr algn="ctr" indent="0" marL="0">
+            <a:pPr marL="0" indent="0" algn="ctr">
               <a:buNone/>
             </a:pPr>
             <a:r>
@@ -18849,7 +20027,7 @@
           <a:bodyPr wrap="square" lIns="0" tIns="0" rIns="0" bIns="0" rtlCol="0" anchor="ctr"/>
           <a:lstStyle/>
           <a:p>
-            <a:pPr algn="ctr" indent="0" marL="0">
+            <a:pPr marL="0" indent="0" algn="ctr">
               <a:buNone/>
             </a:pPr>
             <a:r>
@@ -18891,6 +20069,13 @@
             <a:prstDash val="dash"/>
           </a:ln>
         </p:spPr>
+        <p:txBody>
+          <a:bodyPr/>
+          <a:lstStyle/>
+          <a:p>
+            <a:endParaRPr lang="ja-JP" altLang="en-US"/>
+          </a:p>
+        </p:txBody>
       </p:sp>
       <p:sp>
         <p:nvSpPr>
@@ -18918,10 +20103,17 @@
             <a:prstDash val="solid"/>
           </a:ln>
         </p:spPr>
+        <p:txBody>
+          <a:bodyPr/>
+          <a:lstStyle/>
+          <a:p>
+            <a:endParaRPr lang="ja-JP" altLang="en-US"/>
+          </a:p>
+        </p:txBody>
       </p:sp>
       <p:pic>
         <p:nvPicPr>
-          <p:cNvPr id="10" name="Image 2" descr="/tmp/claude-0/-home-user-WeddingInvitations/2c9849ff-e4cc-5683-ac72-2a6c69aa5261/scratchpad/dress_icon.png">    </p:cNvPr>
+          <p:cNvPr id="10" name="Image 2" descr="/tmp/claude-0/-home-user-WeddingInvitations/2c9849ff-e4cc-5683-ac72-2a6c69aa5261/scratchpad/dress_icon.png"/>
           <p:cNvPicPr>
             <a:picLocks noChangeAspect="1"/>
           </p:cNvPicPr>
@@ -18945,14 +20137,14 @@
       </p:pic>
       <p:pic>
         <p:nvPicPr>
-          <p:cNvPr id="11" name="Image 3" descr="/tmp/claude-0/-home-user-WeddingInvitations/2c9849ff-e4cc-5683-ac72-2a6c69aa5261/scratchpad/dress_icon.png">    </p:cNvPr>
+          <p:cNvPr id="11" name="Image 3" descr="/tmp/claude-0/-home-user-WeddingInvitations/2c9849ff-e4cc-5683-ac72-2a6c69aa5261/scratchpad/dress_icon.png"/>
           <p:cNvPicPr>
             <a:picLocks noChangeAspect="1"/>
           </p:cNvPicPr>
           <p:nvPr/>
         </p:nvPicPr>
         <p:blipFill>
-          <a:blip r:embed="rId4"/>
+          <a:blip r:embed="rId3"/>
           <a:stretch>
             <a:fillRect/>
           </a:stretch>
@@ -18988,7 +20180,7 @@
           <a:bodyPr wrap="square" lIns="0" tIns="0" rIns="0" bIns="0" rtlCol="0" anchor="ctr"/>
           <a:lstStyle/>
           <a:p>
-            <a:pPr algn="ctr" indent="0" marL="0">
+            <a:pPr marL="0" indent="0" algn="ctr">
               <a:buNone/>
             </a:pPr>
             <a:r>
@@ -19027,7 +20219,7 @@
           <a:bodyPr wrap="square" lIns="0" tIns="0" rIns="0" bIns="0" rtlCol="0" anchor="ctr"/>
           <a:lstStyle/>
           <a:p>
-            <a:pPr algn="ctr" indent="0" marL="0">
+            <a:pPr marL="0" indent="0" algn="ctr">
               <a:buNone/>
             </a:pPr>
             <a:r>
@@ -19069,6 +20261,13 @@
             <a:prstDash val="dash"/>
           </a:ln>
         </p:spPr>
+        <p:txBody>
+          <a:bodyPr/>
+          <a:lstStyle/>
+          <a:p>
+            <a:endParaRPr lang="ja-JP" altLang="en-US"/>
+          </a:p>
+        </p:txBody>
       </p:sp>
       <p:sp>
         <p:nvSpPr>
@@ -19096,17 +20295,24 @@
             <a:prstDash val="solid"/>
           </a:ln>
         </p:spPr>
+        <p:txBody>
+          <a:bodyPr/>
+          <a:lstStyle/>
+          <a:p>
+            <a:endParaRPr lang="ja-JP" altLang="en-US"/>
+          </a:p>
+        </p:txBody>
       </p:sp>
       <p:pic>
         <p:nvPicPr>
-          <p:cNvPr id="16" name="Image 4" descr="/tmp/claude-0/-home-user-WeddingInvitations/2c9849ff-e4cc-5683-ac72-2a6c69aa5261/scratchpad/dress_icon.png">    </p:cNvPr>
+          <p:cNvPr id="16" name="Image 4" descr="/tmp/claude-0/-home-user-WeddingInvitations/2c9849ff-e4cc-5683-ac72-2a6c69aa5261/scratchpad/dress_icon.png"/>
           <p:cNvPicPr>
             <a:picLocks noChangeAspect="1"/>
           </p:cNvPicPr>
           <p:nvPr/>
         </p:nvPicPr>
         <p:blipFill>
-          <a:blip r:embed="rId5"/>
+          <a:blip r:embed="rId3"/>
           <a:stretch>
             <a:fillRect/>
           </a:stretch>
@@ -19123,14 +20329,14 @@
       </p:pic>
       <p:pic>
         <p:nvPicPr>
-          <p:cNvPr id="17" name="Image 5" descr="/tmp/claude-0/-home-user-WeddingInvitations/2c9849ff-e4cc-5683-ac72-2a6c69aa5261/scratchpad/dress_icon.png">    </p:cNvPr>
+          <p:cNvPr id="17" name="Image 5" descr="/tmp/claude-0/-home-user-WeddingInvitations/2c9849ff-e4cc-5683-ac72-2a6c69aa5261/scratchpad/dress_icon.png"/>
           <p:cNvPicPr>
             <a:picLocks noChangeAspect="1"/>
           </p:cNvPicPr>
           <p:nvPr/>
         </p:nvPicPr>
         <p:blipFill>
-          <a:blip r:embed="rId6"/>
+          <a:blip r:embed="rId3"/>
           <a:stretch>
             <a:fillRect/>
           </a:stretch>
@@ -19166,7 +20372,7 @@
           <a:bodyPr wrap="square" lIns="0" tIns="0" rIns="0" bIns="0" rtlCol="0" anchor="ctr"/>
           <a:lstStyle/>
           <a:p>
-            <a:pPr algn="ctr" indent="0" marL="0">
+            <a:pPr marL="0" indent="0" algn="ctr">
               <a:buNone/>
             </a:pPr>
             <a:r>
@@ -19205,7 +20411,7 @@
           <a:bodyPr wrap="square" lIns="0" tIns="0" rIns="0" bIns="0" rtlCol="0" anchor="ctr"/>
           <a:lstStyle/>
           <a:p>
-            <a:pPr algn="ctr" indent="0" marL="0">
+            <a:pPr marL="0" indent="0" algn="ctr">
               <a:buNone/>
             </a:pPr>
             <a:r>
@@ -19247,6 +20453,13 @@
             <a:prstDash val="dash"/>
           </a:ln>
         </p:spPr>
+        <p:txBody>
+          <a:bodyPr/>
+          <a:lstStyle/>
+          <a:p>
+            <a:endParaRPr lang="ja-JP" altLang="en-US"/>
+          </a:p>
+        </p:txBody>
       </p:sp>
       <p:sp>
         <p:nvSpPr>
@@ -19274,17 +20487,24 @@
             <a:prstDash val="solid"/>
           </a:ln>
         </p:spPr>
+        <p:txBody>
+          <a:bodyPr/>
+          <a:lstStyle/>
+          <a:p>
+            <a:endParaRPr lang="ja-JP" altLang="en-US"/>
+          </a:p>
+        </p:txBody>
       </p:sp>
       <p:pic>
         <p:nvPicPr>
-          <p:cNvPr id="22" name="Image 6" descr="/tmp/claude-0/-home-user-WeddingInvitations/2c9849ff-e4cc-5683-ac72-2a6c69aa5261/scratchpad/dress_icon.png">    </p:cNvPr>
+          <p:cNvPr id="22" name="Image 6" descr="/tmp/claude-0/-home-user-WeddingInvitations/2c9849ff-e4cc-5683-ac72-2a6c69aa5261/scratchpad/dress_icon.png"/>
           <p:cNvPicPr>
             <a:picLocks noChangeAspect="1"/>
           </p:cNvPicPr>
           <p:nvPr/>
         </p:nvPicPr>
         <p:blipFill>
-          <a:blip r:embed="rId7"/>
+          <a:blip r:embed="rId3"/>
           <a:stretch>
             <a:fillRect/>
           </a:stretch>
@@ -19301,14 +20521,14 @@
       </p:pic>
       <p:pic>
         <p:nvPicPr>
-          <p:cNvPr id="23" name="Image 7" descr="/tmp/claude-0/-home-user-WeddingInvitations/2c9849ff-e4cc-5683-ac72-2a6c69aa5261/scratchpad/dress_icon.png">    </p:cNvPr>
+          <p:cNvPr id="23" name="Image 7" descr="/tmp/claude-0/-home-user-WeddingInvitations/2c9849ff-e4cc-5683-ac72-2a6c69aa5261/scratchpad/dress_icon.png"/>
           <p:cNvPicPr>
             <a:picLocks noChangeAspect="1"/>
           </p:cNvPicPr>
           <p:nvPr/>
         </p:nvPicPr>
         <p:blipFill>
-          <a:blip r:embed="rId8"/>
+          <a:blip r:embed="rId3"/>
           <a:stretch>
             <a:fillRect/>
           </a:stretch>
@@ -19344,7 +20564,7 @@
           <a:bodyPr wrap="square" lIns="0" tIns="0" rIns="0" bIns="0" rtlCol="0" anchor="ctr"/>
           <a:lstStyle/>
           <a:p>
-            <a:pPr algn="ctr" indent="0" marL="0">
+            <a:pPr marL="0" indent="0" algn="ctr">
               <a:buNone/>
             </a:pPr>
             <a:r>
@@ -19383,7 +20603,7 @@
           <a:bodyPr wrap="square" lIns="0" tIns="0" rIns="0" bIns="0" rtlCol="0" anchor="ctr"/>
           <a:lstStyle/>
           <a:p>
-            <a:pPr algn="ctr" indent="0" marL="0">
+            <a:pPr marL="0" indent="0" algn="ctr">
               <a:buNone/>
             </a:pPr>
             <a:r>
@@ -19425,6 +20645,13 @@
             <a:prstDash val="dash"/>
           </a:ln>
         </p:spPr>
+        <p:txBody>
+          <a:bodyPr/>
+          <a:lstStyle/>
+          <a:p>
+            <a:endParaRPr lang="ja-JP" altLang="en-US"/>
+          </a:p>
+        </p:txBody>
       </p:sp>
       <p:sp>
         <p:nvSpPr>
@@ -19452,17 +20679,24 @@
             <a:prstDash val="solid"/>
           </a:ln>
         </p:spPr>
+        <p:txBody>
+          <a:bodyPr/>
+          <a:lstStyle/>
+          <a:p>
+            <a:endParaRPr lang="ja-JP" altLang="en-US"/>
+          </a:p>
+        </p:txBody>
       </p:sp>
       <p:pic>
         <p:nvPicPr>
-          <p:cNvPr id="28" name="Image 8" descr="/tmp/claude-0/-home-user-WeddingInvitations/2c9849ff-e4cc-5683-ac72-2a6c69aa5261/scratchpad/dress_icon.png">    </p:cNvPr>
+          <p:cNvPr id="28" name="Image 8" descr="/tmp/claude-0/-home-user-WeddingInvitations/2c9849ff-e4cc-5683-ac72-2a6c69aa5261/scratchpad/dress_icon.png"/>
           <p:cNvPicPr>
             <a:picLocks noChangeAspect="1"/>
           </p:cNvPicPr>
           <p:nvPr/>
         </p:nvPicPr>
         <p:blipFill>
-          <a:blip r:embed="rId9"/>
+          <a:blip r:embed="rId3"/>
           <a:stretch>
             <a:fillRect/>
           </a:stretch>
@@ -19479,14 +20713,14 @@
       </p:pic>
       <p:pic>
         <p:nvPicPr>
-          <p:cNvPr id="29" name="Image 9" descr="/tmp/claude-0/-home-user-WeddingInvitations/2c9849ff-e4cc-5683-ac72-2a6c69aa5261/scratchpad/dress_icon.png">    </p:cNvPr>
+          <p:cNvPr id="29" name="Image 9" descr="/tmp/claude-0/-home-user-WeddingInvitations/2c9849ff-e4cc-5683-ac72-2a6c69aa5261/scratchpad/dress_icon.png"/>
           <p:cNvPicPr>
             <a:picLocks noChangeAspect="1"/>
           </p:cNvPicPr>
           <p:nvPr/>
         </p:nvPicPr>
         <p:blipFill>
-          <a:blip r:embed="rId10"/>
+          <a:blip r:embed="rId3"/>
           <a:stretch>
             <a:fillRect/>
           </a:stretch>
@@ -19522,7 +20756,7 @@
           <a:bodyPr wrap="square" lIns="0" tIns="0" rIns="0" bIns="0" rtlCol="0" anchor="ctr"/>
           <a:lstStyle/>
           <a:p>
-            <a:pPr algn="ctr" indent="0" marL="0">
+            <a:pPr marL="0" indent="0" algn="ctr">
               <a:buNone/>
             </a:pPr>
             <a:r>
@@ -19561,7 +20795,7 @@
           <a:bodyPr wrap="square" lIns="0" tIns="0" rIns="0" bIns="0" rtlCol="0" anchor="ctr"/>
           <a:lstStyle/>
           <a:p>
-            <a:pPr algn="ctr" indent="0" marL="0">
+            <a:pPr marL="0" indent="0" algn="ctr">
               <a:buNone/>
             </a:pPr>
             <a:r>
@@ -19603,6 +20837,13 @@
             <a:prstDash val="dash"/>
           </a:ln>
         </p:spPr>
+        <p:txBody>
+          <a:bodyPr/>
+          <a:lstStyle/>
+          <a:p>
+            <a:endParaRPr lang="ja-JP" altLang="en-US"/>
+          </a:p>
+        </p:txBody>
       </p:sp>
       <p:sp>
         <p:nvSpPr>
@@ -19630,17 +20871,24 @@
             <a:prstDash val="solid"/>
           </a:ln>
         </p:spPr>
+        <p:txBody>
+          <a:bodyPr/>
+          <a:lstStyle/>
+          <a:p>
+            <a:endParaRPr lang="ja-JP" altLang="en-US"/>
+          </a:p>
+        </p:txBody>
       </p:sp>
       <p:pic>
         <p:nvPicPr>
-          <p:cNvPr id="34" name="Image 10" descr="/tmp/claude-0/-home-user-WeddingInvitations/2c9849ff-e4cc-5683-ac72-2a6c69aa5261/scratchpad/dress_icon.png">    </p:cNvPr>
+          <p:cNvPr id="34" name="Image 10" descr="/tmp/claude-0/-home-user-WeddingInvitations/2c9849ff-e4cc-5683-ac72-2a6c69aa5261/scratchpad/dress_icon.png"/>
           <p:cNvPicPr>
             <a:picLocks noChangeAspect="1"/>
           </p:cNvPicPr>
           <p:nvPr/>
         </p:nvPicPr>
         <p:blipFill>
-          <a:blip r:embed="rId11"/>
+          <a:blip r:embed="rId3"/>
           <a:stretch>
             <a:fillRect/>
           </a:stretch>
@@ -19657,14 +20905,14 @@
       </p:pic>
       <p:pic>
         <p:nvPicPr>
-          <p:cNvPr id="35" name="Image 11" descr="/tmp/claude-0/-home-user-WeddingInvitations/2c9849ff-e4cc-5683-ac72-2a6c69aa5261/scratchpad/dress_icon.png">    </p:cNvPr>
+          <p:cNvPr id="35" name="Image 11" descr="/tmp/claude-0/-home-user-WeddingInvitations/2c9849ff-e4cc-5683-ac72-2a6c69aa5261/scratchpad/dress_icon.png"/>
           <p:cNvPicPr>
             <a:picLocks noChangeAspect="1"/>
           </p:cNvPicPr>
           <p:nvPr/>
         </p:nvPicPr>
         <p:blipFill>
-          <a:blip r:embed="rId12"/>
+          <a:blip r:embed="rId3"/>
           <a:stretch>
             <a:fillRect/>
           </a:stretch>
@@ -19700,7 +20948,7 @@
           <a:bodyPr wrap="square" lIns="0" tIns="0" rIns="0" bIns="0" rtlCol="0" anchor="ctr"/>
           <a:lstStyle/>
           <a:p>
-            <a:pPr algn="ctr" indent="0" marL="0">
+            <a:pPr marL="0" indent="0" algn="ctr">
               <a:buNone/>
             </a:pPr>
             <a:r>
@@ -19739,7 +20987,7 @@
           <a:bodyPr wrap="square" lIns="0" tIns="0" rIns="0" bIns="0" rtlCol="0" anchor="ctr"/>
           <a:lstStyle/>
           <a:p>
-            <a:pPr algn="ctr" indent="0" marL="0">
+            <a:pPr marL="0" indent="0" algn="ctr">
               <a:buNone/>
             </a:pPr>
             <a:r>
@@ -19781,6 +21029,13 @@
             <a:prstDash val="dash"/>
           </a:ln>
         </p:spPr>
+        <p:txBody>
+          <a:bodyPr/>
+          <a:lstStyle/>
+          <a:p>
+            <a:endParaRPr lang="ja-JP" altLang="en-US"/>
+          </a:p>
+        </p:txBody>
       </p:sp>
       <p:sp>
         <p:nvSpPr>
@@ -19808,17 +21063,24 @@
             <a:prstDash val="solid"/>
           </a:ln>
         </p:spPr>
+        <p:txBody>
+          <a:bodyPr/>
+          <a:lstStyle/>
+          <a:p>
+            <a:endParaRPr lang="ja-JP" altLang="en-US"/>
+          </a:p>
+        </p:txBody>
       </p:sp>
       <p:pic>
         <p:nvPicPr>
-          <p:cNvPr id="40" name="Image 12" descr="/tmp/claude-0/-home-user-WeddingInvitations/2c9849ff-e4cc-5683-ac72-2a6c69aa5261/scratchpad/dress_icon.png">    </p:cNvPr>
+          <p:cNvPr id="40" name="Image 12" descr="/tmp/claude-0/-home-user-WeddingInvitations/2c9849ff-e4cc-5683-ac72-2a6c69aa5261/scratchpad/dress_icon.png"/>
           <p:cNvPicPr>
             <a:picLocks noChangeAspect="1"/>
           </p:cNvPicPr>
           <p:nvPr/>
         </p:nvPicPr>
         <p:blipFill>
-          <a:blip r:embed="rId13"/>
+          <a:blip r:embed="rId3"/>
           <a:stretch>
             <a:fillRect/>
           </a:stretch>
@@ -19835,14 +21097,14 @@
       </p:pic>
       <p:pic>
         <p:nvPicPr>
-          <p:cNvPr id="41" name="Image 13" descr="/tmp/claude-0/-home-user-WeddingInvitations/2c9849ff-e4cc-5683-ac72-2a6c69aa5261/scratchpad/dress_icon.png">    </p:cNvPr>
+          <p:cNvPr id="41" name="Image 13" descr="/tmp/claude-0/-home-user-WeddingInvitations/2c9849ff-e4cc-5683-ac72-2a6c69aa5261/scratchpad/dress_icon.png"/>
           <p:cNvPicPr>
             <a:picLocks noChangeAspect="1"/>
           </p:cNvPicPr>
           <p:nvPr/>
         </p:nvPicPr>
         <p:blipFill>
-          <a:blip r:embed="rId14"/>
+          <a:blip r:embed="rId3"/>
           <a:stretch>
             <a:fillRect/>
           </a:stretch>
@@ -19878,7 +21140,7 @@
           <a:bodyPr wrap="square" lIns="0" tIns="0" rIns="0" bIns="0" rtlCol="0" anchor="ctr"/>
           <a:lstStyle/>
           <a:p>
-            <a:pPr algn="ctr" indent="0" marL="0">
+            <a:pPr marL="0" indent="0" algn="ctr">
               <a:buNone/>
             </a:pPr>
             <a:r>
@@ -19917,7 +21179,7 @@
           <a:bodyPr wrap="square" lIns="0" tIns="0" rIns="0" bIns="0" rtlCol="0" anchor="ctr"/>
           <a:lstStyle/>
           <a:p>
-            <a:pPr algn="ctr" indent="0" marL="0">
+            <a:pPr marL="0" indent="0" algn="ctr">
               <a:buNone/>
             </a:pPr>
             <a:r>
@@ -19959,6 +21221,13 @@
             <a:prstDash val="dash"/>
           </a:ln>
         </p:spPr>
+        <p:txBody>
+          <a:bodyPr/>
+          <a:lstStyle/>
+          <a:p>
+            <a:endParaRPr lang="ja-JP" altLang="en-US"/>
+          </a:p>
+        </p:txBody>
       </p:sp>
       <p:sp>
         <p:nvSpPr>
@@ -19986,17 +21255,24 @@
             <a:prstDash val="solid"/>
           </a:ln>
         </p:spPr>
+        <p:txBody>
+          <a:bodyPr/>
+          <a:lstStyle/>
+          <a:p>
+            <a:endParaRPr lang="ja-JP" altLang="en-US"/>
+          </a:p>
+        </p:txBody>
       </p:sp>
       <p:pic>
         <p:nvPicPr>
-          <p:cNvPr id="46" name="Image 14" descr="/tmp/claude-0/-home-user-WeddingInvitations/2c9849ff-e4cc-5683-ac72-2a6c69aa5261/scratchpad/dress_icon.png">    </p:cNvPr>
+          <p:cNvPr id="46" name="Image 14" descr="/tmp/claude-0/-home-user-WeddingInvitations/2c9849ff-e4cc-5683-ac72-2a6c69aa5261/scratchpad/dress_icon.png"/>
           <p:cNvPicPr>
             <a:picLocks noChangeAspect="1"/>
           </p:cNvPicPr>
           <p:nvPr/>
         </p:nvPicPr>
         <p:blipFill>
-          <a:blip r:embed="rId15"/>
+          <a:blip r:embed="rId3"/>
           <a:stretch>
             <a:fillRect/>
           </a:stretch>
@@ -20013,14 +21289,14 @@
       </p:pic>
       <p:pic>
         <p:nvPicPr>
-          <p:cNvPr id="47" name="Image 15" descr="/tmp/claude-0/-home-user-WeddingInvitations/2c9849ff-e4cc-5683-ac72-2a6c69aa5261/scratchpad/dress_icon.png">    </p:cNvPr>
+          <p:cNvPr id="47" name="Image 15" descr="/tmp/claude-0/-home-user-WeddingInvitations/2c9849ff-e4cc-5683-ac72-2a6c69aa5261/scratchpad/dress_icon.png"/>
           <p:cNvPicPr>
             <a:picLocks noChangeAspect="1"/>
           </p:cNvPicPr>
           <p:nvPr/>
         </p:nvPicPr>
         <p:blipFill>
-          <a:blip r:embed="rId16"/>
+          <a:blip r:embed="rId3"/>
           <a:stretch>
             <a:fillRect/>
           </a:stretch>
@@ -20056,7 +21332,7 @@
           <a:bodyPr wrap="square" lIns="0" tIns="0" rIns="0" bIns="0" rtlCol="0" anchor="ctr"/>
           <a:lstStyle/>
           <a:p>
-            <a:pPr algn="ctr" indent="0" marL="0">
+            <a:pPr marL="0" indent="0" algn="ctr">
               <a:buNone/>
             </a:pPr>
             <a:r>
@@ -20095,7 +21371,7 @@
           <a:bodyPr wrap="square" lIns="0" tIns="0" rIns="0" bIns="0" rtlCol="0" anchor="ctr"/>
           <a:lstStyle/>
           <a:p>
-            <a:pPr algn="ctr" indent="0" marL="0">
+            <a:pPr marL="0" indent="0" algn="ctr">
               <a:buNone/>
             </a:pPr>
             <a:r>
@@ -20137,6 +21413,13 @@
             <a:prstDash val="dash"/>
           </a:ln>
         </p:spPr>
+        <p:txBody>
+          <a:bodyPr/>
+          <a:lstStyle/>
+          <a:p>
+            <a:endParaRPr lang="ja-JP" altLang="en-US"/>
+          </a:p>
+        </p:txBody>
       </p:sp>
       <p:sp>
         <p:nvSpPr>
@@ -20162,6 +21445,13 @@
             <a:prstDash val="dash"/>
           </a:ln>
         </p:spPr>
+        <p:txBody>
+          <a:bodyPr/>
+          <a:lstStyle/>
+          <a:p>
+            <a:endParaRPr lang="ja-JP" altLang="en-US"/>
+          </a:p>
+        </p:txBody>
       </p:sp>
       <p:sp>
         <p:nvSpPr>
@@ -20187,6 +21477,13 @@
             <a:prstDash val="dash"/>
           </a:ln>
         </p:spPr>
+        <p:txBody>
+          <a:bodyPr/>
+          <a:lstStyle/>
+          <a:p>
+            <a:endParaRPr lang="ja-JP" altLang="en-US"/>
+          </a:p>
+        </p:txBody>
       </p:sp>
       <p:sp>
         <p:nvSpPr>
@@ -20212,6 +21509,13 @@
             <a:prstDash val="dash"/>
           </a:ln>
         </p:spPr>
+        <p:txBody>
+          <a:bodyPr/>
+          <a:lstStyle/>
+          <a:p>
+            <a:endParaRPr lang="ja-JP" altLang="en-US"/>
+          </a:p>
+        </p:txBody>
       </p:sp>
       <p:sp>
         <p:nvSpPr>
@@ -20237,6 +21541,13 @@
             <a:prstDash val="dash"/>
           </a:ln>
         </p:spPr>
+        <p:txBody>
+          <a:bodyPr/>
+          <a:lstStyle/>
+          <a:p>
+            <a:endParaRPr lang="ja-JP" altLang="en-US"/>
+          </a:p>
+        </p:txBody>
       </p:sp>
       <p:sp>
         <p:nvSpPr>
@@ -20262,6 +21573,13 @@
             <a:prstDash val="dash"/>
           </a:ln>
         </p:spPr>
+        <p:txBody>
+          <a:bodyPr/>
+          <a:lstStyle/>
+          <a:p>
+            <a:endParaRPr lang="ja-JP" altLang="en-US"/>
+          </a:p>
+        </p:txBody>
       </p:sp>
       <p:sp>
         <p:nvSpPr>
@@ -20287,6 +21605,13 @@
             <a:prstDash val="dash"/>
           </a:ln>
         </p:spPr>
+        <p:txBody>
+          <a:bodyPr/>
+          <a:lstStyle/>
+          <a:p>
+            <a:endParaRPr lang="ja-JP" altLang="en-US"/>
+          </a:p>
+        </p:txBody>
       </p:sp>
       <p:sp>
         <p:nvSpPr>
@@ -20312,6 +21637,13 @@
             <a:prstDash val="dash"/>
           </a:ln>
         </p:spPr>
+        <p:txBody>
+          <a:bodyPr/>
+          <a:lstStyle/>
+          <a:p>
+            <a:endParaRPr lang="ja-JP" altLang="en-US"/>
+          </a:p>
+        </p:txBody>
       </p:sp>
     </p:spTree>
   </p:cSld>
@@ -20614,4 +21946,319 @@
     </a:ext>
   </a:extLst>
 </a:theme>
+</file>
+
+<file path=ppt/theme/theme2.xml><?xml version="1.0" encoding="utf-8"?>
+<a:theme xmlns:a="http://schemas.openxmlformats.org/drawingml/2006/main" name="Office テーマ">
+  <a:themeElements>
+    <a:clrScheme name="Office">
+      <a:dk1>
+        <a:sysClr val="windowText" lastClr="000000"/>
+      </a:dk1>
+      <a:lt1>
+        <a:sysClr val="window" lastClr="FFFFFF"/>
+      </a:lt1>
+      <a:dk2>
+        <a:srgbClr val="0E2841"/>
+      </a:dk2>
+      <a:lt2>
+        <a:srgbClr val="E8E8E8"/>
+      </a:lt2>
+      <a:accent1>
+        <a:srgbClr val="156082"/>
+      </a:accent1>
+      <a:accent2>
+        <a:srgbClr val="E97132"/>
+      </a:accent2>
+      <a:accent3>
+        <a:srgbClr val="196B24"/>
+      </a:accent3>
+      <a:accent4>
+        <a:srgbClr val="0F9ED5"/>
+      </a:accent4>
+      <a:accent5>
+        <a:srgbClr val="A02B93"/>
+      </a:accent5>
+      <a:accent6>
+        <a:srgbClr val="4EA72E"/>
+      </a:accent6>
+      <a:hlink>
+        <a:srgbClr val="467886"/>
+      </a:hlink>
+      <a:folHlink>
+        <a:srgbClr val="96607D"/>
+      </a:folHlink>
+    </a:clrScheme>
+    <a:fontScheme name="Office">
+      <a:majorFont>
+        <a:latin typeface="游ゴシック Light" panose="02110004020202020204"/>
+        <a:ea typeface=""/>
+        <a:cs typeface=""/>
+        <a:font script="Jpan" typeface="游ゴシック Light"/>
+        <a:font script="Hang" typeface="맑은 고딕"/>
+        <a:font script="Hans" typeface="等线 Light"/>
+        <a:font script="Hant" typeface="新細明體"/>
+        <a:font script="Arab" typeface="Times New Roman"/>
+        <a:font script="Hebr" typeface="Times New Roman"/>
+        <a:font script="Thai" typeface="Angsana New"/>
+        <a:font script="Ethi" typeface="Nyala"/>
+        <a:font script="Beng" typeface="Vrinda"/>
+        <a:font script="Gujr" typeface="Shruti"/>
+        <a:font script="Khmr" typeface="MoolBoran"/>
+        <a:font script="Knda" typeface="Tunga"/>
+        <a:font script="Guru" typeface="Raavi"/>
+        <a:font script="Cans" typeface="Euphemia"/>
+        <a:font script="Cher" typeface="Plantagenet Cherokee"/>
+        <a:font script="Yiii" typeface="Microsoft Yi Baiti"/>
+        <a:font script="Tibt" typeface="Microsoft Himalaya"/>
+        <a:font script="Thaa" typeface="MV Boli"/>
+        <a:font script="Deva" typeface="Mangal"/>
+        <a:font script="Telu" typeface="Gautami"/>
+        <a:font script="Taml" typeface="Latha"/>
+        <a:font script="Syrc" typeface="Estrangelo Edessa"/>
+        <a:font script="Orya" typeface="Kalinga"/>
+        <a:font script="Mlym" typeface="Kartika"/>
+        <a:font script="Laoo" typeface="DokChampa"/>
+        <a:font script="Sinh" typeface="Iskoola Pota"/>
+        <a:font script="Mong" typeface="Mongolian Baiti"/>
+        <a:font script="Viet" typeface="Times New Roman"/>
+        <a:font script="Uigh" typeface="Microsoft Uighur"/>
+        <a:font script="Geor" typeface="Sylfaen"/>
+        <a:font script="Armn" typeface="Arial"/>
+        <a:font script="Bugi" typeface="Leelawadee UI"/>
+        <a:font script="Bopo" typeface="Microsoft JhengHei"/>
+        <a:font script="Java" typeface="Javanese Text"/>
+        <a:font script="Lisu" typeface="Segoe UI"/>
+        <a:font script="Mymr" typeface="Myanmar Text"/>
+        <a:font script="Nkoo" typeface="Ebrima"/>
+        <a:font script="Olck" typeface="Nirmala UI"/>
+        <a:font script="Osma" typeface="Ebrima"/>
+        <a:font script="Phag" typeface="Phagspa"/>
+        <a:font script="Syrn" typeface="Estrangelo Edessa"/>
+        <a:font script="Syrj" typeface="Estrangelo Edessa"/>
+        <a:font script="Syre" typeface="Estrangelo Edessa"/>
+        <a:font script="Sora" typeface="Nirmala UI"/>
+        <a:font script="Tale" typeface="Microsoft Tai Le"/>
+        <a:font script="Talu" typeface="Microsoft New Tai Lue"/>
+        <a:font script="Tfng" typeface="Ebrima"/>
+      </a:majorFont>
+      <a:minorFont>
+        <a:latin typeface="游ゴシック" panose="02110004020202020204"/>
+        <a:ea typeface=""/>
+        <a:cs typeface=""/>
+        <a:font script="Jpan" typeface="游ゴシック"/>
+        <a:font script="Hang" typeface="맑은 고딕"/>
+        <a:font script="Hans" typeface="等线"/>
+        <a:font script="Hant" typeface="新細明體"/>
+        <a:font script="Arab" typeface="Arial"/>
+        <a:font script="Hebr" typeface="Arial"/>
+        <a:font script="Thai" typeface="Cordia New"/>
+        <a:font script="Ethi" typeface="Nyala"/>
+        <a:font script="Beng" typeface="Vrinda"/>
+        <a:font script="Gujr" typeface="Shruti"/>
+        <a:font script="Khmr" typeface="DaunPenh"/>
+        <a:font script="Knda" typeface="Tunga"/>
+        <a:font script="Guru" typeface="Raavi"/>
+        <a:font script="Cans" typeface="Euphemia"/>
+        <a:font script="Cher" typeface="Plantagenet Cherokee"/>
+        <a:font script="Yiii" typeface="Microsoft Yi Baiti"/>
+        <a:font script="Tibt" typeface="Microsoft Himalaya"/>
+        <a:font script="Thaa" typeface="MV Boli"/>
+        <a:font script="Deva" typeface="Mangal"/>
+        <a:font script="Telu" typeface="Gautami"/>
+        <a:font script="Taml" typeface="Latha"/>
+        <a:font script="Syrc" typeface="Estrangelo Edessa"/>
+        <a:font script="Orya" typeface="Kalinga"/>
+        <a:font script="Mlym" typeface="Kartika"/>
+        <a:font script="Laoo" typeface="DokChampa"/>
+        <a:font script="Sinh" typeface="Iskoola Pota"/>
+        <a:font script="Mong" typeface="Mongolian Baiti"/>
+        <a:font script="Viet" typeface="Arial"/>
+        <a:font script="Uigh" typeface="Microsoft Uighur"/>
+        <a:font script="Geor" typeface="Sylfaen"/>
+        <a:font script="Armn" typeface="Arial"/>
+        <a:font script="Bugi" typeface="Leelawadee UI"/>
+        <a:font script="Bopo" typeface="Microsoft JhengHei"/>
+        <a:font script="Java" typeface="Javanese Text"/>
+        <a:font script="Lisu" typeface="Segoe UI"/>
+        <a:font script="Mymr" typeface="Myanmar Text"/>
+        <a:font script="Nkoo" typeface="Ebrima"/>
+        <a:font script="Olck" typeface="Nirmala UI"/>
+        <a:font script="Osma" typeface="Ebrima"/>
+        <a:font script="Phag" typeface="Phagspa"/>
+        <a:font script="Syrn" typeface="Estrangelo Edessa"/>
+        <a:font script="Syrj" typeface="Estrangelo Edessa"/>
+        <a:font script="Syre" typeface="Estrangelo Edessa"/>
+        <a:font script="Sora" typeface="Nirmala UI"/>
+        <a:font script="Tale" typeface="Microsoft Tai Le"/>
+        <a:font script="Talu" typeface="Microsoft New Tai Lue"/>
+        <a:font script="Tfng" typeface="Ebrima"/>
+      </a:minorFont>
+    </a:fontScheme>
+    <a:fmtScheme name="Office">
+      <a:fillStyleLst>
+        <a:solidFill>
+          <a:schemeClr val="phClr"/>
+        </a:solidFill>
+        <a:gradFill rotWithShape="1">
+          <a:gsLst>
+            <a:gs pos="0">
+              <a:schemeClr val="phClr">
+                <a:lumMod val="110000"/>
+                <a:satMod val="105000"/>
+                <a:tint val="67000"/>
+              </a:schemeClr>
+            </a:gs>
+            <a:gs pos="50000">
+              <a:schemeClr val="phClr">
+                <a:lumMod val="105000"/>
+                <a:satMod val="103000"/>
+                <a:tint val="73000"/>
+              </a:schemeClr>
+            </a:gs>
+            <a:gs pos="100000">
+              <a:schemeClr val="phClr">
+                <a:lumMod val="105000"/>
+                <a:satMod val="109000"/>
+                <a:tint val="81000"/>
+              </a:schemeClr>
+            </a:gs>
+          </a:gsLst>
+          <a:lin ang="5400000" scaled="0"/>
+        </a:gradFill>
+        <a:gradFill rotWithShape="1">
+          <a:gsLst>
+            <a:gs pos="0">
+              <a:schemeClr val="phClr">
+                <a:satMod val="103000"/>
+                <a:lumMod val="102000"/>
+                <a:tint val="94000"/>
+              </a:schemeClr>
+            </a:gs>
+            <a:gs pos="50000">
+              <a:schemeClr val="phClr">
+                <a:satMod val="110000"/>
+                <a:lumMod val="100000"/>
+                <a:shade val="100000"/>
+              </a:schemeClr>
+            </a:gs>
+            <a:gs pos="100000">
+              <a:schemeClr val="phClr">
+                <a:lumMod val="99000"/>
+                <a:satMod val="120000"/>
+                <a:shade val="78000"/>
+              </a:schemeClr>
+            </a:gs>
+          </a:gsLst>
+          <a:lin ang="5400000" scaled="0"/>
+        </a:gradFill>
+      </a:fillStyleLst>
+      <a:lnStyleLst>
+        <a:ln w="12700" cap="flat" cmpd="sng" algn="ctr">
+          <a:solidFill>
+            <a:schemeClr val="phClr"/>
+          </a:solidFill>
+          <a:prstDash val="solid"/>
+          <a:miter lim="800000"/>
+        </a:ln>
+        <a:ln w="19050" cap="flat" cmpd="sng" algn="ctr">
+          <a:solidFill>
+            <a:schemeClr val="phClr"/>
+          </a:solidFill>
+          <a:prstDash val="solid"/>
+          <a:miter lim="800000"/>
+        </a:ln>
+        <a:ln w="25400" cap="flat" cmpd="sng" algn="ctr">
+          <a:solidFill>
+            <a:schemeClr val="phClr"/>
+          </a:solidFill>
+          <a:prstDash val="solid"/>
+          <a:miter lim="800000"/>
+        </a:ln>
+      </a:lnStyleLst>
+      <a:effectStyleLst>
+        <a:effectStyle>
+          <a:effectLst/>
+        </a:effectStyle>
+        <a:effectStyle>
+          <a:effectLst/>
+        </a:effectStyle>
+        <a:effectStyle>
+          <a:effectLst>
+            <a:outerShdw blurRad="57150" dist="19050" dir="5400000" algn="ctr" rotWithShape="0">
+              <a:srgbClr val="000000">
+                <a:alpha val="63000"/>
+              </a:srgbClr>
+            </a:outerShdw>
+          </a:effectLst>
+        </a:effectStyle>
+      </a:effectStyleLst>
+      <a:bgFillStyleLst>
+        <a:solidFill>
+          <a:schemeClr val="phClr"/>
+        </a:solidFill>
+        <a:solidFill>
+          <a:schemeClr val="phClr">
+            <a:tint val="95000"/>
+            <a:satMod val="170000"/>
+          </a:schemeClr>
+        </a:solidFill>
+        <a:gradFill rotWithShape="1">
+          <a:gsLst>
+            <a:gs pos="0">
+              <a:schemeClr val="phClr">
+                <a:tint val="93000"/>
+                <a:satMod val="150000"/>
+                <a:shade val="98000"/>
+                <a:lumMod val="102000"/>
+              </a:schemeClr>
+            </a:gs>
+            <a:gs pos="50000">
+              <a:schemeClr val="phClr">
+                <a:tint val="98000"/>
+                <a:satMod val="130000"/>
+                <a:shade val="90000"/>
+                <a:lumMod val="103000"/>
+              </a:schemeClr>
+            </a:gs>
+            <a:gs pos="100000">
+              <a:schemeClr val="phClr">
+                <a:shade val="63000"/>
+                <a:satMod val="120000"/>
+              </a:schemeClr>
+            </a:gs>
+          </a:gsLst>
+          <a:lin ang="5400000" scaled="0"/>
+        </a:gradFill>
+      </a:bgFillStyleLst>
+    </a:fmtScheme>
+  </a:themeElements>
+  <a:objectDefaults>
+    <a:lnDef>
+      <a:spPr/>
+      <a:bodyPr/>
+      <a:lstStyle/>
+      <a:style>
+        <a:lnRef idx="2">
+          <a:schemeClr val="accent1"/>
+        </a:lnRef>
+        <a:fillRef idx="0">
+          <a:schemeClr val="accent1"/>
+        </a:fillRef>
+        <a:effectRef idx="1">
+          <a:schemeClr val="accent1"/>
+        </a:effectRef>
+        <a:fontRef idx="minor">
+          <a:schemeClr val="tx1"/>
+        </a:fontRef>
+      </a:style>
+    </a:lnDef>
+  </a:objectDefaults>
+  <a:extraClrSchemeLst/>
+  <a:extLst>
+    <a:ext uri="{05A4C25C-085E-4340-85A3-A5531E510DB2}">
+      <thm15:themeFamily xmlns:thm15="http://schemas.microsoft.com/office/thememl/2012/main" name="Office Theme" id="{2E142A2C-CD16-42D6-873A-C26D2A0506FA}" vid="{1BDDFF52-6CD6-40A5-AB3C-68EB2F1E4D0A}"/>
+    </a:ext>
+  </a:extLst>
+</a:theme>
 </file>
--- a/voting_ballots.pptx
+++ b/voting_ballots.pptx
@@ -10274,7 +10274,29 @@
                 <a:ea typeface="Yu Gothic" pitchFamily="34" charset="-122"/>
                 <a:cs typeface="Yu Gothic" pitchFamily="34" charset="-120"/>
               </a:rPr>
-              <a:t>濱本 泰延 様</a:t>
+              <a:t>濱</a:t>
+            </a:r>
+            <a:r>
+              <a:rPr lang="ja-JP" altLang="en-US" sz="2200" b="1" dirty="0">
+                <a:solidFill>
+                  <a:srgbClr val="1F3A5F"/>
+                </a:solidFill>
+                <a:latin typeface="Yu Gothic" pitchFamily="34" charset="0"/>
+                <a:ea typeface="Yu Gothic" pitchFamily="34" charset="-122"/>
+                <a:cs typeface="Yu Gothic" pitchFamily="34" charset="-120"/>
+              </a:rPr>
+              <a:t>岡</a:t>
+            </a:r>
+            <a:r>
+              <a:rPr lang="en-US" sz="2200" b="1" dirty="0">
+                <a:solidFill>
+                  <a:srgbClr val="1F3A5F"/>
+                </a:solidFill>
+                <a:latin typeface="Yu Gothic" pitchFamily="34" charset="0"/>
+                <a:ea typeface="Yu Gothic" pitchFamily="34" charset="-122"/>
+                <a:cs typeface="Yu Gothic" pitchFamily="34" charset="-120"/>
+              </a:rPr>
+              <a:t> 泰延 様</a:t>
             </a:r>
             <a:endParaRPr lang="en-US" sz="2200" dirty="0"/>
           </a:p>
@@ -10466,7 +10488,29 @@
                 <a:ea typeface="Yu Gothic" pitchFamily="34" charset="-122"/>
                 <a:cs typeface="Yu Gothic" pitchFamily="34" charset="-120"/>
               </a:rPr>
-              <a:t>濱本 俊宏 様</a:t>
+              <a:t>濱</a:t>
+            </a:r>
+            <a:r>
+              <a:rPr lang="ja-JP" altLang="en-US" sz="2200" b="1" dirty="0">
+                <a:solidFill>
+                  <a:srgbClr val="1F3A5F"/>
+                </a:solidFill>
+                <a:latin typeface="Yu Gothic" pitchFamily="34" charset="0"/>
+                <a:ea typeface="Yu Gothic" pitchFamily="34" charset="-122"/>
+                <a:cs typeface="Yu Gothic" pitchFamily="34" charset="-120"/>
+              </a:rPr>
+              <a:t>岡</a:t>
+            </a:r>
+            <a:r>
+              <a:rPr lang="en-US" sz="2200" b="1" dirty="0">
+                <a:solidFill>
+                  <a:srgbClr val="1F3A5F"/>
+                </a:solidFill>
+                <a:latin typeface="Yu Gothic" pitchFamily="34" charset="0"/>
+                <a:ea typeface="Yu Gothic" pitchFamily="34" charset="-122"/>
+                <a:cs typeface="Yu Gothic" pitchFamily="34" charset="-120"/>
+              </a:rPr>
+              <a:t> 俊宏 様</a:t>
             </a:r>
             <a:endParaRPr lang="en-US" sz="2200" dirty="0"/>
           </a:p>
@@ -20415,6 +20459,17 @@
               <a:buNone/>
             </a:pPr>
             <a:r>
+              <a:rPr lang="ja-JP" altLang="en-US" sz="2200" b="1" dirty="0">
+                <a:solidFill>
+                  <a:srgbClr val="5A2D3E"/>
+                </a:solidFill>
+                <a:latin typeface="Yu Gothic" pitchFamily="34" charset="0"/>
+                <a:ea typeface="Yu Gothic" pitchFamily="34" charset="-122"/>
+                <a:cs typeface="Yu Gothic" pitchFamily="34" charset="-120"/>
+              </a:rPr>
+              <a:t>濱岡</a:t>
+            </a:r>
+            <a:r>
               <a:rPr lang="en-US" sz="2200" b="1" dirty="0">
                 <a:solidFill>
                   <a:srgbClr val="5A2D3E"/>
@@ -20423,7 +20478,7 @@
                 <a:ea typeface="Yu Gothic" pitchFamily="34" charset="-122"/>
                 <a:cs typeface="Yu Gothic" pitchFamily="34" charset="-120"/>
               </a:rPr>
-              <a:t>濱本 泰延 様</a:t>
+              <a:t> 泰延 様</a:t>
             </a:r>
             <a:endParaRPr lang="en-US" sz="2200" dirty="0"/>
           </a:p>
@@ -20607,6 +20662,17 @@
               <a:buNone/>
             </a:pPr>
             <a:r>
+              <a:rPr lang="ja-JP" altLang="en-US" sz="2200" b="1" dirty="0">
+                <a:solidFill>
+                  <a:srgbClr val="5A2D3E"/>
+                </a:solidFill>
+                <a:latin typeface="Yu Gothic" pitchFamily="34" charset="0"/>
+                <a:ea typeface="Yu Gothic" pitchFamily="34" charset="-122"/>
+                <a:cs typeface="Yu Gothic" pitchFamily="34" charset="-120"/>
+              </a:rPr>
+              <a:t>濱岡</a:t>
+            </a:r>
+            <a:r>
               <a:rPr lang="en-US" sz="2200" b="1" dirty="0">
                 <a:solidFill>
                   <a:srgbClr val="5A2D3E"/>
@@ -20615,7 +20681,7 @@
                 <a:ea typeface="Yu Gothic" pitchFamily="34" charset="-122"/>
                 <a:cs typeface="Yu Gothic" pitchFamily="34" charset="-120"/>
               </a:rPr>
-              <a:t>濱本 俊宏 様</a:t>
+              <a:t> 俊宏 様</a:t>
             </a:r>
             <a:endParaRPr lang="en-US" sz="2200" dirty="0"/>
           </a:p>
